--- a/public/wedding-mentor-files/S2_Atracao.pptx
+++ b/public/wedding-mentor-files/S2_Atracao.pptx
@@ -2548,7 +2548,7 @@
     <p:bg>
       <p:bgPr>
         <a:solidFill>
-          <a:srgbClr val="0B1D33"/>
+          <a:srgbClr val="F8F6F3"/>
         </a:solidFill>
       </p:bgPr>
     </p:bg>
@@ -2566,223 +2566,164 @@
           <a:chExt cx="0" cy="0"/>
         </a:xfrm>
       </p:grpSpPr>
-      <p:sp>
-        <p:nvSpPr>
-          <p:cNvPr id="2" name="Shape 0"/>
-          <p:cNvSpPr/>
-          <p:nvPr/>
-        </p:nvSpPr>
-        <p:spPr>
-          <a:xfrm>
-            <a:off x="8046720" y="-1645920"/>
-            <a:ext cx="5943600" cy="5943600"/>
-          </a:xfrm>
-          <a:prstGeom prst="ellipse">
-            <a:avLst/>
-          </a:prstGeom>
-          <a:solidFill>
-            <a:srgbClr val="4A9EFF">
-              <a:alpha val="14000"/>
-            </a:srgbClr>
-          </a:solidFill>
-          <a:ln/>
-        </p:spPr>
-      </p:sp>
-      <p:sp>
-        <p:nvSpPr>
-          <p:cNvPr id="3" name="Shape 1"/>
-          <p:cNvSpPr/>
-          <p:nvPr/>
-        </p:nvSpPr>
-        <p:spPr>
-          <a:xfrm>
-            <a:off x="-1828800" y="4389120"/>
-            <a:ext cx="5029200" cy="5029200"/>
-          </a:xfrm>
-          <a:prstGeom prst="ellipse">
-            <a:avLst/>
-          </a:prstGeom>
-          <a:solidFill>
-            <a:srgbClr val="C9A961">
-              <a:alpha val="10000"/>
-            </a:srgbClr>
-          </a:solidFill>
-          <a:ln/>
-        </p:spPr>
-      </p:sp>
-      <p:sp>
-        <p:nvSpPr>
-          <p:cNvPr id="4" name="Text 2"/>
-          <p:cNvSpPr/>
-          <p:nvPr/>
-        </p:nvSpPr>
-        <p:spPr>
-          <a:xfrm>
-            <a:off x="640080" y="548640"/>
-            <a:ext cx="7315200" cy="365760"/>
-          </a:xfrm>
-          <a:prstGeom prst="rect">
-            <a:avLst/>
-          </a:prstGeom>
-          <a:noFill/>
-          <a:ln/>
-        </p:spPr>
-        <p:txBody>
-          <a:bodyPr wrap="square" lIns="0" tIns="0" rIns="0" bIns="0" rtlCol="0" anchor="ctr"/>
-          <a:lstStyle/>
-          <a:p>
-            <a:pPr indent="0" marL="0">
-              <a:buNone/>
-            </a:pPr>
-            <a:r>
-              <a:rPr lang="en-US" sz="1300" b="1" spc="500" kern="0" dirty="0">
-                <a:solidFill>
-                  <a:srgbClr val="9FB2C9"/>
+      <p:pic>
+        <p:nvPicPr>
+          <p:cNvPr id="2" name="Image 0" descr="preencoded.png">    </p:cNvPr>
+          <p:cNvPicPr>
+            <a:picLocks noChangeAspect="1"/>
+          </p:cNvPicPr>
+          <p:nvPr/>
+        </p:nvPicPr>
+        <p:blipFill>
+          <a:blip r:embed="rId1"/>
+          <a:stretch>
+            <a:fillRect/>
+          </a:stretch>
+        </p:blipFill>
+        <p:spPr>
+          <a:xfrm>
+            <a:off x="603504" y="457200"/>
+            <a:ext cx="1371600" cy="1415143"/>
+          </a:xfrm>
+          <a:prstGeom prst="rect">
+            <a:avLst/>
+          </a:prstGeom>
+        </p:spPr>
+      </p:pic>
+      <p:sp>
+        <p:nvSpPr>
+          <p:cNvPr id="3" name="Text 0"/>
+          <p:cNvSpPr/>
+          <p:nvPr/>
+        </p:nvSpPr>
+        <p:spPr>
+          <a:xfrm>
+            <a:off x="640080" y="2286000"/>
+            <a:ext cx="5486400" cy="457200"/>
+          </a:xfrm>
+          <a:prstGeom prst="rect">
+            <a:avLst/>
+          </a:prstGeom>
+          <a:noFill/>
+          <a:ln/>
+        </p:spPr>
+        <p:txBody>
+          <a:bodyPr wrap="square" lIns="0" tIns="0" rIns="0" bIns="0" rtlCol="0" anchor="ctr"/>
+          <a:lstStyle/>
+          <a:p>
+            <a:pPr indent="0" marL="0">
+              <a:buNone/>
+            </a:pPr>
+            <a:r>
+              <a:rPr lang="en-US" sz="1500" b="1" spc="600" kern="0" dirty="0">
+                <a:solidFill>
+                  <a:srgbClr val="B1937E"/>
                 </a:solidFill>
                 <a:latin typeface="Calibri" pitchFamily="34" charset="0"/>
                 <a:ea typeface="Calibri" pitchFamily="34" charset="-122"/>
                 <a:cs typeface="Calibri" pitchFamily="34" charset="-120"/>
               </a:rPr>
-              <a:t>MENTORIA · RL</a:t>
-            </a:r>
-            <a:endParaRPr lang="en-US" sz="1300" dirty="0"/>
-          </a:p>
-        </p:txBody>
-      </p:sp>
-      <p:sp>
-        <p:nvSpPr>
-          <p:cNvPr id="5" name="Text 3"/>
-          <p:cNvSpPr/>
-          <p:nvPr/>
-        </p:nvSpPr>
-        <p:spPr>
-          <a:xfrm>
-            <a:off x="640080" y="2286000"/>
-            <a:ext cx="5486400" cy="457200"/>
-          </a:xfrm>
-          <a:prstGeom prst="rect">
-            <a:avLst/>
-          </a:prstGeom>
-          <a:noFill/>
-          <a:ln/>
-        </p:spPr>
-        <p:txBody>
-          <a:bodyPr wrap="square" lIns="0" tIns="0" rIns="0" bIns="0" rtlCol="0" anchor="ctr"/>
-          <a:lstStyle/>
-          <a:p>
-            <a:pPr indent="0" marL="0">
-              <a:buNone/>
-            </a:pPr>
-            <a:r>
-              <a:rPr lang="en-US" sz="1500" b="1" spc="600" kern="0" dirty="0">
-                <a:solidFill>
-                  <a:srgbClr val="C9A961"/>
+              <a:t>SESSÃO 02</a:t>
+            </a:r>
+            <a:endParaRPr lang="en-US" sz="1500" dirty="0"/>
+          </a:p>
+        </p:txBody>
+      </p:sp>
+      <p:sp>
+        <p:nvSpPr>
+          <p:cNvPr id="4" name="Text 1"/>
+          <p:cNvSpPr/>
+          <p:nvPr/>
+        </p:nvSpPr>
+        <p:spPr>
+          <a:xfrm>
+            <a:off x="603504" y="2724912"/>
+            <a:ext cx="10058400" cy="2011680"/>
+          </a:xfrm>
+          <a:prstGeom prst="rect">
+            <a:avLst/>
+          </a:prstGeom>
+          <a:noFill/>
+          <a:ln/>
+        </p:spPr>
+        <p:txBody>
+          <a:bodyPr wrap="square" lIns="0" tIns="0" rIns="0" bIns="0" rtlCol="0" anchor="ctr"/>
+          <a:lstStyle/>
+          <a:p>
+            <a:pPr indent="0" marL="0">
+              <a:lnSpc>
+                <a:spcPct val="100000"/>
+              </a:lnSpc>
+              <a:buNone/>
+            </a:pPr>
+            <a:r>
+              <a:rPr lang="en-US" sz="4400" b="1" dirty="0">
+                <a:solidFill>
+                  <a:srgbClr val="33302B"/>
+                </a:solidFill>
+                <a:latin typeface="Georgia" pitchFamily="34" charset="0"/>
+                <a:ea typeface="Georgia" pitchFamily="34" charset="-122"/>
+                <a:cs typeface="Georgia" pitchFamily="34" charset="-120"/>
+              </a:rPr>
+              <a:t>Como Chegar</a:t>
+            </a:r>
+            <a:endParaRPr lang="en-US" sz="4400" dirty="0"/>
+          </a:p>
+          <a:p>
+            <a:pPr indent="0" marL="0">
+              <a:lnSpc>
+                <a:spcPct val="100000"/>
+              </a:lnSpc>
+              <a:buNone/>
+            </a:pPr>
+            <a:r>
+              <a:rPr lang="en-US" sz="4400" b="1" dirty="0">
+                <a:solidFill>
+                  <a:srgbClr val="33302B"/>
+                </a:solidFill>
+                <a:latin typeface="Georgia" pitchFamily="34" charset="0"/>
+                <a:ea typeface="Georgia" pitchFamily="34" charset="-122"/>
+                <a:cs typeface="Georgia" pitchFamily="34" charset="-120"/>
+              </a:rPr>
+              <a:t>ao Cliente</a:t>
+            </a:r>
+            <a:endParaRPr lang="en-US" sz="4400" dirty="0"/>
+          </a:p>
+        </p:txBody>
+      </p:sp>
+      <p:sp>
+        <p:nvSpPr>
+          <p:cNvPr id="5" name="Text 2"/>
+          <p:cNvSpPr/>
+          <p:nvPr/>
+        </p:nvSpPr>
+        <p:spPr>
+          <a:xfrm>
+            <a:off x="640080" y="4983480"/>
+            <a:ext cx="8229600" cy="822960"/>
+          </a:xfrm>
+          <a:prstGeom prst="rect">
+            <a:avLst/>
+          </a:prstGeom>
+          <a:noFill/>
+          <a:ln/>
+        </p:spPr>
+        <p:txBody>
+          <a:bodyPr wrap="square" lIns="0" tIns="0" rIns="0" bIns="0" rtlCol="0" anchor="ctr"/>
+          <a:lstStyle/>
+          <a:p>
+            <a:pPr indent="0" marL="0">
+              <a:buNone/>
+            </a:pPr>
+            <a:r>
+              <a:rPr lang="en-US" sz="1700" dirty="0">
+                <a:solidFill>
+                  <a:srgbClr val="8A7E72"/>
                 </a:solidFill>
                 <a:latin typeface="Calibri" pitchFamily="34" charset="0"/>
                 <a:ea typeface="Calibri" pitchFamily="34" charset="-122"/>
                 <a:cs typeface="Calibri" pitchFamily="34" charset="-120"/>
               </a:rPr>
-              <a:t>SESSÃO 02</a:t>
-            </a:r>
-            <a:endParaRPr lang="en-US" sz="1500" dirty="0"/>
-          </a:p>
-        </p:txBody>
-      </p:sp>
-      <p:sp>
-        <p:nvSpPr>
-          <p:cNvPr id="6" name="Text 4"/>
-          <p:cNvSpPr/>
-          <p:nvPr/>
-        </p:nvSpPr>
-        <p:spPr>
-          <a:xfrm>
-            <a:off x="603504" y="2724912"/>
-            <a:ext cx="10058400" cy="2011680"/>
-          </a:xfrm>
-          <a:prstGeom prst="rect">
-            <a:avLst/>
-          </a:prstGeom>
-          <a:noFill/>
-          <a:ln/>
-        </p:spPr>
-        <p:txBody>
-          <a:bodyPr wrap="square" lIns="0" tIns="0" rIns="0" bIns="0" rtlCol="0" anchor="ctr"/>
-          <a:lstStyle/>
-          <a:p>
-            <a:pPr indent="0" marL="0">
-              <a:lnSpc>
-                <a:spcPct val="100000"/>
-              </a:lnSpc>
-              <a:buNone/>
-            </a:pPr>
-            <a:r>
-              <a:rPr lang="en-US" sz="5000" b="1" dirty="0">
-                <a:solidFill>
-                  <a:srgbClr val="EAF1FA"/>
-                </a:solidFill>
-                <a:latin typeface="Bookman Old Style" pitchFamily="34" charset="0"/>
-                <a:ea typeface="Bookman Old Style" pitchFamily="34" charset="-122"/>
-                <a:cs typeface="Bookman Old Style" pitchFamily="34" charset="-120"/>
-              </a:rPr>
-              <a:t>Como Chegar</a:t>
-            </a:r>
-            <a:endParaRPr lang="en-US" sz="5000" dirty="0"/>
-          </a:p>
-          <a:p>
-            <a:pPr indent="0" marL="0">
-              <a:lnSpc>
-                <a:spcPct val="100000"/>
-              </a:lnSpc>
-              <a:buNone/>
-            </a:pPr>
-            <a:r>
-              <a:rPr lang="en-US" sz="5000" b="1" dirty="0">
-                <a:solidFill>
-                  <a:srgbClr val="EAF1FA"/>
-                </a:solidFill>
-                <a:latin typeface="Bookman Old Style" pitchFamily="34" charset="0"/>
-                <a:ea typeface="Bookman Old Style" pitchFamily="34" charset="-122"/>
-                <a:cs typeface="Bookman Old Style" pitchFamily="34" charset="-120"/>
-              </a:rPr>
-              <a:t>ao Cliente</a:t>
-            </a:r>
-            <a:endParaRPr lang="en-US" sz="5000" dirty="0"/>
-          </a:p>
-        </p:txBody>
-      </p:sp>
-      <p:sp>
-        <p:nvSpPr>
-          <p:cNvPr id="7" name="Text 5"/>
-          <p:cNvSpPr/>
-          <p:nvPr/>
-        </p:nvSpPr>
-        <p:spPr>
-          <a:xfrm>
-            <a:off x="640080" y="4983480"/>
-            <a:ext cx="8229600" cy="822960"/>
-          </a:xfrm>
-          <a:prstGeom prst="rect">
-            <a:avLst/>
-          </a:prstGeom>
-          <a:noFill/>
-          <a:ln/>
-        </p:spPr>
-        <p:txBody>
-          <a:bodyPr wrap="square" lIns="0" tIns="0" rIns="0" bIns="0" rtlCol="0" anchor="ctr"/>
-          <a:lstStyle/>
-          <a:p>
-            <a:pPr indent="0" marL="0">
-              <a:buNone/>
-            </a:pPr>
-            <a:r>
-              <a:rPr lang="en-US" sz="1700" dirty="0">
-                <a:solidFill>
-                  <a:srgbClr val="9FB2C9"/>
-                </a:solidFill>
-                <a:latin typeface="Calibri" pitchFamily="34" charset="0"/>
-                <a:ea typeface="Calibri" pitchFamily="34" charset="-122"/>
-                <a:cs typeface="Calibri" pitchFamily="34" charset="-120"/>
-              </a:rPr>
               <a:t>Construir um motor previsível de leads: conteúdo, parcerias e referências.</a:t>
             </a:r>
             <a:endParaRPr lang="en-US" sz="1700" dirty="0"/>
@@ -2791,7 +2732,7 @@
       </p:sp>
       <p:sp>
         <p:nvSpPr>
-          <p:cNvPr id="8" name="Text 6"/>
+          <p:cNvPr id="6" name="Text 3"/>
           <p:cNvSpPr/>
           <p:nvPr/>
         </p:nvSpPr>
@@ -2816,11 +2757,11 @@
             <a:r>
               <a:rPr lang="en-US" sz="12000" b="1" dirty="0">
                 <a:solidFill>
-                  <a:srgbClr val="16314F"/>
-                </a:solidFill>
-                <a:latin typeface="Bookman Old Style" pitchFamily="34" charset="0"/>
-                <a:ea typeface="Bookman Old Style" pitchFamily="34" charset="-122"/>
-                <a:cs typeface="Bookman Old Style" pitchFamily="34" charset="-120"/>
+                  <a:srgbClr val="EADFD0"/>
+                </a:solidFill>
+                <a:latin typeface="Georgia" pitchFamily="34" charset="0"/>
+                <a:ea typeface="Georgia" pitchFamily="34" charset="-122"/>
+                <a:cs typeface="Georgia" pitchFamily="34" charset="-120"/>
               </a:rPr>
               <a:t>02</a:t>
             </a:r>
@@ -2830,7 +2771,7 @@
       </p:sp>
       <p:sp>
         <p:nvSpPr>
-          <p:cNvPr id="9" name="Shape 7"/>
+          <p:cNvPr id="7" name="Shape 4"/>
           <p:cNvSpPr/>
           <p:nvPr/>
         </p:nvSpPr>
@@ -2845,7 +2786,7 @@
           <a:noFill/>
           <a:ln w="31750">
             <a:solidFill>
-              <a:srgbClr val="C9A961"/>
+              <a:srgbClr val="B1937E"/>
             </a:solidFill>
             <a:prstDash val="solid"/>
           </a:ln>
@@ -2865,7 +2806,7 @@
     <p:bg>
       <p:bgPr>
         <a:solidFill>
-          <a:srgbClr val="0B1D33"/>
+          <a:srgbClr val="F8F6F3"/>
         </a:solidFill>
       </p:bgPr>
     </p:bg>
@@ -2910,7 +2851,7 @@
             <a:r>
               <a:rPr lang="en-US" sz="1200" b="1" spc="300" kern="0" dirty="0">
                 <a:solidFill>
-                  <a:srgbClr val="4A9EFF"/>
+                  <a:srgbClr val="9A7B66"/>
                 </a:solidFill>
                 <a:latin typeface="Calibri" pitchFamily="34" charset="0"/>
                 <a:ea typeface="Calibri" pitchFamily="34" charset="-122"/>
@@ -2952,11 +2893,11 @@
             <a:r>
               <a:rPr lang="en-US" sz="3200" b="1" dirty="0">
                 <a:solidFill>
-                  <a:srgbClr val="EAF1FA"/>
-                </a:solidFill>
-                <a:latin typeface="Bookman Old Style" pitchFamily="34" charset="0"/>
-                <a:ea typeface="Bookman Old Style" pitchFamily="34" charset="-122"/>
-                <a:cs typeface="Bookman Old Style" pitchFamily="34" charset="-120"/>
+                  <a:srgbClr val="33302B"/>
+                </a:solidFill>
+                <a:latin typeface="Georgia" pitchFamily="34" charset="0"/>
+                <a:ea typeface="Georgia" pitchFamily="34" charset="-122"/>
+                <a:cs typeface="Georgia" pitchFamily="34" charset="-120"/>
               </a:rPr>
               <a:t>SEO local: ser encontrado por quem já procura</a:t>
             </a:r>
@@ -2981,13 +2922,18 @@
             </a:avLst>
           </a:prstGeom>
           <a:solidFill>
-            <a:srgbClr val="13283F"/>
+            <a:srgbClr val="FFFFFF"/>
           </a:solidFill>
-          <a:ln/>
+          <a:ln w="12700">
+            <a:solidFill>
+              <a:srgbClr val="E3D9CC"/>
+            </a:solidFill>
+            <a:prstDash val="solid"/>
+          </a:ln>
           <a:effectLst>
-            <a:outerShdw sx="100000" sy="100000" kx="0" ky="0" algn="bl" rotWithShape="0" blurRad="127000" dist="38100" dir="5400000">
-              <a:srgbClr val="000000">
-                <a:alpha val="28000"/>
+            <a:outerShdw sx="100000" sy="100000" kx="0" ky="0" algn="bl" rotWithShape="0" blurRad="114300" dist="38100" dir="5400000">
+              <a:srgbClr val="7A6A55">
+                <a:alpha val="12000"/>
               </a:srgbClr>
             </a:outerShdw>
           </a:effectLst>
@@ -3008,9 +2954,14 @@
             <a:avLst/>
           </a:prstGeom>
           <a:solidFill>
-            <a:srgbClr val="16314F"/>
+            <a:srgbClr val="EADFD0"/>
           </a:solidFill>
-          <a:ln/>
+          <a:ln w="9525">
+            <a:solidFill>
+              <a:srgbClr val="E3D9CC"/>
+            </a:solidFill>
+            <a:prstDash val="solid"/>
+          </a:ln>
         </p:spPr>
       </p:sp>
       <p:pic>
@@ -3064,11 +3015,11 @@
             <a:r>
               <a:rPr lang="en-US" sz="1900" b="1" dirty="0">
                 <a:solidFill>
-                  <a:srgbClr val="C9A961"/>
-                </a:solidFill>
-                <a:latin typeface="Bookman Old Style" pitchFamily="34" charset="0"/>
-                <a:ea typeface="Bookman Old Style" pitchFamily="34" charset="-122"/>
-                <a:cs typeface="Bookman Old Style" pitchFamily="34" charset="-120"/>
+                  <a:srgbClr val="B1937E"/>
+                </a:solidFill>
+                <a:latin typeface="Georgia" pitchFamily="34" charset="0"/>
+                <a:ea typeface="Georgia" pitchFamily="34" charset="-122"/>
+                <a:cs typeface="Georgia" pitchFamily="34" charset="-120"/>
               </a:rPr>
               <a:t>Google Business</a:t>
             </a:r>
@@ -3103,7 +3054,7 @@
             <a:r>
               <a:rPr lang="en-US" sz="1400" dirty="0">
                 <a:solidFill>
-                  <a:srgbClr val="9FB2C9"/>
+                  <a:srgbClr val="8A7E72"/>
                 </a:solidFill>
                 <a:latin typeface="Calibri" pitchFamily="34" charset="0"/>
                 <a:ea typeface="Calibri" pitchFamily="34" charset="-122"/>
@@ -3132,13 +3083,18 @@
             </a:avLst>
           </a:prstGeom>
           <a:solidFill>
-            <a:srgbClr val="13283F"/>
+            <a:srgbClr val="FFFFFF"/>
           </a:solidFill>
-          <a:ln/>
+          <a:ln w="12700">
+            <a:solidFill>
+              <a:srgbClr val="E3D9CC"/>
+            </a:solidFill>
+            <a:prstDash val="solid"/>
+          </a:ln>
           <a:effectLst>
-            <a:outerShdw sx="100000" sy="100000" kx="0" ky="0" algn="bl" rotWithShape="0" blurRad="127000" dist="38100" dir="5400000">
-              <a:srgbClr val="000000">
-                <a:alpha val="28000"/>
+            <a:outerShdw sx="100000" sy="100000" kx="0" ky="0" algn="bl" rotWithShape="0" blurRad="114300" dist="38100" dir="5400000">
+              <a:srgbClr val="7A6A55">
+                <a:alpha val="12000"/>
               </a:srgbClr>
             </a:outerShdw>
           </a:effectLst>
@@ -3159,9 +3115,14 @@
             <a:avLst/>
           </a:prstGeom>
           <a:solidFill>
-            <a:srgbClr val="16314F"/>
+            <a:srgbClr val="EADFD0"/>
           </a:solidFill>
-          <a:ln/>
+          <a:ln w="9525">
+            <a:solidFill>
+              <a:srgbClr val="E3D9CC"/>
+            </a:solidFill>
+            <a:prstDash val="solid"/>
+          </a:ln>
         </p:spPr>
       </p:sp>
       <p:pic>
@@ -3215,11 +3176,11 @@
             <a:r>
               <a:rPr lang="en-US" sz="1900" b="1" dirty="0">
                 <a:solidFill>
-                  <a:srgbClr val="C9A961"/>
-                </a:solidFill>
-                <a:latin typeface="Bookman Old Style" pitchFamily="34" charset="0"/>
-                <a:ea typeface="Bookman Old Style" pitchFamily="34" charset="-122"/>
-                <a:cs typeface="Bookman Old Style" pitchFamily="34" charset="-120"/>
+                  <a:srgbClr val="B1937E"/>
+                </a:solidFill>
+                <a:latin typeface="Georgia" pitchFamily="34" charset="0"/>
+                <a:ea typeface="Georgia" pitchFamily="34" charset="-122"/>
+                <a:cs typeface="Georgia" pitchFamily="34" charset="-120"/>
               </a:rPr>
               <a:t>Palavras-chave locais</a:t>
             </a:r>
@@ -3254,7 +3215,7 @@
             <a:r>
               <a:rPr lang="en-US" sz="1400" dirty="0">
                 <a:solidFill>
-                  <a:srgbClr val="9FB2C9"/>
+                  <a:srgbClr val="8A7E72"/>
                 </a:solidFill>
                 <a:latin typeface="Calibri" pitchFamily="34" charset="0"/>
                 <a:ea typeface="Calibri" pitchFamily="34" charset="-122"/>
@@ -3283,13 +3244,18 @@
             </a:avLst>
           </a:prstGeom>
           <a:solidFill>
-            <a:srgbClr val="13283F"/>
+            <a:srgbClr val="FFFFFF"/>
           </a:solidFill>
-          <a:ln/>
+          <a:ln w="12700">
+            <a:solidFill>
+              <a:srgbClr val="E3D9CC"/>
+            </a:solidFill>
+            <a:prstDash val="solid"/>
+          </a:ln>
           <a:effectLst>
-            <a:outerShdw sx="100000" sy="100000" kx="0" ky="0" algn="bl" rotWithShape="0" blurRad="127000" dist="38100" dir="5400000">
-              <a:srgbClr val="000000">
-                <a:alpha val="28000"/>
+            <a:outerShdw sx="100000" sy="100000" kx="0" ky="0" algn="bl" rotWithShape="0" blurRad="114300" dist="38100" dir="5400000">
+              <a:srgbClr val="7A6A55">
+                <a:alpha val="12000"/>
               </a:srgbClr>
             </a:outerShdw>
           </a:effectLst>
@@ -3310,9 +3276,14 @@
             <a:avLst/>
           </a:prstGeom>
           <a:solidFill>
-            <a:srgbClr val="16314F"/>
+            <a:srgbClr val="EADFD0"/>
           </a:solidFill>
-          <a:ln/>
+          <a:ln w="9525">
+            <a:solidFill>
+              <a:srgbClr val="E3D9CC"/>
+            </a:solidFill>
+            <a:prstDash val="solid"/>
+          </a:ln>
         </p:spPr>
       </p:sp>
       <p:pic>
@@ -3366,11 +3337,11 @@
             <a:r>
               <a:rPr lang="en-US" sz="1900" b="1" dirty="0">
                 <a:solidFill>
-                  <a:srgbClr val="C9A961"/>
-                </a:solidFill>
-                <a:latin typeface="Bookman Old Style" pitchFamily="34" charset="0"/>
-                <a:ea typeface="Bookman Old Style" pitchFamily="34" charset="-122"/>
-                <a:cs typeface="Bookman Old Style" pitchFamily="34" charset="-120"/>
+                  <a:srgbClr val="B1937E"/>
+                </a:solidFill>
+                <a:latin typeface="Georgia" pitchFamily="34" charset="0"/>
+                <a:ea typeface="Georgia" pitchFamily="34" charset="-122"/>
+                <a:cs typeface="Georgia" pitchFamily="34" charset="-120"/>
               </a:rPr>
               <a:t>Avaliações</a:t>
             </a:r>
@@ -3405,7 +3376,7 @@
             <a:r>
               <a:rPr lang="en-US" sz="1400" dirty="0">
                 <a:solidFill>
-                  <a:srgbClr val="9FB2C9"/>
+                  <a:srgbClr val="8A7E72"/>
                 </a:solidFill>
                 <a:latin typeface="Calibri" pitchFamily="34" charset="0"/>
                 <a:ea typeface="Calibri" pitchFamily="34" charset="-122"/>
@@ -3434,7 +3405,7 @@
           <a:noFill/>
           <a:ln w="9525">
             <a:solidFill>
-              <a:srgbClr val="5C708A">
+              <a:srgbClr val="A89A86">
                 <a:alpha val="60000"/>
               </a:srgbClr>
             </a:solidFill>
@@ -3469,7 +3440,7 @@
             <a:r>
               <a:rPr lang="en-US" sz="900" dirty="0">
                 <a:solidFill>
-                  <a:srgbClr val="5C708A"/>
+                  <a:srgbClr val="A89A86"/>
                 </a:solidFill>
                 <a:latin typeface="Calibri" pitchFamily="34" charset="0"/>
                 <a:ea typeface="Calibri" pitchFamily="34" charset="-122"/>
@@ -3508,7 +3479,7 @@
             <a:r>
               <a:rPr lang="en-US" sz="900" dirty="0">
                 <a:solidFill>
-                  <a:srgbClr val="5C708A"/>
+                  <a:srgbClr val="A89A86"/>
                 </a:solidFill>
                 <a:latin typeface="Calibri" pitchFamily="34" charset="0"/>
                 <a:ea typeface="Calibri" pitchFamily="34" charset="-122"/>
@@ -3534,7 +3505,7 @@
     <p:bg>
       <p:bgPr>
         <a:solidFill>
-          <a:srgbClr val="0B1D33"/>
+          <a:srgbClr val="F8F6F3"/>
         </a:solidFill>
       </p:bgPr>
     </p:bg>
@@ -3579,7 +3550,7 @@
             <a:r>
               <a:rPr lang="en-US" sz="1200" b="1" spc="300" kern="0" dirty="0">
                 <a:solidFill>
-                  <a:srgbClr val="4A9EFF"/>
+                  <a:srgbClr val="9A7B66"/>
                 </a:solidFill>
                 <a:latin typeface="Calibri" pitchFamily="34" charset="0"/>
                 <a:ea typeface="Calibri" pitchFamily="34" charset="-122"/>
@@ -3621,11 +3592,11 @@
             <a:r>
               <a:rPr lang="en-US" sz="3200" b="1" dirty="0">
                 <a:solidFill>
-                  <a:srgbClr val="EAF1FA"/>
-                </a:solidFill>
-                <a:latin typeface="Bookman Old Style" pitchFamily="34" charset="0"/>
-                <a:ea typeface="Bookman Old Style" pitchFamily="34" charset="-122"/>
-                <a:cs typeface="Bookman Old Style" pitchFamily="34" charset="-120"/>
+                  <a:srgbClr val="33302B"/>
+                </a:solidFill>
+                <a:latin typeface="Georgia" pitchFamily="34" charset="0"/>
+                <a:ea typeface="Georgia" pitchFamily="34" charset="-122"/>
+                <a:cs typeface="Georgia" pitchFamily="34" charset="-120"/>
               </a:rPr>
               <a:t>Quem fala com o casal antes de ti</a:t>
             </a:r>
@@ -3650,13 +3621,18 @@
             </a:avLst>
           </a:prstGeom>
           <a:solidFill>
-            <a:srgbClr val="13283F"/>
+            <a:srgbClr val="FFFFFF"/>
           </a:solidFill>
-          <a:ln/>
+          <a:ln w="12700">
+            <a:solidFill>
+              <a:srgbClr val="E3D9CC"/>
+            </a:solidFill>
+            <a:prstDash val="solid"/>
+          </a:ln>
           <a:effectLst>
-            <a:outerShdw sx="100000" sy="100000" kx="0" ky="0" algn="bl" rotWithShape="0" blurRad="127000" dist="38100" dir="5400000">
-              <a:srgbClr val="000000">
-                <a:alpha val="28000"/>
+            <a:outerShdw sx="100000" sy="100000" kx="0" ky="0" algn="bl" rotWithShape="0" blurRad="114300" dist="38100" dir="5400000">
+              <a:srgbClr val="7A6A55">
+                <a:alpha val="12000"/>
               </a:srgbClr>
             </a:outerShdw>
           </a:effectLst>
@@ -3677,9 +3653,14 @@
             <a:avLst/>
           </a:prstGeom>
           <a:solidFill>
-            <a:srgbClr val="16314F"/>
+            <a:srgbClr val="EADFD0"/>
           </a:solidFill>
-          <a:ln/>
+          <a:ln w="9525">
+            <a:solidFill>
+              <a:srgbClr val="E3D9CC"/>
+            </a:solidFill>
+            <a:prstDash val="solid"/>
+          </a:ln>
         </p:spPr>
       </p:sp>
       <p:pic>
@@ -3733,11 +3714,11 @@
             <a:r>
               <a:rPr lang="en-US" sz="1800" b="1" dirty="0">
                 <a:solidFill>
-                  <a:srgbClr val="C9A961"/>
-                </a:solidFill>
-                <a:latin typeface="Bookman Old Style" pitchFamily="34" charset="0"/>
-                <a:ea typeface="Bookman Old Style" pitchFamily="34" charset="-122"/>
-                <a:cs typeface="Bookman Old Style" pitchFamily="34" charset="-120"/>
+                  <a:srgbClr val="B1937E"/>
+                </a:solidFill>
+                <a:latin typeface="Georgia" pitchFamily="34" charset="0"/>
+                <a:ea typeface="Georgia" pitchFamily="34" charset="-122"/>
+                <a:cs typeface="Georgia" pitchFamily="34" charset="-120"/>
               </a:rPr>
               <a:t>Wedding planners</a:t>
             </a:r>
@@ -3772,7 +3753,7 @@
             <a:r>
               <a:rPr lang="en-US" sz="1350" dirty="0">
                 <a:solidFill>
-                  <a:srgbClr val="9FB2C9"/>
+                  <a:srgbClr val="8A7E72"/>
                 </a:solidFill>
                 <a:latin typeface="Calibri" pitchFamily="34" charset="0"/>
                 <a:ea typeface="Calibri" pitchFamily="34" charset="-122"/>
@@ -3801,13 +3782,18 @@
             </a:avLst>
           </a:prstGeom>
           <a:solidFill>
-            <a:srgbClr val="13283F"/>
+            <a:srgbClr val="FFFFFF"/>
           </a:solidFill>
-          <a:ln/>
+          <a:ln w="12700">
+            <a:solidFill>
+              <a:srgbClr val="E3D9CC"/>
+            </a:solidFill>
+            <a:prstDash val="solid"/>
+          </a:ln>
           <a:effectLst>
-            <a:outerShdw sx="100000" sy="100000" kx="0" ky="0" algn="bl" rotWithShape="0" blurRad="127000" dist="38100" dir="5400000">
-              <a:srgbClr val="000000">
-                <a:alpha val="28000"/>
+            <a:outerShdw sx="100000" sy="100000" kx="0" ky="0" algn="bl" rotWithShape="0" blurRad="114300" dist="38100" dir="5400000">
+              <a:srgbClr val="7A6A55">
+                <a:alpha val="12000"/>
               </a:srgbClr>
             </a:outerShdw>
           </a:effectLst>
@@ -3828,9 +3814,14 @@
             <a:avLst/>
           </a:prstGeom>
           <a:solidFill>
-            <a:srgbClr val="16314F"/>
+            <a:srgbClr val="EADFD0"/>
           </a:solidFill>
-          <a:ln/>
+          <a:ln w="9525">
+            <a:solidFill>
+              <a:srgbClr val="E3D9CC"/>
+            </a:solidFill>
+            <a:prstDash val="solid"/>
+          </a:ln>
         </p:spPr>
       </p:sp>
       <p:pic>
@@ -3884,11 +3875,11 @@
             <a:r>
               <a:rPr lang="en-US" sz="1800" b="1" dirty="0">
                 <a:solidFill>
-                  <a:srgbClr val="C9A961"/>
-                </a:solidFill>
-                <a:latin typeface="Bookman Old Style" pitchFamily="34" charset="0"/>
-                <a:ea typeface="Bookman Old Style" pitchFamily="34" charset="-122"/>
-                <a:cs typeface="Bookman Old Style" pitchFamily="34" charset="-120"/>
+                  <a:srgbClr val="B1937E"/>
+                </a:solidFill>
+                <a:latin typeface="Georgia" pitchFamily="34" charset="0"/>
+                <a:ea typeface="Georgia" pitchFamily="34" charset="-122"/>
+                <a:cs typeface="Georgia" pitchFamily="34" charset="-120"/>
               </a:rPr>
               <a:t>Quintas e espaços</a:t>
             </a:r>
@@ -3923,7 +3914,7 @@
             <a:r>
               <a:rPr lang="en-US" sz="1350" dirty="0">
                 <a:solidFill>
-                  <a:srgbClr val="9FB2C9"/>
+                  <a:srgbClr val="8A7E72"/>
                 </a:solidFill>
                 <a:latin typeface="Calibri" pitchFamily="34" charset="0"/>
                 <a:ea typeface="Calibri" pitchFamily="34" charset="-122"/>
@@ -3952,13 +3943,18 @@
             </a:avLst>
           </a:prstGeom>
           <a:solidFill>
-            <a:srgbClr val="13283F"/>
+            <a:srgbClr val="FFFFFF"/>
           </a:solidFill>
-          <a:ln/>
+          <a:ln w="12700">
+            <a:solidFill>
+              <a:srgbClr val="E3D9CC"/>
+            </a:solidFill>
+            <a:prstDash val="solid"/>
+          </a:ln>
           <a:effectLst>
-            <a:outerShdw sx="100000" sy="100000" kx="0" ky="0" algn="bl" rotWithShape="0" blurRad="127000" dist="38100" dir="5400000">
-              <a:srgbClr val="000000">
-                <a:alpha val="28000"/>
+            <a:outerShdw sx="100000" sy="100000" kx="0" ky="0" algn="bl" rotWithShape="0" blurRad="114300" dist="38100" dir="5400000">
+              <a:srgbClr val="7A6A55">
+                <a:alpha val="12000"/>
               </a:srgbClr>
             </a:outerShdw>
           </a:effectLst>
@@ -3979,9 +3975,14 @@
             <a:avLst/>
           </a:prstGeom>
           <a:solidFill>
-            <a:srgbClr val="16314F"/>
+            <a:srgbClr val="EADFD0"/>
           </a:solidFill>
-          <a:ln/>
+          <a:ln w="9525">
+            <a:solidFill>
+              <a:srgbClr val="E3D9CC"/>
+            </a:solidFill>
+            <a:prstDash val="solid"/>
+          </a:ln>
         </p:spPr>
       </p:sp>
       <p:pic>
@@ -4035,11 +4036,11 @@
             <a:r>
               <a:rPr lang="en-US" sz="1800" b="1" dirty="0">
                 <a:solidFill>
-                  <a:srgbClr val="C9A961"/>
-                </a:solidFill>
-                <a:latin typeface="Bookman Old Style" pitchFamily="34" charset="0"/>
-                <a:ea typeface="Bookman Old Style" pitchFamily="34" charset="-122"/>
-                <a:cs typeface="Bookman Old Style" pitchFamily="34" charset="-120"/>
+                  <a:srgbClr val="B1937E"/>
+                </a:solidFill>
+                <a:latin typeface="Georgia" pitchFamily="34" charset="0"/>
+                <a:ea typeface="Georgia" pitchFamily="34" charset="-122"/>
+                <a:cs typeface="Georgia" pitchFamily="34" charset="-120"/>
               </a:rPr>
               <a:t>Outros fornecedores</a:t>
             </a:r>
@@ -4074,7 +4075,7 @@
             <a:r>
               <a:rPr lang="en-US" sz="1350" dirty="0">
                 <a:solidFill>
-                  <a:srgbClr val="9FB2C9"/>
+                  <a:srgbClr val="8A7E72"/>
                 </a:solidFill>
                 <a:latin typeface="Calibri" pitchFamily="34" charset="0"/>
                 <a:ea typeface="Calibri" pitchFamily="34" charset="-122"/>
@@ -4103,13 +4104,18 @@
             </a:avLst>
           </a:prstGeom>
           <a:solidFill>
-            <a:srgbClr val="13283F"/>
+            <a:srgbClr val="FFFFFF"/>
           </a:solidFill>
-          <a:ln/>
+          <a:ln w="12700">
+            <a:solidFill>
+              <a:srgbClr val="E3D9CC"/>
+            </a:solidFill>
+            <a:prstDash val="solid"/>
+          </a:ln>
           <a:effectLst>
-            <a:outerShdw sx="100000" sy="100000" kx="0" ky="0" algn="bl" rotWithShape="0" blurRad="127000" dist="38100" dir="5400000">
-              <a:srgbClr val="000000">
-                <a:alpha val="28000"/>
+            <a:outerShdw sx="100000" sy="100000" kx="0" ky="0" algn="bl" rotWithShape="0" blurRad="114300" dist="38100" dir="5400000">
+              <a:srgbClr val="7A6A55">
+                <a:alpha val="12000"/>
               </a:srgbClr>
             </a:outerShdw>
           </a:effectLst>
@@ -4130,9 +4136,14 @@
             <a:avLst/>
           </a:prstGeom>
           <a:solidFill>
-            <a:srgbClr val="16314F"/>
+            <a:srgbClr val="EADFD0"/>
           </a:solidFill>
-          <a:ln/>
+          <a:ln w="9525">
+            <a:solidFill>
+              <a:srgbClr val="E3D9CC"/>
+            </a:solidFill>
+            <a:prstDash val="solid"/>
+          </a:ln>
         </p:spPr>
       </p:sp>
       <p:pic>
@@ -4186,11 +4197,11 @@
             <a:r>
               <a:rPr lang="en-US" sz="1800" b="1" dirty="0">
                 <a:solidFill>
-                  <a:srgbClr val="C9A961"/>
-                </a:solidFill>
-                <a:latin typeface="Bookman Old Style" pitchFamily="34" charset="0"/>
-                <a:ea typeface="Bookman Old Style" pitchFamily="34" charset="-122"/>
-                <a:cs typeface="Bookman Old Style" pitchFamily="34" charset="-120"/>
+                  <a:srgbClr val="B1937E"/>
+                </a:solidFill>
+                <a:latin typeface="Georgia" pitchFamily="34" charset="0"/>
+                <a:ea typeface="Georgia" pitchFamily="34" charset="-122"/>
+                <a:cs typeface="Georgia" pitchFamily="34" charset="-120"/>
               </a:rPr>
               <a:t>Casais antigos</a:t>
             </a:r>
@@ -4225,7 +4236,7 @@
             <a:r>
               <a:rPr lang="en-US" sz="1350" dirty="0">
                 <a:solidFill>
-                  <a:srgbClr val="9FB2C9"/>
+                  <a:srgbClr val="8A7E72"/>
                 </a:solidFill>
                 <a:latin typeface="Calibri" pitchFamily="34" charset="0"/>
                 <a:ea typeface="Calibri" pitchFamily="34" charset="-122"/>
@@ -4254,7 +4265,7 @@
           <a:noFill/>
           <a:ln w="9525">
             <a:solidFill>
-              <a:srgbClr val="5C708A">
+              <a:srgbClr val="A89A86">
                 <a:alpha val="60000"/>
               </a:srgbClr>
             </a:solidFill>
@@ -4289,7 +4300,7 @@
             <a:r>
               <a:rPr lang="en-US" sz="900" dirty="0">
                 <a:solidFill>
-                  <a:srgbClr val="5C708A"/>
+                  <a:srgbClr val="A89A86"/>
                 </a:solidFill>
                 <a:latin typeface="Calibri" pitchFamily="34" charset="0"/>
                 <a:ea typeface="Calibri" pitchFamily="34" charset="-122"/>
@@ -4328,7 +4339,7 @@
             <a:r>
               <a:rPr lang="en-US" sz="900" dirty="0">
                 <a:solidFill>
-                  <a:srgbClr val="5C708A"/>
+                  <a:srgbClr val="A89A86"/>
                 </a:solidFill>
                 <a:latin typeface="Calibri" pitchFamily="34" charset="0"/>
                 <a:ea typeface="Calibri" pitchFamily="34" charset="-122"/>
@@ -4354,7 +4365,7 @@
     <p:bg>
       <p:bgPr>
         <a:solidFill>
-          <a:srgbClr val="0B1D33"/>
+          <a:srgbClr val="F8F6F3"/>
         </a:solidFill>
       </p:bgPr>
     </p:bg>
@@ -4399,7 +4410,7 @@
             <a:r>
               <a:rPr lang="en-US" sz="1200" b="1" spc="300" kern="0" dirty="0">
                 <a:solidFill>
-                  <a:srgbClr val="4A9EFF"/>
+                  <a:srgbClr val="9A7B66"/>
                 </a:solidFill>
                 <a:latin typeface="Calibri" pitchFamily="34" charset="0"/>
                 <a:ea typeface="Calibri" pitchFamily="34" charset="-122"/>
@@ -4441,11 +4452,11 @@
             <a:r>
               <a:rPr lang="en-US" sz="3000" b="1" dirty="0">
                 <a:solidFill>
-                  <a:srgbClr val="EAF1FA"/>
-                </a:solidFill>
-                <a:latin typeface="Bookman Old Style" pitchFamily="34" charset="0"/>
-                <a:ea typeface="Bookman Old Style" pitchFamily="34" charset="-122"/>
-                <a:cs typeface="Bookman Old Style" pitchFamily="34" charset="-120"/>
+                  <a:srgbClr val="33302B"/>
+                </a:solidFill>
+                <a:latin typeface="Georgia" pitchFamily="34" charset="0"/>
+                <a:ea typeface="Georgia" pitchFamily="34" charset="-122"/>
+                <a:cs typeface="Georgia" pitchFamily="34" charset="-120"/>
               </a:rPr>
               <a:t>Dar primeiro</a:t>
             </a:r>
@@ -4470,13 +4481,18 @@
             </a:avLst>
           </a:prstGeom>
           <a:solidFill>
-            <a:srgbClr val="13283F"/>
+            <a:srgbClr val="FFFFFF"/>
           </a:solidFill>
-          <a:ln/>
+          <a:ln w="12700">
+            <a:solidFill>
+              <a:srgbClr val="E3D9CC"/>
+            </a:solidFill>
+            <a:prstDash val="solid"/>
+          </a:ln>
           <a:effectLst>
-            <a:outerShdw sx="100000" sy="100000" kx="0" ky="0" algn="bl" rotWithShape="0" blurRad="127000" dist="38100" dir="5400000">
-              <a:srgbClr val="000000">
-                <a:alpha val="28000"/>
+            <a:outerShdw sx="100000" sy="100000" kx="0" ky="0" algn="bl" rotWithShape="0" blurRad="114300" dist="38100" dir="5400000">
+              <a:srgbClr val="7A6A55">
+                <a:alpha val="12000"/>
               </a:srgbClr>
             </a:outerShdw>
           </a:effectLst>
@@ -4497,9 +4513,14 @@
             <a:avLst/>
           </a:prstGeom>
           <a:solidFill>
-            <a:srgbClr val="16314F"/>
+            <a:srgbClr val="EADFD0"/>
           </a:solidFill>
-          <a:ln/>
+          <a:ln w="9525">
+            <a:solidFill>
+              <a:srgbClr val="E3D9CC"/>
+            </a:solidFill>
+            <a:prstDash val="solid"/>
+          </a:ln>
         </p:spPr>
       </p:sp>
       <p:pic>
@@ -4553,11 +4574,11 @@
             <a:r>
               <a:rPr lang="en-US" sz="1700" b="1" dirty="0">
                 <a:solidFill>
-                  <a:srgbClr val="EAF1FA"/>
-                </a:solidFill>
-                <a:latin typeface="Bookman Old Style" pitchFamily="34" charset="0"/>
-                <a:ea typeface="Bookman Old Style" pitchFamily="34" charset="-122"/>
-                <a:cs typeface="Bookman Old Style" pitchFamily="34" charset="-120"/>
+                  <a:srgbClr val="33302B"/>
+                </a:solidFill>
+                <a:latin typeface="Georgia" pitchFamily="34" charset="0"/>
+                <a:ea typeface="Georgia" pitchFamily="34" charset="-122"/>
+                <a:cs typeface="Georgia" pitchFamily="34" charset="-120"/>
               </a:rPr>
               <a:t>Dás valor</a:t>
             </a:r>
@@ -4592,7 +4613,7 @@
             <a:r>
               <a:rPr lang="en-US" sz="1250" dirty="0">
                 <a:solidFill>
-                  <a:srgbClr val="9FB2C9"/>
+                  <a:srgbClr val="8A7E72"/>
                 </a:solidFill>
                 <a:latin typeface="Calibri" pitchFamily="34" charset="0"/>
                 <a:ea typeface="Calibri" pitchFamily="34" charset="-122"/>
@@ -4645,13 +4666,18 @@
             </a:avLst>
           </a:prstGeom>
           <a:solidFill>
-            <a:srgbClr val="13283F"/>
+            <a:srgbClr val="FFFFFF"/>
           </a:solidFill>
-          <a:ln/>
+          <a:ln w="12700">
+            <a:solidFill>
+              <a:srgbClr val="E3D9CC"/>
+            </a:solidFill>
+            <a:prstDash val="solid"/>
+          </a:ln>
           <a:effectLst>
-            <a:outerShdw sx="100000" sy="100000" kx="0" ky="0" algn="bl" rotWithShape="0" blurRad="127000" dist="38100" dir="5400000">
-              <a:srgbClr val="000000">
-                <a:alpha val="28000"/>
+            <a:outerShdw sx="100000" sy="100000" kx="0" ky="0" algn="bl" rotWithShape="0" blurRad="114300" dist="38100" dir="5400000">
+              <a:srgbClr val="7A6A55">
+                <a:alpha val="12000"/>
               </a:srgbClr>
             </a:outerShdw>
           </a:effectLst>
@@ -4672,9 +4698,14 @@
             <a:avLst/>
           </a:prstGeom>
           <a:solidFill>
-            <a:srgbClr val="16314F"/>
+            <a:srgbClr val="EADFD0"/>
           </a:solidFill>
-          <a:ln/>
+          <a:ln w="9525">
+            <a:solidFill>
+              <a:srgbClr val="E3D9CC"/>
+            </a:solidFill>
+            <a:prstDash val="solid"/>
+          </a:ln>
         </p:spPr>
       </p:sp>
       <p:pic>
@@ -4728,11 +4759,11 @@
             <a:r>
               <a:rPr lang="en-US" sz="1700" b="1" dirty="0">
                 <a:solidFill>
-                  <a:srgbClr val="EAF1FA"/>
-                </a:solidFill>
-                <a:latin typeface="Bookman Old Style" pitchFamily="34" charset="0"/>
-                <a:ea typeface="Bookman Old Style" pitchFamily="34" charset="-122"/>
-                <a:cs typeface="Bookman Old Style" pitchFamily="34" charset="-120"/>
+                  <a:srgbClr val="33302B"/>
+                </a:solidFill>
+                <a:latin typeface="Georgia" pitchFamily="34" charset="0"/>
+                <a:ea typeface="Georgia" pitchFamily="34" charset="-122"/>
+                <a:cs typeface="Georgia" pitchFamily="34" charset="-120"/>
               </a:rPr>
               <a:t>Criam confiança</a:t>
             </a:r>
@@ -4767,7 +4798,7 @@
             <a:r>
               <a:rPr lang="en-US" sz="1250" dirty="0">
                 <a:solidFill>
-                  <a:srgbClr val="9FB2C9"/>
+                  <a:srgbClr val="8A7E72"/>
                 </a:solidFill>
                 <a:latin typeface="Calibri" pitchFamily="34" charset="0"/>
                 <a:ea typeface="Calibri" pitchFamily="34" charset="-122"/>
@@ -4820,13 +4851,18 @@
             </a:avLst>
           </a:prstGeom>
           <a:solidFill>
-            <a:srgbClr val="13283F"/>
+            <a:srgbClr val="FFFFFF"/>
           </a:solidFill>
-          <a:ln/>
+          <a:ln w="12700">
+            <a:solidFill>
+              <a:srgbClr val="E3D9CC"/>
+            </a:solidFill>
+            <a:prstDash val="solid"/>
+          </a:ln>
           <a:effectLst>
-            <a:outerShdw sx="100000" sy="100000" kx="0" ky="0" algn="bl" rotWithShape="0" blurRad="127000" dist="38100" dir="5400000">
-              <a:srgbClr val="000000">
-                <a:alpha val="28000"/>
+            <a:outerShdw sx="100000" sy="100000" kx="0" ky="0" algn="bl" rotWithShape="0" blurRad="114300" dist="38100" dir="5400000">
+              <a:srgbClr val="7A6A55">
+                <a:alpha val="12000"/>
               </a:srgbClr>
             </a:outerShdw>
           </a:effectLst>
@@ -4847,9 +4883,14 @@
             <a:avLst/>
           </a:prstGeom>
           <a:solidFill>
-            <a:srgbClr val="16314F"/>
+            <a:srgbClr val="EADFD0"/>
           </a:solidFill>
-          <a:ln/>
+          <a:ln w="9525">
+            <a:solidFill>
+              <a:srgbClr val="E3D9CC"/>
+            </a:solidFill>
+            <a:prstDash val="solid"/>
+          </a:ln>
         </p:spPr>
       </p:sp>
       <p:pic>
@@ -4903,11 +4944,11 @@
             <a:r>
               <a:rPr lang="en-US" sz="1700" b="1" dirty="0">
                 <a:solidFill>
-                  <a:srgbClr val="EAF1FA"/>
-                </a:solidFill>
-                <a:latin typeface="Bookman Old Style" pitchFamily="34" charset="0"/>
-                <a:ea typeface="Bookman Old Style" pitchFamily="34" charset="-122"/>
-                <a:cs typeface="Bookman Old Style" pitchFamily="34" charset="-120"/>
+                  <a:srgbClr val="33302B"/>
+                </a:solidFill>
+                <a:latin typeface="Georgia" pitchFamily="34" charset="0"/>
+                <a:ea typeface="Georgia" pitchFamily="34" charset="-122"/>
+                <a:cs typeface="Georgia" pitchFamily="34" charset="-120"/>
               </a:rPr>
               <a:t>Recebes leads</a:t>
             </a:r>
@@ -4942,7 +4983,7 @@
             <a:r>
               <a:rPr lang="en-US" sz="1250" dirty="0">
                 <a:solidFill>
-                  <a:srgbClr val="9FB2C9"/>
+                  <a:srgbClr val="8A7E72"/>
                 </a:solidFill>
                 <a:latin typeface="Calibri" pitchFamily="34" charset="0"/>
                 <a:ea typeface="Calibri" pitchFamily="34" charset="-122"/>
@@ -4981,7 +5022,7 @@
             <a:r>
               <a:rPr lang="en-US" sz="1500" i="1" dirty="0">
                 <a:solidFill>
-                  <a:srgbClr val="C9A961"/>
+                  <a:srgbClr val="B1937E"/>
                 </a:solidFill>
                 <a:latin typeface="Calibri" pitchFamily="34" charset="0"/>
                 <a:ea typeface="Calibri" pitchFamily="34" charset="-122"/>
@@ -5010,7 +5051,7 @@
           <a:noFill/>
           <a:ln w="9525">
             <a:solidFill>
-              <a:srgbClr val="5C708A">
+              <a:srgbClr val="A89A86">
                 <a:alpha val="60000"/>
               </a:srgbClr>
             </a:solidFill>
@@ -5045,7 +5086,7 @@
             <a:r>
               <a:rPr lang="en-US" sz="900" dirty="0">
                 <a:solidFill>
-                  <a:srgbClr val="5C708A"/>
+                  <a:srgbClr val="A89A86"/>
                 </a:solidFill>
                 <a:latin typeface="Calibri" pitchFamily="34" charset="0"/>
                 <a:ea typeface="Calibri" pitchFamily="34" charset="-122"/>
@@ -5084,7 +5125,7 @@
             <a:r>
               <a:rPr lang="en-US" sz="900" dirty="0">
                 <a:solidFill>
-                  <a:srgbClr val="5C708A"/>
+                  <a:srgbClr val="A89A86"/>
                 </a:solidFill>
                 <a:latin typeface="Calibri" pitchFamily="34" charset="0"/>
                 <a:ea typeface="Calibri" pitchFamily="34" charset="-122"/>
@@ -5110,7 +5151,7 @@
     <p:bg>
       <p:bgPr>
         <a:solidFill>
-          <a:srgbClr val="102844"/>
+          <a:srgbClr val="EFE7DE"/>
         </a:solidFill>
       </p:bgPr>
     </p:bg>
@@ -5155,7 +5196,7 @@
             <a:r>
               <a:rPr lang="en-US" sz="1200" b="1" spc="300" kern="0" dirty="0">
                 <a:solidFill>
-                  <a:srgbClr val="C9A961"/>
+                  <a:srgbClr val="B1937E"/>
                 </a:solidFill>
                 <a:latin typeface="Calibri" pitchFamily="34" charset="0"/>
                 <a:ea typeface="Calibri" pitchFamily="34" charset="-122"/>
@@ -5197,11 +5238,11 @@
             <a:r>
               <a:rPr lang="en-US" sz="3400" b="1" dirty="0">
                 <a:solidFill>
-                  <a:srgbClr val="EAF1FA"/>
-                </a:solidFill>
-                <a:latin typeface="Bookman Old Style" pitchFamily="34" charset="0"/>
-                <a:ea typeface="Bookman Old Style" pitchFamily="34" charset="-122"/>
-                <a:cs typeface="Bookman Old Style" pitchFamily="34" charset="-120"/>
+                  <a:srgbClr val="33302B"/>
+                </a:solidFill>
+                <a:latin typeface="Georgia" pitchFamily="34" charset="0"/>
+                <a:ea typeface="Georgia" pitchFamily="34" charset="-122"/>
+                <a:cs typeface="Georgia" pitchFamily="34" charset="-120"/>
               </a:rPr>
               <a:t>Parceria com uma quinta</a:t>
             </a:r>
@@ -5226,20 +5267,20 @@
             </a:avLst>
           </a:prstGeom>
           <a:solidFill>
-            <a:srgbClr val="13283F"/>
+            <a:srgbClr val="FFFFFF"/>
           </a:solidFill>
           <a:ln w="9525">
             <a:solidFill>
-              <a:srgbClr val="9FB2C9">
+              <a:srgbClr val="8A7E72">
                 <a:alpha val="50000"/>
               </a:srgbClr>
             </a:solidFill>
             <a:prstDash val="solid"/>
           </a:ln>
           <a:effectLst>
-            <a:outerShdw sx="100000" sy="100000" kx="0" ky="0" algn="bl" rotWithShape="0" blurRad="127000" dist="38100" dir="5400000">
-              <a:srgbClr val="000000">
-                <a:alpha val="28000"/>
+            <a:outerShdw sx="100000" sy="100000" kx="0" ky="0" algn="bl" rotWithShape="0" blurRad="114300" dist="38100" dir="5400000">
+              <a:srgbClr val="7A6A55">
+                <a:alpha val="12000"/>
               </a:srgbClr>
             </a:outerShdw>
           </a:effectLst>
@@ -5272,7 +5313,7 @@
             <a:r>
               <a:rPr lang="en-US" sz="1300" b="1" spc="300" kern="0" dirty="0">
                 <a:solidFill>
-                  <a:srgbClr val="9FB2C9"/>
+                  <a:srgbClr val="8A7E72"/>
                 </a:solidFill>
                 <a:latin typeface="Calibri" pitchFamily="34" charset="0"/>
                 <a:ea typeface="Calibri" pitchFamily="34" charset="-122"/>
@@ -5314,7 +5355,7 @@
             <a:r>
               <a:rPr lang="en-US" sz="1600" b="1" i="1" dirty="0">
                 <a:solidFill>
-                  <a:srgbClr val="9FB2C9"/>
+                  <a:srgbClr val="8A7E72"/>
                 </a:solidFill>
                 <a:latin typeface="Calibri" pitchFamily="34" charset="0"/>
                 <a:ea typeface="Calibri" pitchFamily="34" charset="-122"/>
@@ -5334,7 +5375,7 @@
             <a:r>
               <a:rPr lang="en-US" sz="1500" dirty="0">
                 <a:solidFill>
-                  <a:srgbClr val="9FB2C9"/>
+                  <a:srgbClr val="8A7E72"/>
                 </a:solidFill>
                 <a:latin typeface="Calibri" pitchFamily="34" charset="0"/>
                 <a:ea typeface="Calibri" pitchFamily="34" charset="-122"/>
@@ -5354,7 +5395,7 @@
             <a:r>
               <a:rPr lang="en-US" sz="1500" dirty="0">
                 <a:solidFill>
-                  <a:srgbClr val="9FB2C9"/>
+                  <a:srgbClr val="8A7E72"/>
                 </a:solidFill>
                 <a:latin typeface="Calibri" pitchFamily="34" charset="0"/>
                 <a:ea typeface="Calibri" pitchFamily="34" charset="-122"/>
@@ -5371,7 +5412,7 @@
             <a:r>
               <a:rPr lang="en-US" sz="1400" i="1" dirty="0">
                 <a:solidFill>
-                  <a:srgbClr val="9FB2C9"/>
+                  <a:srgbClr val="8A7E72"/>
                 </a:solidFill>
                 <a:latin typeface="Calibri" pitchFamily="34" charset="0"/>
                 <a:ea typeface="Calibri" pitchFamily="34" charset="-122"/>
@@ -5400,18 +5441,18 @@
             </a:avLst>
           </a:prstGeom>
           <a:solidFill>
-            <a:srgbClr val="16314F"/>
+            <a:srgbClr val="EADFD0"/>
           </a:solidFill>
           <a:ln w="19050">
             <a:solidFill>
-              <a:srgbClr val="C9A961"/>
+              <a:srgbClr val="B1937E"/>
             </a:solidFill>
             <a:prstDash val="solid"/>
           </a:ln>
           <a:effectLst>
-            <a:outerShdw sx="100000" sy="100000" kx="0" ky="0" algn="bl" rotWithShape="0" blurRad="127000" dist="38100" dir="5400000">
-              <a:srgbClr val="000000">
-                <a:alpha val="28000"/>
+            <a:outerShdw sx="100000" sy="100000" kx="0" ky="0" algn="bl" rotWithShape="0" blurRad="114300" dist="38100" dir="5400000">
+              <a:srgbClr val="7A6A55">
+                <a:alpha val="12000"/>
               </a:srgbClr>
             </a:outerShdw>
           </a:effectLst>
@@ -5444,7 +5485,7 @@
             <a:r>
               <a:rPr lang="en-US" sz="1300" b="1" spc="300" kern="0" dirty="0">
                 <a:solidFill>
-                  <a:srgbClr val="C9A961"/>
+                  <a:srgbClr val="B1937E"/>
                 </a:solidFill>
                 <a:latin typeface="Calibri" pitchFamily="34" charset="0"/>
                 <a:ea typeface="Calibri" pitchFamily="34" charset="-122"/>
@@ -5486,7 +5527,7 @@
             <a:r>
               <a:rPr lang="en-US" sz="1600" b="1" dirty="0">
                 <a:solidFill>
-                  <a:srgbClr val="EAF1FA"/>
+                  <a:srgbClr val="33302B"/>
                 </a:solidFill>
                 <a:latin typeface="Calibri" pitchFamily="34" charset="0"/>
                 <a:ea typeface="Calibri" pitchFamily="34" charset="-122"/>
@@ -5506,7 +5547,7 @@
             <a:r>
               <a:rPr lang="en-US" sz="1500" dirty="0">
                 <a:solidFill>
-                  <a:srgbClr val="EAF1FA"/>
+                  <a:srgbClr val="33302B"/>
                 </a:solidFill>
                 <a:latin typeface="Calibri" pitchFamily="34" charset="0"/>
                 <a:ea typeface="Calibri" pitchFamily="34" charset="-122"/>
@@ -5526,7 +5567,7 @@
             <a:r>
               <a:rPr lang="en-US" sz="1500" dirty="0">
                 <a:solidFill>
-                  <a:srgbClr val="EAF1FA"/>
+                  <a:srgbClr val="33302B"/>
                 </a:solidFill>
                 <a:latin typeface="Calibri" pitchFamily="34" charset="0"/>
                 <a:ea typeface="Calibri" pitchFamily="34" charset="-122"/>
@@ -5543,7 +5584,7 @@
             <a:r>
               <a:rPr lang="en-US" sz="1400" i="1" dirty="0">
                 <a:solidFill>
-                  <a:srgbClr val="C9A961"/>
+                  <a:srgbClr val="B1937E"/>
                 </a:solidFill>
                 <a:latin typeface="Calibri" pitchFamily="34" charset="0"/>
                 <a:ea typeface="Calibri" pitchFamily="34" charset="-122"/>
@@ -5572,7 +5613,7 @@
           <a:noFill/>
           <a:ln w="9525">
             <a:solidFill>
-              <a:srgbClr val="5C708A">
+              <a:srgbClr val="A89A86">
                 <a:alpha val="60000"/>
               </a:srgbClr>
             </a:solidFill>
@@ -5607,7 +5648,7 @@
             <a:r>
               <a:rPr lang="en-US" sz="900" dirty="0">
                 <a:solidFill>
-                  <a:srgbClr val="5C708A"/>
+                  <a:srgbClr val="A89A86"/>
                 </a:solidFill>
                 <a:latin typeface="Calibri" pitchFamily="34" charset="0"/>
                 <a:ea typeface="Calibri" pitchFamily="34" charset="-122"/>
@@ -5646,7 +5687,7 @@
             <a:r>
               <a:rPr lang="en-US" sz="900" dirty="0">
                 <a:solidFill>
-                  <a:srgbClr val="5C708A"/>
+                  <a:srgbClr val="A89A86"/>
                 </a:solidFill>
                 <a:latin typeface="Calibri" pitchFamily="34" charset="0"/>
                 <a:ea typeface="Calibri" pitchFamily="34" charset="-122"/>
@@ -5672,7 +5713,7 @@
     <p:bg>
       <p:bgPr>
         <a:solidFill>
-          <a:srgbClr val="0B1D33"/>
+          <a:srgbClr val="F8F6F3"/>
         </a:solidFill>
       </p:bgPr>
     </p:bg>
@@ -5717,7 +5758,7 @@
             <a:r>
               <a:rPr lang="en-US" sz="1200" b="1" spc="300" kern="0" dirty="0">
                 <a:solidFill>
-                  <a:srgbClr val="4A9EFF"/>
+                  <a:srgbClr val="9A7B66"/>
                 </a:solidFill>
                 <a:latin typeface="Calibri" pitchFamily="34" charset="0"/>
                 <a:ea typeface="Calibri" pitchFamily="34" charset="-122"/>
@@ -5759,11 +5800,11 @@
             <a:r>
               <a:rPr lang="en-US" sz="3200" b="1" dirty="0">
                 <a:solidFill>
-                  <a:srgbClr val="EAF1FA"/>
-                </a:solidFill>
-                <a:latin typeface="Bookman Old Style" pitchFamily="34" charset="0"/>
-                <a:ea typeface="Bookman Old Style" pitchFamily="34" charset="-122"/>
-                <a:cs typeface="Bookman Old Style" pitchFamily="34" charset="-120"/>
+                  <a:srgbClr val="33302B"/>
+                </a:solidFill>
+                <a:latin typeface="Georgia" pitchFamily="34" charset="0"/>
+                <a:ea typeface="Georgia" pitchFamily="34" charset="-122"/>
+                <a:cs typeface="Georgia" pitchFamily="34" charset="-120"/>
               </a:rPr>
               <a:t>Transformar clientes em embaixadores</a:t>
             </a:r>
@@ -5788,13 +5829,18 @@
             </a:avLst>
           </a:prstGeom>
           <a:solidFill>
-            <a:srgbClr val="13283F"/>
+            <a:srgbClr val="FFFFFF"/>
           </a:solidFill>
-          <a:ln/>
+          <a:ln w="12700">
+            <a:solidFill>
+              <a:srgbClr val="E3D9CC"/>
+            </a:solidFill>
+            <a:prstDash val="solid"/>
+          </a:ln>
           <a:effectLst>
-            <a:outerShdw sx="100000" sy="100000" kx="0" ky="0" algn="bl" rotWithShape="0" blurRad="127000" dist="38100" dir="5400000">
-              <a:srgbClr val="000000">
-                <a:alpha val="28000"/>
+            <a:outerShdw sx="100000" sy="100000" kx="0" ky="0" algn="bl" rotWithShape="0" blurRad="114300" dist="38100" dir="5400000">
+              <a:srgbClr val="7A6A55">
+                <a:alpha val="12000"/>
               </a:srgbClr>
             </a:outerShdw>
           </a:effectLst>
@@ -5815,9 +5861,14 @@
             <a:avLst/>
           </a:prstGeom>
           <a:solidFill>
-            <a:srgbClr val="16314F"/>
+            <a:srgbClr val="EADFD0"/>
           </a:solidFill>
-          <a:ln/>
+          <a:ln w="9525">
+            <a:solidFill>
+              <a:srgbClr val="E3D9CC"/>
+            </a:solidFill>
+            <a:prstDash val="solid"/>
+          </a:ln>
         </p:spPr>
       </p:sp>
       <p:pic>
@@ -5871,11 +5922,11 @@
             <a:r>
               <a:rPr lang="en-US" sz="1900" b="1" dirty="0">
                 <a:solidFill>
-                  <a:srgbClr val="C9A961"/>
-                </a:solidFill>
-                <a:latin typeface="Bookman Old Style" pitchFamily="34" charset="0"/>
-                <a:ea typeface="Bookman Old Style" pitchFamily="34" charset="-122"/>
-                <a:cs typeface="Bookman Old Style" pitchFamily="34" charset="-120"/>
+                  <a:srgbClr val="B1937E"/>
+                </a:solidFill>
+                <a:latin typeface="Georgia" pitchFamily="34" charset="0"/>
+                <a:ea typeface="Georgia" pitchFamily="34" charset="-122"/>
+                <a:cs typeface="Georgia" pitchFamily="34" charset="-120"/>
               </a:rPr>
               <a:t>Cliente feliz</a:t>
             </a:r>
@@ -5910,7 +5961,7 @@
             <a:r>
               <a:rPr lang="en-US" sz="1400" dirty="0">
                 <a:solidFill>
-                  <a:srgbClr val="9FB2C9"/>
+                  <a:srgbClr val="8A7E72"/>
                 </a:solidFill>
                 <a:latin typeface="Calibri" pitchFamily="34" charset="0"/>
                 <a:ea typeface="Calibri" pitchFamily="34" charset="-122"/>
@@ -5939,13 +5990,18 @@
             </a:avLst>
           </a:prstGeom>
           <a:solidFill>
-            <a:srgbClr val="13283F"/>
+            <a:srgbClr val="FFFFFF"/>
           </a:solidFill>
-          <a:ln/>
+          <a:ln w="12700">
+            <a:solidFill>
+              <a:srgbClr val="E3D9CC"/>
+            </a:solidFill>
+            <a:prstDash val="solid"/>
+          </a:ln>
           <a:effectLst>
-            <a:outerShdw sx="100000" sy="100000" kx="0" ky="0" algn="bl" rotWithShape="0" blurRad="127000" dist="38100" dir="5400000">
-              <a:srgbClr val="000000">
-                <a:alpha val="28000"/>
+            <a:outerShdw sx="100000" sy="100000" kx="0" ky="0" algn="bl" rotWithShape="0" blurRad="114300" dist="38100" dir="5400000">
+              <a:srgbClr val="7A6A55">
+                <a:alpha val="12000"/>
               </a:srgbClr>
             </a:outerShdw>
           </a:effectLst>
@@ -5966,9 +6022,14 @@
             <a:avLst/>
           </a:prstGeom>
           <a:solidFill>
-            <a:srgbClr val="16314F"/>
+            <a:srgbClr val="EADFD0"/>
           </a:solidFill>
-          <a:ln/>
+          <a:ln w="9525">
+            <a:solidFill>
+              <a:srgbClr val="E3D9CC"/>
+            </a:solidFill>
+            <a:prstDash val="solid"/>
+          </a:ln>
         </p:spPr>
       </p:sp>
       <p:pic>
@@ -6022,11 +6083,11 @@
             <a:r>
               <a:rPr lang="en-US" sz="1900" b="1" dirty="0">
                 <a:solidFill>
-                  <a:srgbClr val="C9A961"/>
-                </a:solidFill>
-                <a:latin typeface="Bookman Old Style" pitchFamily="34" charset="0"/>
-                <a:ea typeface="Bookman Old Style" pitchFamily="34" charset="-122"/>
-                <a:cs typeface="Bookman Old Style" pitchFamily="34" charset="-120"/>
+                  <a:srgbClr val="B1937E"/>
+                </a:solidFill>
+                <a:latin typeface="Georgia" pitchFamily="34" charset="0"/>
+                <a:ea typeface="Georgia" pitchFamily="34" charset="-122"/>
+                <a:cs typeface="Georgia" pitchFamily="34" charset="-120"/>
               </a:rPr>
               <a:t>Pedir é preciso</a:t>
             </a:r>
@@ -6061,7 +6122,7 @@
             <a:r>
               <a:rPr lang="en-US" sz="1400" dirty="0">
                 <a:solidFill>
-                  <a:srgbClr val="9FB2C9"/>
+                  <a:srgbClr val="8A7E72"/>
                 </a:solidFill>
                 <a:latin typeface="Calibri" pitchFamily="34" charset="0"/>
                 <a:ea typeface="Calibri" pitchFamily="34" charset="-122"/>
@@ -6090,13 +6151,18 @@
             </a:avLst>
           </a:prstGeom>
           <a:solidFill>
-            <a:srgbClr val="13283F"/>
+            <a:srgbClr val="FFFFFF"/>
           </a:solidFill>
-          <a:ln/>
+          <a:ln w="12700">
+            <a:solidFill>
+              <a:srgbClr val="E3D9CC"/>
+            </a:solidFill>
+            <a:prstDash val="solid"/>
+          </a:ln>
           <a:effectLst>
-            <a:outerShdw sx="100000" sy="100000" kx="0" ky="0" algn="bl" rotWithShape="0" blurRad="127000" dist="38100" dir="5400000">
-              <a:srgbClr val="000000">
-                <a:alpha val="28000"/>
+            <a:outerShdw sx="100000" sy="100000" kx="0" ky="0" algn="bl" rotWithShape="0" blurRad="114300" dist="38100" dir="5400000">
+              <a:srgbClr val="7A6A55">
+                <a:alpha val="12000"/>
               </a:srgbClr>
             </a:outerShdw>
           </a:effectLst>
@@ -6117,9 +6183,14 @@
             <a:avLst/>
           </a:prstGeom>
           <a:solidFill>
-            <a:srgbClr val="16314F"/>
+            <a:srgbClr val="EADFD0"/>
           </a:solidFill>
-          <a:ln/>
+          <a:ln w="9525">
+            <a:solidFill>
+              <a:srgbClr val="E3D9CC"/>
+            </a:solidFill>
+            <a:prstDash val="solid"/>
+          </a:ln>
         </p:spPr>
       </p:sp>
       <p:pic>
@@ -6173,11 +6244,11 @@
             <a:r>
               <a:rPr lang="en-US" sz="1900" b="1" dirty="0">
                 <a:solidFill>
-                  <a:srgbClr val="C9A961"/>
-                </a:solidFill>
-                <a:latin typeface="Bookman Old Style" pitchFamily="34" charset="0"/>
-                <a:ea typeface="Bookman Old Style" pitchFamily="34" charset="-122"/>
-                <a:cs typeface="Bookman Old Style" pitchFamily="34" charset="-120"/>
+                  <a:srgbClr val="B1937E"/>
+                </a:solidFill>
+                <a:latin typeface="Georgia" pitchFamily="34" charset="0"/>
+                <a:ea typeface="Georgia" pitchFamily="34" charset="-122"/>
+                <a:cs typeface="Georgia" pitchFamily="34" charset="-120"/>
               </a:rPr>
               <a:t>Facilitar</a:t>
             </a:r>
@@ -6212,7 +6283,7 @@
             <a:r>
               <a:rPr lang="en-US" sz="1400" dirty="0">
                 <a:solidFill>
-                  <a:srgbClr val="9FB2C9"/>
+                  <a:srgbClr val="8A7E72"/>
                 </a:solidFill>
                 <a:latin typeface="Calibri" pitchFamily="34" charset="0"/>
                 <a:ea typeface="Calibri" pitchFamily="34" charset="-122"/>
@@ -6241,7 +6312,7 @@
           <a:noFill/>
           <a:ln w="9525">
             <a:solidFill>
-              <a:srgbClr val="5C708A">
+              <a:srgbClr val="A89A86">
                 <a:alpha val="60000"/>
               </a:srgbClr>
             </a:solidFill>
@@ -6276,7 +6347,7 @@
             <a:r>
               <a:rPr lang="en-US" sz="900" dirty="0">
                 <a:solidFill>
-                  <a:srgbClr val="5C708A"/>
+                  <a:srgbClr val="A89A86"/>
                 </a:solidFill>
                 <a:latin typeface="Calibri" pitchFamily="34" charset="0"/>
                 <a:ea typeface="Calibri" pitchFamily="34" charset="-122"/>
@@ -6315,7 +6386,7 @@
             <a:r>
               <a:rPr lang="en-US" sz="900" dirty="0">
                 <a:solidFill>
-                  <a:srgbClr val="5C708A"/>
+                  <a:srgbClr val="A89A86"/>
                 </a:solidFill>
                 <a:latin typeface="Calibri" pitchFamily="34" charset="0"/>
                 <a:ea typeface="Calibri" pitchFamily="34" charset="-122"/>
@@ -6341,7 +6412,7 @@
     <p:bg>
       <p:bgPr>
         <a:solidFill>
-          <a:srgbClr val="0B1D33"/>
+          <a:srgbClr val="F8F6F3"/>
         </a:solidFill>
       </p:bgPr>
     </p:bg>
@@ -6386,7 +6457,7 @@
             <a:r>
               <a:rPr lang="en-US" sz="1200" b="1" spc="300" kern="0" dirty="0">
                 <a:solidFill>
-                  <a:srgbClr val="4A9EFF"/>
+                  <a:srgbClr val="9A7B66"/>
                 </a:solidFill>
                 <a:latin typeface="Calibri" pitchFamily="34" charset="0"/>
                 <a:ea typeface="Calibri" pitchFamily="34" charset="-122"/>
@@ -6428,11 +6499,11 @@
             <a:r>
               <a:rPr lang="en-US" sz="3200" b="1" dirty="0">
                 <a:solidFill>
-                  <a:srgbClr val="EAF1FA"/>
-                </a:solidFill>
-                <a:latin typeface="Bookman Old Style" pitchFamily="34" charset="0"/>
-                <a:ea typeface="Bookman Old Style" pitchFamily="34" charset="-122"/>
-                <a:cs typeface="Bookman Old Style" pitchFamily="34" charset="-120"/>
+                  <a:srgbClr val="33302B"/>
+                </a:solidFill>
+                <a:latin typeface="Georgia" pitchFamily="34" charset="0"/>
+                <a:ea typeface="Georgia" pitchFamily="34" charset="-122"/>
+                <a:cs typeface="Georgia" pitchFamily="34" charset="-120"/>
               </a:rPr>
               <a:t>A força da referência</a:t>
             </a:r>
@@ -6457,13 +6528,18 @@
             </a:avLst>
           </a:prstGeom>
           <a:solidFill>
-            <a:srgbClr val="13283F"/>
+            <a:srgbClr val="FFFFFF"/>
           </a:solidFill>
-          <a:ln/>
+          <a:ln w="12700">
+            <a:solidFill>
+              <a:srgbClr val="E3D9CC"/>
+            </a:solidFill>
+            <a:prstDash val="solid"/>
+          </a:ln>
           <a:effectLst>
-            <a:outerShdw sx="100000" sy="100000" kx="0" ky="0" algn="bl" rotWithShape="0" blurRad="127000" dist="38100" dir="5400000">
-              <a:srgbClr val="000000">
-                <a:alpha val="28000"/>
+            <a:outerShdw sx="100000" sy="100000" kx="0" ky="0" algn="bl" rotWithShape="0" blurRad="114300" dist="38100" dir="5400000">
+              <a:srgbClr val="7A6A55">
+                <a:alpha val="12000"/>
               </a:srgbClr>
             </a:outerShdw>
           </a:effectLst>
@@ -6496,11 +6572,11 @@
             <a:r>
               <a:rPr lang="en-US" sz="4600" b="1" dirty="0">
                 <a:solidFill>
-                  <a:srgbClr val="C9A961"/>
-                </a:solidFill>
-                <a:latin typeface="Bookman Old Style" pitchFamily="34" charset="0"/>
-                <a:ea typeface="Bookman Old Style" pitchFamily="34" charset="-122"/>
-                <a:cs typeface="Bookman Old Style" pitchFamily="34" charset="-120"/>
+                  <a:srgbClr val="B1937E"/>
+                </a:solidFill>
+                <a:latin typeface="Georgia" pitchFamily="34" charset="0"/>
+                <a:ea typeface="Georgia" pitchFamily="34" charset="-122"/>
+                <a:cs typeface="Georgia" pitchFamily="34" charset="-120"/>
               </a:rPr>
               <a:t>0€</a:t>
             </a:r>
@@ -6535,7 +6611,7 @@
             <a:r>
               <a:rPr lang="en-US" sz="1500" b="1" dirty="0">
                 <a:solidFill>
-                  <a:srgbClr val="EAF1FA"/>
+                  <a:srgbClr val="33302B"/>
                 </a:solidFill>
                 <a:latin typeface="Calibri" pitchFamily="34" charset="0"/>
                 <a:ea typeface="Calibri" pitchFamily="34" charset="-122"/>
@@ -6564,7 +6640,7 @@
           <a:noFill/>
           <a:ln w="9525">
             <a:solidFill>
-              <a:srgbClr val="5C708A">
+              <a:srgbClr val="A89A86">
                 <a:alpha val="60000"/>
               </a:srgbClr>
             </a:solidFill>
@@ -6599,7 +6675,7 @@
             <a:r>
               <a:rPr lang="en-US" sz="1300" dirty="0">
                 <a:solidFill>
-                  <a:srgbClr val="9FB2C9"/>
+                  <a:srgbClr val="8A7E72"/>
                 </a:solidFill>
                 <a:latin typeface="Calibri" pitchFamily="34" charset="0"/>
                 <a:ea typeface="Calibri" pitchFamily="34" charset="-122"/>
@@ -6628,13 +6704,18 @@
             </a:avLst>
           </a:prstGeom>
           <a:solidFill>
-            <a:srgbClr val="13283F"/>
+            <a:srgbClr val="FFFFFF"/>
           </a:solidFill>
-          <a:ln/>
+          <a:ln w="12700">
+            <a:solidFill>
+              <a:srgbClr val="E3D9CC"/>
+            </a:solidFill>
+            <a:prstDash val="solid"/>
+          </a:ln>
           <a:effectLst>
-            <a:outerShdw sx="100000" sy="100000" kx="0" ky="0" algn="bl" rotWithShape="0" blurRad="127000" dist="38100" dir="5400000">
-              <a:srgbClr val="000000">
-                <a:alpha val="28000"/>
+            <a:outerShdw sx="100000" sy="100000" kx="0" ky="0" algn="bl" rotWithShape="0" blurRad="114300" dist="38100" dir="5400000">
+              <a:srgbClr val="7A6A55">
+                <a:alpha val="12000"/>
               </a:srgbClr>
             </a:outerShdw>
           </a:effectLst>
@@ -6667,11 +6748,11 @@
             <a:r>
               <a:rPr lang="en-US" sz="4600" b="1" dirty="0">
                 <a:solidFill>
-                  <a:srgbClr val="4A9EFF"/>
-                </a:solidFill>
-                <a:latin typeface="Bookman Old Style" pitchFamily="34" charset="0"/>
-                <a:ea typeface="Bookman Old Style" pitchFamily="34" charset="-122"/>
-                <a:cs typeface="Bookman Old Style" pitchFamily="34" charset="-120"/>
+                  <a:srgbClr val="9A7B66"/>
+                </a:solidFill>
+                <a:latin typeface="Georgia" pitchFamily="34" charset="0"/>
+                <a:ea typeface="Georgia" pitchFamily="34" charset="-122"/>
+                <a:cs typeface="Georgia" pitchFamily="34" charset="-120"/>
               </a:rPr>
               <a:t>+</a:t>
             </a:r>
@@ -6706,7 +6787,7 @@
             <a:r>
               <a:rPr lang="en-US" sz="1500" b="1" dirty="0">
                 <a:solidFill>
-                  <a:srgbClr val="EAF1FA"/>
+                  <a:srgbClr val="33302B"/>
                 </a:solidFill>
                 <a:latin typeface="Calibri" pitchFamily="34" charset="0"/>
                 <a:ea typeface="Calibri" pitchFamily="34" charset="-122"/>
@@ -6735,7 +6816,7 @@
           <a:noFill/>
           <a:ln w="9525">
             <a:solidFill>
-              <a:srgbClr val="5C708A">
+              <a:srgbClr val="A89A86">
                 <a:alpha val="60000"/>
               </a:srgbClr>
             </a:solidFill>
@@ -6770,7 +6851,7 @@
             <a:r>
               <a:rPr lang="en-US" sz="1300" dirty="0">
                 <a:solidFill>
-                  <a:srgbClr val="9FB2C9"/>
+                  <a:srgbClr val="8A7E72"/>
                 </a:solidFill>
                 <a:latin typeface="Calibri" pitchFamily="34" charset="0"/>
                 <a:ea typeface="Calibri" pitchFamily="34" charset="-122"/>
@@ -6799,13 +6880,18 @@
             </a:avLst>
           </a:prstGeom>
           <a:solidFill>
-            <a:srgbClr val="13283F"/>
+            <a:srgbClr val="FFFFFF"/>
           </a:solidFill>
-          <a:ln/>
+          <a:ln w="12700">
+            <a:solidFill>
+              <a:srgbClr val="E3D9CC"/>
+            </a:solidFill>
+            <a:prstDash val="solid"/>
+          </a:ln>
           <a:effectLst>
-            <a:outerShdw sx="100000" sy="100000" kx="0" ky="0" algn="bl" rotWithShape="0" blurRad="127000" dist="38100" dir="5400000">
-              <a:srgbClr val="000000">
-                <a:alpha val="28000"/>
+            <a:outerShdw sx="100000" sy="100000" kx="0" ky="0" algn="bl" rotWithShape="0" blurRad="114300" dist="38100" dir="5400000">
+              <a:srgbClr val="7A6A55">
+                <a:alpha val="12000"/>
               </a:srgbClr>
             </a:outerShdw>
           </a:effectLst>
@@ -6838,11 +6924,11 @@
             <a:r>
               <a:rPr lang="en-US" sz="4600" b="1" dirty="0">
                 <a:solidFill>
-                  <a:srgbClr val="4A9EFF"/>
-                </a:solidFill>
-                <a:latin typeface="Bookman Old Style" pitchFamily="34" charset="0"/>
-                <a:ea typeface="Bookman Old Style" pitchFamily="34" charset="-122"/>
-                <a:cs typeface="Bookman Old Style" pitchFamily="34" charset="-120"/>
+                  <a:srgbClr val="9A7B66"/>
+                </a:solidFill>
+                <a:latin typeface="Georgia" pitchFamily="34" charset="0"/>
+                <a:ea typeface="Georgia" pitchFamily="34" charset="-122"/>
+                <a:cs typeface="Georgia" pitchFamily="34" charset="-120"/>
               </a:rPr>
               <a:t>1→3</a:t>
             </a:r>
@@ -6877,7 +6963,7 @@
             <a:r>
               <a:rPr lang="en-US" sz="1500" b="1" dirty="0">
                 <a:solidFill>
-                  <a:srgbClr val="EAF1FA"/>
+                  <a:srgbClr val="33302B"/>
                 </a:solidFill>
                 <a:latin typeface="Calibri" pitchFamily="34" charset="0"/>
                 <a:ea typeface="Calibri" pitchFamily="34" charset="-122"/>
@@ -6906,7 +6992,7 @@
           <a:noFill/>
           <a:ln w="9525">
             <a:solidFill>
-              <a:srgbClr val="5C708A">
+              <a:srgbClr val="A89A86">
                 <a:alpha val="60000"/>
               </a:srgbClr>
             </a:solidFill>
@@ -6941,7 +7027,7 @@
             <a:r>
               <a:rPr lang="en-US" sz="1300" dirty="0">
                 <a:solidFill>
-                  <a:srgbClr val="9FB2C9"/>
+                  <a:srgbClr val="8A7E72"/>
                 </a:solidFill>
                 <a:latin typeface="Calibri" pitchFamily="34" charset="0"/>
                 <a:ea typeface="Calibri" pitchFamily="34" charset="-122"/>
@@ -6980,7 +7066,7 @@
             <a:r>
               <a:rPr lang="en-US" sz="1500" i="1" dirty="0">
                 <a:solidFill>
-                  <a:srgbClr val="C9A961"/>
+                  <a:srgbClr val="B1937E"/>
                 </a:solidFill>
                 <a:latin typeface="Calibri" pitchFamily="34" charset="0"/>
                 <a:ea typeface="Calibri" pitchFamily="34" charset="-122"/>
@@ -7009,7 +7095,7 @@
           <a:noFill/>
           <a:ln w="9525">
             <a:solidFill>
-              <a:srgbClr val="5C708A">
+              <a:srgbClr val="A89A86">
                 <a:alpha val="60000"/>
               </a:srgbClr>
             </a:solidFill>
@@ -7044,7 +7130,7 @@
             <a:r>
               <a:rPr lang="en-US" sz="900" dirty="0">
                 <a:solidFill>
-                  <a:srgbClr val="5C708A"/>
+                  <a:srgbClr val="A89A86"/>
                 </a:solidFill>
                 <a:latin typeface="Calibri" pitchFamily="34" charset="0"/>
                 <a:ea typeface="Calibri" pitchFamily="34" charset="-122"/>
@@ -7083,7 +7169,7 @@
             <a:r>
               <a:rPr lang="en-US" sz="900" dirty="0">
                 <a:solidFill>
-                  <a:srgbClr val="5C708A"/>
+                  <a:srgbClr val="A89A86"/>
                 </a:solidFill>
                 <a:latin typeface="Calibri" pitchFamily="34" charset="0"/>
                 <a:ea typeface="Calibri" pitchFamily="34" charset="-122"/>
@@ -7109,7 +7195,7 @@
     <p:bg>
       <p:bgPr>
         <a:solidFill>
-          <a:srgbClr val="0B1D33"/>
+          <a:srgbClr val="F8F6F3"/>
         </a:solidFill>
       </p:bgPr>
     </p:bg>
@@ -7154,7 +7240,7 @@
             <a:r>
               <a:rPr lang="en-US" sz="1200" b="1" spc="300" kern="0" dirty="0">
                 <a:solidFill>
-                  <a:srgbClr val="4A9EFF"/>
+                  <a:srgbClr val="9A7B66"/>
                 </a:solidFill>
                 <a:latin typeface="Calibri" pitchFamily="34" charset="0"/>
                 <a:ea typeface="Calibri" pitchFamily="34" charset="-122"/>
@@ -7196,11 +7282,11 @@
             <a:r>
               <a:rPr lang="en-US" sz="3200" b="1" dirty="0">
                 <a:solidFill>
-                  <a:srgbClr val="EAF1FA"/>
-                </a:solidFill>
-                <a:latin typeface="Bookman Old Style" pitchFamily="34" charset="0"/>
-                <a:ea typeface="Bookman Old Style" pitchFamily="34" charset="-122"/>
-                <a:cs typeface="Bookman Old Style" pitchFamily="34" charset="-120"/>
+                  <a:srgbClr val="33302B"/>
+                </a:solidFill>
+                <a:latin typeface="Georgia" pitchFamily="34" charset="0"/>
+                <a:ea typeface="Georgia" pitchFamily="34" charset="-122"/>
+                <a:cs typeface="Georgia" pitchFamily="34" charset="-120"/>
               </a:rPr>
               <a:t>Erros comuns na atração</a:t>
             </a:r>
@@ -7225,13 +7311,18 @@
             </a:avLst>
           </a:prstGeom>
           <a:solidFill>
-            <a:srgbClr val="13283F"/>
+            <a:srgbClr val="FFFFFF"/>
           </a:solidFill>
-          <a:ln/>
+          <a:ln w="12700">
+            <a:solidFill>
+              <a:srgbClr val="E3D9CC"/>
+            </a:solidFill>
+            <a:prstDash val="solid"/>
+          </a:ln>
           <a:effectLst>
-            <a:outerShdw sx="100000" sy="100000" kx="0" ky="0" algn="bl" rotWithShape="0" blurRad="127000" dist="38100" dir="5400000">
-              <a:srgbClr val="000000">
-                <a:alpha val="28000"/>
+            <a:outerShdw sx="100000" sy="100000" kx="0" ky="0" algn="bl" rotWithShape="0" blurRad="114300" dist="38100" dir="5400000">
+              <a:srgbClr val="7A6A55">
+                <a:alpha val="12000"/>
               </a:srgbClr>
             </a:outerShdw>
           </a:effectLst>
@@ -7252,9 +7343,14 @@
             <a:avLst/>
           </a:prstGeom>
           <a:solidFill>
-            <a:srgbClr val="16314F"/>
+            <a:srgbClr val="EADFD0"/>
           </a:solidFill>
-          <a:ln/>
+          <a:ln w="9525">
+            <a:solidFill>
+              <a:srgbClr val="E3D9CC"/>
+            </a:solidFill>
+            <a:prstDash val="solid"/>
+          </a:ln>
         </p:spPr>
       </p:sp>
       <p:pic>
@@ -7308,11 +7404,11 @@
             <a:r>
               <a:rPr lang="en-US" sz="1800" b="1" dirty="0">
                 <a:solidFill>
-                  <a:srgbClr val="C9A961"/>
-                </a:solidFill>
-                <a:latin typeface="Bookman Old Style" pitchFamily="34" charset="0"/>
-                <a:ea typeface="Bookman Old Style" pitchFamily="34" charset="-122"/>
-                <a:cs typeface="Bookman Old Style" pitchFamily="34" charset="-120"/>
+                  <a:srgbClr val="B1937E"/>
+                </a:solidFill>
+                <a:latin typeface="Georgia" pitchFamily="34" charset="0"/>
+                <a:ea typeface="Georgia" pitchFamily="34" charset="-122"/>
+                <a:cs typeface="Georgia" pitchFamily="34" charset="-120"/>
               </a:rPr>
               <a:t>Publicar sem estratégia</a:t>
             </a:r>
@@ -7347,7 +7443,7 @@
             <a:r>
               <a:rPr lang="en-US" sz="1350" dirty="0">
                 <a:solidFill>
-                  <a:srgbClr val="9FB2C9"/>
+                  <a:srgbClr val="8A7E72"/>
                 </a:solidFill>
                 <a:latin typeface="Calibri" pitchFamily="34" charset="0"/>
                 <a:ea typeface="Calibri" pitchFamily="34" charset="-122"/>
@@ -7376,13 +7472,18 @@
             </a:avLst>
           </a:prstGeom>
           <a:solidFill>
-            <a:srgbClr val="13283F"/>
+            <a:srgbClr val="FFFFFF"/>
           </a:solidFill>
-          <a:ln/>
+          <a:ln w="12700">
+            <a:solidFill>
+              <a:srgbClr val="E3D9CC"/>
+            </a:solidFill>
+            <a:prstDash val="solid"/>
+          </a:ln>
           <a:effectLst>
-            <a:outerShdw sx="100000" sy="100000" kx="0" ky="0" algn="bl" rotWithShape="0" blurRad="127000" dist="38100" dir="5400000">
-              <a:srgbClr val="000000">
-                <a:alpha val="28000"/>
+            <a:outerShdw sx="100000" sy="100000" kx="0" ky="0" algn="bl" rotWithShape="0" blurRad="114300" dist="38100" dir="5400000">
+              <a:srgbClr val="7A6A55">
+                <a:alpha val="12000"/>
               </a:srgbClr>
             </a:outerShdw>
           </a:effectLst>
@@ -7403,9 +7504,14 @@
             <a:avLst/>
           </a:prstGeom>
           <a:solidFill>
-            <a:srgbClr val="16314F"/>
+            <a:srgbClr val="EADFD0"/>
           </a:solidFill>
-          <a:ln/>
+          <a:ln w="9525">
+            <a:solidFill>
+              <a:srgbClr val="E3D9CC"/>
+            </a:solidFill>
+            <a:prstDash val="solid"/>
+          </a:ln>
         </p:spPr>
       </p:sp>
       <p:pic>
@@ -7459,11 +7565,11 @@
             <a:r>
               <a:rPr lang="en-US" sz="1800" b="1" dirty="0">
                 <a:solidFill>
-                  <a:srgbClr val="C9A961"/>
-                </a:solidFill>
-                <a:latin typeface="Bookman Old Style" pitchFamily="34" charset="0"/>
-                <a:ea typeface="Bookman Old Style" pitchFamily="34" charset="-122"/>
-                <a:cs typeface="Bookman Old Style" pitchFamily="34" charset="-120"/>
+                  <a:srgbClr val="B1937E"/>
+                </a:solidFill>
+                <a:latin typeface="Georgia" pitchFamily="34" charset="0"/>
+                <a:ea typeface="Georgia" pitchFamily="34" charset="-122"/>
+                <a:cs typeface="Georgia" pitchFamily="34" charset="-120"/>
               </a:rPr>
               <a:t>Só mostrar, nunca educar</a:t>
             </a:r>
@@ -7498,7 +7604,7 @@
             <a:r>
               <a:rPr lang="en-US" sz="1350" dirty="0">
                 <a:solidFill>
-                  <a:srgbClr val="9FB2C9"/>
+                  <a:srgbClr val="8A7E72"/>
                 </a:solidFill>
                 <a:latin typeface="Calibri" pitchFamily="34" charset="0"/>
                 <a:ea typeface="Calibri" pitchFamily="34" charset="-122"/>
@@ -7527,13 +7633,18 @@
             </a:avLst>
           </a:prstGeom>
           <a:solidFill>
-            <a:srgbClr val="13283F"/>
+            <a:srgbClr val="FFFFFF"/>
           </a:solidFill>
-          <a:ln/>
+          <a:ln w="12700">
+            <a:solidFill>
+              <a:srgbClr val="E3D9CC"/>
+            </a:solidFill>
+            <a:prstDash val="solid"/>
+          </a:ln>
           <a:effectLst>
-            <a:outerShdw sx="100000" sy="100000" kx="0" ky="0" algn="bl" rotWithShape="0" blurRad="127000" dist="38100" dir="5400000">
-              <a:srgbClr val="000000">
-                <a:alpha val="28000"/>
+            <a:outerShdw sx="100000" sy="100000" kx="0" ky="0" algn="bl" rotWithShape="0" blurRad="114300" dist="38100" dir="5400000">
+              <a:srgbClr val="7A6A55">
+                <a:alpha val="12000"/>
               </a:srgbClr>
             </a:outerShdw>
           </a:effectLst>
@@ -7554,9 +7665,14 @@
             <a:avLst/>
           </a:prstGeom>
           <a:solidFill>
-            <a:srgbClr val="16314F"/>
+            <a:srgbClr val="EADFD0"/>
           </a:solidFill>
-          <a:ln/>
+          <a:ln w="9525">
+            <a:solidFill>
+              <a:srgbClr val="E3D9CC"/>
+            </a:solidFill>
+            <a:prstDash val="solid"/>
+          </a:ln>
         </p:spPr>
       </p:sp>
       <p:pic>
@@ -7610,11 +7726,11 @@
             <a:r>
               <a:rPr lang="en-US" sz="1800" b="1" dirty="0">
                 <a:solidFill>
-                  <a:srgbClr val="C9A961"/>
-                </a:solidFill>
-                <a:latin typeface="Bookman Old Style" pitchFamily="34" charset="0"/>
-                <a:ea typeface="Bookman Old Style" pitchFamily="34" charset="-122"/>
-                <a:cs typeface="Bookman Old Style" pitchFamily="34" charset="-120"/>
+                  <a:srgbClr val="B1937E"/>
+                </a:solidFill>
+                <a:latin typeface="Georgia" pitchFamily="34" charset="0"/>
+                <a:ea typeface="Georgia" pitchFamily="34" charset="-122"/>
+                <a:cs typeface="Georgia" pitchFamily="34" charset="-120"/>
               </a:rPr>
               <a:t>Pedir parcerias sem dar</a:t>
             </a:r>
@@ -7649,7 +7765,7 @@
             <a:r>
               <a:rPr lang="en-US" sz="1350" dirty="0">
                 <a:solidFill>
-                  <a:srgbClr val="9FB2C9"/>
+                  <a:srgbClr val="8A7E72"/>
                 </a:solidFill>
                 <a:latin typeface="Calibri" pitchFamily="34" charset="0"/>
                 <a:ea typeface="Calibri" pitchFamily="34" charset="-122"/>
@@ -7678,13 +7794,18 @@
             </a:avLst>
           </a:prstGeom>
           <a:solidFill>
-            <a:srgbClr val="13283F"/>
+            <a:srgbClr val="FFFFFF"/>
           </a:solidFill>
-          <a:ln/>
+          <a:ln w="12700">
+            <a:solidFill>
+              <a:srgbClr val="E3D9CC"/>
+            </a:solidFill>
+            <a:prstDash val="solid"/>
+          </a:ln>
           <a:effectLst>
-            <a:outerShdw sx="100000" sy="100000" kx="0" ky="0" algn="bl" rotWithShape="0" blurRad="127000" dist="38100" dir="5400000">
-              <a:srgbClr val="000000">
-                <a:alpha val="28000"/>
+            <a:outerShdw sx="100000" sy="100000" kx="0" ky="0" algn="bl" rotWithShape="0" blurRad="114300" dist="38100" dir="5400000">
+              <a:srgbClr val="7A6A55">
+                <a:alpha val="12000"/>
               </a:srgbClr>
             </a:outerShdw>
           </a:effectLst>
@@ -7705,9 +7826,14 @@
             <a:avLst/>
           </a:prstGeom>
           <a:solidFill>
-            <a:srgbClr val="16314F"/>
+            <a:srgbClr val="EADFD0"/>
           </a:solidFill>
-          <a:ln/>
+          <a:ln w="9525">
+            <a:solidFill>
+              <a:srgbClr val="E3D9CC"/>
+            </a:solidFill>
+            <a:prstDash val="solid"/>
+          </a:ln>
         </p:spPr>
       </p:sp>
       <p:pic>
@@ -7761,11 +7887,11 @@
             <a:r>
               <a:rPr lang="en-US" sz="1800" b="1" dirty="0">
                 <a:solidFill>
-                  <a:srgbClr val="C9A961"/>
-                </a:solidFill>
-                <a:latin typeface="Bookman Old Style" pitchFamily="34" charset="0"/>
-                <a:ea typeface="Bookman Old Style" pitchFamily="34" charset="-122"/>
-                <a:cs typeface="Bookman Old Style" pitchFamily="34" charset="-120"/>
+                  <a:srgbClr val="B1937E"/>
+                </a:solidFill>
+                <a:latin typeface="Georgia" pitchFamily="34" charset="0"/>
+                <a:ea typeface="Georgia" pitchFamily="34" charset="-122"/>
+                <a:cs typeface="Georgia" pitchFamily="34" charset="-120"/>
               </a:rPr>
               <a:t>Esquecer de pedir referências</a:t>
             </a:r>
@@ -7800,7 +7926,7 @@
             <a:r>
               <a:rPr lang="en-US" sz="1350" dirty="0">
                 <a:solidFill>
-                  <a:srgbClr val="9FB2C9"/>
+                  <a:srgbClr val="8A7E72"/>
                 </a:solidFill>
                 <a:latin typeface="Calibri" pitchFamily="34" charset="0"/>
                 <a:ea typeface="Calibri" pitchFamily="34" charset="-122"/>
@@ -7829,7 +7955,7 @@
           <a:noFill/>
           <a:ln w="9525">
             <a:solidFill>
-              <a:srgbClr val="5C708A">
+              <a:srgbClr val="A89A86">
                 <a:alpha val="60000"/>
               </a:srgbClr>
             </a:solidFill>
@@ -7864,7 +7990,7 @@
             <a:r>
               <a:rPr lang="en-US" sz="900" dirty="0">
                 <a:solidFill>
-                  <a:srgbClr val="5C708A"/>
+                  <a:srgbClr val="A89A86"/>
                 </a:solidFill>
                 <a:latin typeface="Calibri" pitchFamily="34" charset="0"/>
                 <a:ea typeface="Calibri" pitchFamily="34" charset="-122"/>
@@ -7903,7 +8029,7 @@
             <a:r>
               <a:rPr lang="en-US" sz="900" dirty="0">
                 <a:solidFill>
-                  <a:srgbClr val="5C708A"/>
+                  <a:srgbClr val="A89A86"/>
                 </a:solidFill>
                 <a:latin typeface="Calibri" pitchFamily="34" charset="0"/>
                 <a:ea typeface="Calibri" pitchFamily="34" charset="-122"/>
@@ -7929,7 +8055,7 @@
     <p:bg>
       <p:bgPr>
         <a:solidFill>
-          <a:srgbClr val="0B1D33"/>
+          <a:srgbClr val="F8F6F3"/>
         </a:solidFill>
       </p:bgPr>
     </p:bg>
@@ -7949,51 +8075,7 @@
       </p:grpSpPr>
       <p:sp>
         <p:nvSpPr>
-          <p:cNvPr id="2" name="Shape 0"/>
-          <p:cNvSpPr/>
-          <p:nvPr/>
-        </p:nvSpPr>
-        <p:spPr>
-          <a:xfrm>
-            <a:off x="7772400" y="-1371600"/>
-            <a:ext cx="5486400" cy="5486400"/>
-          </a:xfrm>
-          <a:prstGeom prst="ellipse">
-            <a:avLst/>
-          </a:prstGeom>
-          <a:solidFill>
-            <a:srgbClr val="4A9EFF">
-              <a:alpha val="10000"/>
-            </a:srgbClr>
-          </a:solidFill>
-          <a:ln/>
-        </p:spPr>
-      </p:sp>
-      <p:sp>
-        <p:nvSpPr>
-          <p:cNvPr id="3" name="Shape 1"/>
-          <p:cNvSpPr/>
-          <p:nvPr/>
-        </p:nvSpPr>
-        <p:spPr>
-          <a:xfrm>
-            <a:off x="-1371600" y="4114800"/>
-            <a:ext cx="4572000" cy="4572000"/>
-          </a:xfrm>
-          <a:prstGeom prst="ellipse">
-            <a:avLst/>
-          </a:prstGeom>
-          <a:solidFill>
-            <a:srgbClr val="C9A961">
-              <a:alpha val="8000"/>
-            </a:srgbClr>
-          </a:solidFill>
-          <a:ln/>
-        </p:spPr>
-      </p:sp>
-      <p:sp>
-        <p:nvSpPr>
-          <p:cNvPr id="4" name="Text 2"/>
+          <p:cNvPr id="2" name="Text 0"/>
           <p:cNvSpPr/>
           <p:nvPr/>
         </p:nvSpPr>
@@ -8018,11 +8100,11 @@
             <a:r>
               <a:rPr lang="en-US" sz="15000" b="1" dirty="0">
                 <a:solidFill>
-                  <a:srgbClr val="16314F"/>
-                </a:solidFill>
-                <a:latin typeface="Bookman Old Style" pitchFamily="34" charset="0"/>
-                <a:ea typeface="Bookman Old Style" pitchFamily="34" charset="-122"/>
-                <a:cs typeface="Bookman Old Style" pitchFamily="34" charset="-120"/>
+                  <a:srgbClr val="EADFD0"/>
+                </a:solidFill>
+                <a:latin typeface="Georgia" pitchFamily="34" charset="0"/>
+                <a:ea typeface="Georgia" pitchFamily="34" charset="-122"/>
+                <a:cs typeface="Georgia" pitchFamily="34" charset="-120"/>
               </a:rPr>
               <a:t>C</a:t>
             </a:r>
@@ -8032,7 +8114,7 @@
       </p:sp>
       <p:sp>
         <p:nvSpPr>
-          <p:cNvPr id="5" name="Text 3"/>
+          <p:cNvPr id="3" name="Text 1"/>
           <p:cNvSpPr/>
           <p:nvPr/>
         </p:nvSpPr>
@@ -8057,7 +8139,7 @@
             <a:r>
               <a:rPr lang="en-US" sz="1300" b="1" spc="400" kern="0" dirty="0">
                 <a:solidFill>
-                  <a:srgbClr val="C9A961"/>
+                  <a:srgbClr val="B1937E"/>
                 </a:solidFill>
                 <a:latin typeface="Calibri" pitchFamily="34" charset="0"/>
                 <a:ea typeface="Calibri" pitchFamily="34" charset="-122"/>
@@ -8071,7 +8153,7 @@
       </p:sp>
       <p:sp>
         <p:nvSpPr>
-          <p:cNvPr id="6" name="Text 4"/>
+          <p:cNvPr id="4" name="Text 2"/>
           <p:cNvSpPr/>
           <p:nvPr/>
         </p:nvSpPr>
@@ -8097,23 +8179,23 @@
               <a:buNone/>
             </a:pPr>
             <a:r>
-              <a:rPr lang="en-US" sz="4400" b="1" dirty="0">
-                <a:solidFill>
-                  <a:srgbClr val="EAF1FA"/>
-                </a:solidFill>
-                <a:latin typeface="Bookman Old Style" pitchFamily="34" charset="0"/>
-                <a:ea typeface="Bookman Old Style" pitchFamily="34" charset="-122"/>
-                <a:cs typeface="Bookman Old Style" pitchFamily="34" charset="-120"/>
+              <a:rPr lang="en-US" sz="4000" b="1" dirty="0">
+                <a:solidFill>
+                  <a:srgbClr val="33302B"/>
+                </a:solidFill>
+                <a:latin typeface="Georgia" pitchFamily="34" charset="0"/>
+                <a:ea typeface="Georgia" pitchFamily="34" charset="-122"/>
+                <a:cs typeface="Georgia" pitchFamily="34" charset="-120"/>
               </a:rPr>
               <a:t>O Trabalho desta Semana</a:t>
             </a:r>
-            <a:endParaRPr lang="en-US" sz="4400" dirty="0"/>
-          </a:p>
-        </p:txBody>
-      </p:sp>
-      <p:sp>
-        <p:nvSpPr>
-          <p:cNvPr id="7" name="Text 5"/>
+            <a:endParaRPr lang="en-US" sz="4000" dirty="0"/>
+          </a:p>
+        </p:txBody>
+      </p:sp>
+      <p:sp>
+        <p:nvSpPr>
+          <p:cNvPr id="5" name="Text 3"/>
           <p:cNvSpPr/>
           <p:nvPr/>
         </p:nvSpPr>
@@ -8138,7 +8220,7 @@
             <a:r>
               <a:rPr lang="en-US" sz="1600" dirty="0">
                 <a:solidFill>
-                  <a:srgbClr val="9FB2C9"/>
+                  <a:srgbClr val="8A7E72"/>
                 </a:solidFill>
                 <a:latin typeface="Calibri" pitchFamily="34" charset="0"/>
                 <a:ea typeface="Calibri" pitchFamily="34" charset="-122"/>
@@ -8152,7 +8234,7 @@
       </p:sp>
       <p:sp>
         <p:nvSpPr>
-          <p:cNvPr id="8" name="Shape 6"/>
+          <p:cNvPr id="6" name="Shape 4"/>
           <p:cNvSpPr/>
           <p:nvPr/>
         </p:nvSpPr>
@@ -8167,7 +8249,7 @@
           <a:noFill/>
           <a:ln w="9525">
             <a:solidFill>
-              <a:srgbClr val="5C708A">
+              <a:srgbClr val="A89A86">
                 <a:alpha val="60000"/>
               </a:srgbClr>
             </a:solidFill>
@@ -8177,7 +8259,7 @@
       </p:sp>
       <p:sp>
         <p:nvSpPr>
-          <p:cNvPr id="9" name="Text 7"/>
+          <p:cNvPr id="7" name="Text 5"/>
           <p:cNvSpPr/>
           <p:nvPr/>
         </p:nvSpPr>
@@ -8202,7 +8284,7 @@
             <a:r>
               <a:rPr lang="en-US" sz="900" dirty="0">
                 <a:solidFill>
-                  <a:srgbClr val="5C708A"/>
+                  <a:srgbClr val="A89A86"/>
                 </a:solidFill>
                 <a:latin typeface="Calibri" pitchFamily="34" charset="0"/>
                 <a:ea typeface="Calibri" pitchFamily="34" charset="-122"/>
@@ -8216,7 +8298,7 @@
       </p:sp>
       <p:sp>
         <p:nvSpPr>
-          <p:cNvPr id="10" name="Text 8"/>
+          <p:cNvPr id="8" name="Text 6"/>
           <p:cNvSpPr/>
           <p:nvPr/>
         </p:nvSpPr>
@@ -8241,7 +8323,7 @@
             <a:r>
               <a:rPr lang="en-US" sz="900" dirty="0">
                 <a:solidFill>
-                  <a:srgbClr val="5C708A"/>
+                  <a:srgbClr val="A89A86"/>
                 </a:solidFill>
                 <a:latin typeface="Calibri" pitchFamily="34" charset="0"/>
                 <a:ea typeface="Calibri" pitchFamily="34" charset="-122"/>
@@ -8267,7 +8349,7 @@
     <p:bg>
       <p:bgPr>
         <a:solidFill>
-          <a:srgbClr val="0B1D33"/>
+          <a:srgbClr val="F8F6F3"/>
         </a:solidFill>
       </p:bgPr>
     </p:bg>
@@ -8312,7 +8394,7 @@
             <a:r>
               <a:rPr lang="en-US" sz="1200" b="1" spc="300" kern="0" dirty="0">
                 <a:solidFill>
-                  <a:srgbClr val="4A9EFF"/>
+                  <a:srgbClr val="9A7B66"/>
                 </a:solidFill>
                 <a:latin typeface="Calibri" pitchFamily="34" charset="0"/>
                 <a:ea typeface="Calibri" pitchFamily="34" charset="-122"/>
@@ -8354,11 +8436,11 @@
             <a:r>
               <a:rPr lang="en-US" sz="3400" b="1" dirty="0">
                 <a:solidFill>
-                  <a:srgbClr val="EAF1FA"/>
-                </a:solidFill>
-                <a:latin typeface="Bookman Old Style" pitchFamily="34" charset="0"/>
-                <a:ea typeface="Bookman Old Style" pitchFamily="34" charset="-122"/>
-                <a:cs typeface="Bookman Old Style" pitchFamily="34" charset="-120"/>
+                  <a:srgbClr val="33302B"/>
+                </a:solidFill>
+                <a:latin typeface="Georgia" pitchFamily="34" charset="0"/>
+                <a:ea typeface="Georgia" pitchFamily="34" charset="-122"/>
+                <a:cs typeface="Georgia" pitchFamily="34" charset="-120"/>
               </a:rPr>
               <a:t>Três tarefas, um motor</a:t>
             </a:r>
@@ -8383,13 +8465,18 @@
             </a:avLst>
           </a:prstGeom>
           <a:solidFill>
-            <a:srgbClr val="13283F"/>
+            <a:srgbClr val="FFFFFF"/>
           </a:solidFill>
-          <a:ln/>
+          <a:ln w="12700">
+            <a:solidFill>
+              <a:srgbClr val="E3D9CC"/>
+            </a:solidFill>
+            <a:prstDash val="solid"/>
+          </a:ln>
           <a:effectLst>
-            <a:outerShdw sx="100000" sy="100000" kx="0" ky="0" algn="bl" rotWithShape="0" blurRad="127000" dist="38100" dir="5400000">
-              <a:srgbClr val="000000">
-                <a:alpha val="28000"/>
+            <a:outerShdw sx="100000" sy="100000" kx="0" ky="0" algn="bl" rotWithShape="0" blurRad="114300" dist="38100" dir="5400000">
+              <a:srgbClr val="7A6A55">
+                <a:alpha val="12000"/>
               </a:srgbClr>
             </a:outerShdw>
           </a:effectLst>
@@ -8422,11 +8509,11 @@
             <a:r>
               <a:rPr lang="en-US" sz="3600" b="1" dirty="0">
                 <a:solidFill>
-                  <a:srgbClr val="C9A961"/>
-                </a:solidFill>
-                <a:latin typeface="Bookman Old Style" pitchFamily="34" charset="0"/>
-                <a:ea typeface="Bookman Old Style" pitchFamily="34" charset="-122"/>
-                <a:cs typeface="Bookman Old Style" pitchFamily="34" charset="-120"/>
+                  <a:srgbClr val="B1937E"/>
+                </a:solidFill>
+                <a:latin typeface="Georgia" pitchFamily="34" charset="0"/>
+                <a:ea typeface="Georgia" pitchFamily="34" charset="-122"/>
+                <a:cs typeface="Georgia" pitchFamily="34" charset="-120"/>
               </a:rPr>
               <a:t>01</a:t>
             </a:r>
@@ -8449,9 +8536,14 @@
             <a:avLst/>
           </a:prstGeom>
           <a:solidFill>
-            <a:srgbClr val="16314F"/>
+            <a:srgbClr val="EADFD0"/>
           </a:solidFill>
-          <a:ln/>
+          <a:ln w="9525">
+            <a:solidFill>
+              <a:srgbClr val="E3D9CC"/>
+            </a:solidFill>
+            <a:prstDash val="solid"/>
+          </a:ln>
         </p:spPr>
       </p:sp>
       <p:pic>
@@ -8505,11 +8597,11 @@
             <a:r>
               <a:rPr lang="en-US" sz="1900" b="1" dirty="0">
                 <a:solidFill>
-                  <a:srgbClr val="EAF1FA"/>
-                </a:solidFill>
-                <a:latin typeface="Bookman Old Style" pitchFamily="34" charset="0"/>
-                <a:ea typeface="Bookman Old Style" pitchFamily="34" charset="-122"/>
-                <a:cs typeface="Bookman Old Style" pitchFamily="34" charset="-120"/>
+                  <a:srgbClr val="33302B"/>
+                </a:solidFill>
+                <a:latin typeface="Georgia" pitchFamily="34" charset="0"/>
+                <a:ea typeface="Georgia" pitchFamily="34" charset="-122"/>
+                <a:cs typeface="Georgia" pitchFamily="34" charset="-120"/>
               </a:rPr>
               <a:t>Plano de conteúdo</a:t>
             </a:r>
@@ -8544,7 +8636,7 @@
             <a:r>
               <a:rPr lang="en-US" sz="1300" dirty="0">
                 <a:solidFill>
-                  <a:srgbClr val="9FB2C9"/>
+                  <a:srgbClr val="8A7E72"/>
                 </a:solidFill>
                 <a:latin typeface="Calibri" pitchFamily="34" charset="0"/>
                 <a:ea typeface="Calibri" pitchFamily="34" charset="-122"/>
@@ -8573,13 +8665,18 @@
             </a:avLst>
           </a:prstGeom>
           <a:solidFill>
-            <a:srgbClr val="13283F"/>
+            <a:srgbClr val="FFFFFF"/>
           </a:solidFill>
-          <a:ln/>
+          <a:ln w="12700">
+            <a:solidFill>
+              <a:srgbClr val="E3D9CC"/>
+            </a:solidFill>
+            <a:prstDash val="solid"/>
+          </a:ln>
           <a:effectLst>
-            <a:outerShdw sx="100000" sy="100000" kx="0" ky="0" algn="bl" rotWithShape="0" blurRad="127000" dist="38100" dir="5400000">
-              <a:srgbClr val="000000">
-                <a:alpha val="28000"/>
+            <a:outerShdw sx="100000" sy="100000" kx="0" ky="0" algn="bl" rotWithShape="0" blurRad="114300" dist="38100" dir="5400000">
+              <a:srgbClr val="7A6A55">
+                <a:alpha val="12000"/>
               </a:srgbClr>
             </a:outerShdw>
           </a:effectLst>
@@ -8612,11 +8709,11 @@
             <a:r>
               <a:rPr lang="en-US" sz="3600" b="1" dirty="0">
                 <a:solidFill>
-                  <a:srgbClr val="C9A961"/>
-                </a:solidFill>
-                <a:latin typeface="Bookman Old Style" pitchFamily="34" charset="0"/>
-                <a:ea typeface="Bookman Old Style" pitchFamily="34" charset="-122"/>
-                <a:cs typeface="Bookman Old Style" pitchFamily="34" charset="-120"/>
+                  <a:srgbClr val="B1937E"/>
+                </a:solidFill>
+                <a:latin typeface="Georgia" pitchFamily="34" charset="0"/>
+                <a:ea typeface="Georgia" pitchFamily="34" charset="-122"/>
+                <a:cs typeface="Georgia" pitchFamily="34" charset="-120"/>
               </a:rPr>
               <a:t>02</a:t>
             </a:r>
@@ -8639,9 +8736,14 @@
             <a:avLst/>
           </a:prstGeom>
           <a:solidFill>
-            <a:srgbClr val="16314F"/>
+            <a:srgbClr val="EADFD0"/>
           </a:solidFill>
-          <a:ln/>
+          <a:ln w="9525">
+            <a:solidFill>
+              <a:srgbClr val="E3D9CC"/>
+            </a:solidFill>
+            <a:prstDash val="solid"/>
+          </a:ln>
         </p:spPr>
       </p:sp>
       <p:pic>
@@ -8695,11 +8797,11 @@
             <a:r>
               <a:rPr lang="en-US" sz="1900" b="1" dirty="0">
                 <a:solidFill>
-                  <a:srgbClr val="EAF1FA"/>
-                </a:solidFill>
-                <a:latin typeface="Bookman Old Style" pitchFamily="34" charset="0"/>
-                <a:ea typeface="Bookman Old Style" pitchFamily="34" charset="-122"/>
-                <a:cs typeface="Bookman Old Style" pitchFamily="34" charset="-120"/>
+                  <a:srgbClr val="33302B"/>
+                </a:solidFill>
+                <a:latin typeface="Georgia" pitchFamily="34" charset="0"/>
+                <a:ea typeface="Georgia" pitchFamily="34" charset="-122"/>
+                <a:cs typeface="Georgia" pitchFamily="34" charset="-120"/>
               </a:rPr>
               <a:t>Mapeia 10 parcerias</a:t>
             </a:r>
@@ -8734,7 +8836,7 @@
             <a:r>
               <a:rPr lang="en-US" sz="1300" dirty="0">
                 <a:solidFill>
-                  <a:srgbClr val="9FB2C9"/>
+                  <a:srgbClr val="8A7E72"/>
                 </a:solidFill>
                 <a:latin typeface="Calibri" pitchFamily="34" charset="0"/>
                 <a:ea typeface="Calibri" pitchFamily="34" charset="-122"/>
@@ -8763,13 +8865,18 @@
             </a:avLst>
           </a:prstGeom>
           <a:solidFill>
-            <a:srgbClr val="13283F"/>
+            <a:srgbClr val="FFFFFF"/>
           </a:solidFill>
-          <a:ln/>
+          <a:ln w="12700">
+            <a:solidFill>
+              <a:srgbClr val="E3D9CC"/>
+            </a:solidFill>
+            <a:prstDash val="solid"/>
+          </a:ln>
           <a:effectLst>
-            <a:outerShdw sx="100000" sy="100000" kx="0" ky="0" algn="bl" rotWithShape="0" blurRad="127000" dist="38100" dir="5400000">
-              <a:srgbClr val="000000">
-                <a:alpha val="28000"/>
+            <a:outerShdw sx="100000" sy="100000" kx="0" ky="0" algn="bl" rotWithShape="0" blurRad="114300" dist="38100" dir="5400000">
+              <a:srgbClr val="7A6A55">
+                <a:alpha val="12000"/>
               </a:srgbClr>
             </a:outerShdw>
           </a:effectLst>
@@ -8802,11 +8909,11 @@
             <a:r>
               <a:rPr lang="en-US" sz="3600" b="1" dirty="0">
                 <a:solidFill>
-                  <a:srgbClr val="C9A961"/>
-                </a:solidFill>
-                <a:latin typeface="Bookman Old Style" pitchFamily="34" charset="0"/>
-                <a:ea typeface="Bookman Old Style" pitchFamily="34" charset="-122"/>
-                <a:cs typeface="Bookman Old Style" pitchFamily="34" charset="-120"/>
+                  <a:srgbClr val="B1937E"/>
+                </a:solidFill>
+                <a:latin typeface="Georgia" pitchFamily="34" charset="0"/>
+                <a:ea typeface="Georgia" pitchFamily="34" charset="-122"/>
+                <a:cs typeface="Georgia" pitchFamily="34" charset="-120"/>
               </a:rPr>
               <a:t>03</a:t>
             </a:r>
@@ -8829,9 +8936,14 @@
             <a:avLst/>
           </a:prstGeom>
           <a:solidFill>
-            <a:srgbClr val="16314F"/>
+            <a:srgbClr val="EADFD0"/>
           </a:solidFill>
-          <a:ln/>
+          <a:ln w="9525">
+            <a:solidFill>
+              <a:srgbClr val="E3D9CC"/>
+            </a:solidFill>
+            <a:prstDash val="solid"/>
+          </a:ln>
         </p:spPr>
       </p:sp>
       <p:pic>
@@ -8885,11 +8997,11 @@
             <a:r>
               <a:rPr lang="en-US" sz="1900" b="1" dirty="0">
                 <a:solidFill>
-                  <a:srgbClr val="EAF1FA"/>
-                </a:solidFill>
-                <a:latin typeface="Bookman Old Style" pitchFamily="34" charset="0"/>
-                <a:ea typeface="Bookman Old Style" pitchFamily="34" charset="-122"/>
-                <a:cs typeface="Bookman Old Style" pitchFamily="34" charset="-120"/>
+                  <a:srgbClr val="33302B"/>
+                </a:solidFill>
+                <a:latin typeface="Georgia" pitchFamily="34" charset="0"/>
+                <a:ea typeface="Georgia" pitchFamily="34" charset="-122"/>
+                <a:cs typeface="Georgia" pitchFamily="34" charset="-120"/>
               </a:rPr>
               <a:t>Otimiza o Google Business</a:t>
             </a:r>
@@ -8924,7 +9036,7 @@
             <a:r>
               <a:rPr lang="en-US" sz="1300" dirty="0">
                 <a:solidFill>
-                  <a:srgbClr val="9FB2C9"/>
+                  <a:srgbClr val="8A7E72"/>
                 </a:solidFill>
                 <a:latin typeface="Calibri" pitchFamily="34" charset="0"/>
                 <a:ea typeface="Calibri" pitchFamily="34" charset="-122"/>
@@ -8953,7 +9065,7 @@
           <a:noFill/>
           <a:ln w="9525">
             <a:solidFill>
-              <a:srgbClr val="5C708A">
+              <a:srgbClr val="A89A86">
                 <a:alpha val="60000"/>
               </a:srgbClr>
             </a:solidFill>
@@ -8988,7 +9100,7 @@
             <a:r>
               <a:rPr lang="en-US" sz="900" dirty="0">
                 <a:solidFill>
-                  <a:srgbClr val="5C708A"/>
+                  <a:srgbClr val="A89A86"/>
                 </a:solidFill>
                 <a:latin typeface="Calibri" pitchFamily="34" charset="0"/>
                 <a:ea typeface="Calibri" pitchFamily="34" charset="-122"/>
@@ -9027,7 +9139,7 @@
             <a:r>
               <a:rPr lang="en-US" sz="900" dirty="0">
                 <a:solidFill>
-                  <a:srgbClr val="5C708A"/>
+                  <a:srgbClr val="A89A86"/>
                 </a:solidFill>
                 <a:latin typeface="Calibri" pitchFamily="34" charset="0"/>
                 <a:ea typeface="Calibri" pitchFamily="34" charset="-122"/>
@@ -9053,7 +9165,7 @@
     <p:bg>
       <p:bgPr>
         <a:solidFill>
-          <a:srgbClr val="102844"/>
+          <a:srgbClr val="EFE7DE"/>
         </a:solidFill>
       </p:bgPr>
     </p:bg>
@@ -9098,7 +9210,7 @@
             <a:r>
               <a:rPr lang="en-US" sz="1200" b="1" spc="300" kern="0" dirty="0">
                 <a:solidFill>
-                  <a:srgbClr val="C9A961"/>
+                  <a:srgbClr val="B1937E"/>
                 </a:solidFill>
                 <a:latin typeface="Calibri" pitchFamily="34" charset="0"/>
                 <a:ea typeface="Calibri" pitchFamily="34" charset="-122"/>
@@ -9140,11 +9252,11 @@
             <a:r>
               <a:rPr lang="en-US" sz="3200" b="1" dirty="0">
                 <a:solidFill>
-                  <a:srgbClr val="EAF1FA"/>
-                </a:solidFill>
-                <a:latin typeface="Bookman Old Style" pitchFamily="34" charset="0"/>
-                <a:ea typeface="Bookman Old Style" pitchFamily="34" charset="-122"/>
-                <a:cs typeface="Bookman Old Style" pitchFamily="34" charset="-120"/>
+                  <a:srgbClr val="33302B"/>
+                </a:solidFill>
+                <a:latin typeface="Georgia" pitchFamily="34" charset="0"/>
+                <a:ea typeface="Georgia" pitchFamily="34" charset="-122"/>
+                <a:cs typeface="Georgia" pitchFamily="34" charset="-120"/>
               </a:rPr>
               <a:t>O que trazes à próxima sessão</a:t>
             </a:r>
@@ -9169,18 +9281,18 @@
             </a:avLst>
           </a:prstGeom>
           <a:solidFill>
-            <a:srgbClr val="13283F"/>
+            <a:srgbClr val="FFFFFF"/>
           </a:solidFill>
           <a:ln w="19050">
             <a:solidFill>
-              <a:srgbClr val="C9A961"/>
+              <a:srgbClr val="B1937E"/>
             </a:solidFill>
             <a:prstDash val="solid"/>
           </a:ln>
           <a:effectLst>
-            <a:outerShdw sx="100000" sy="100000" kx="0" ky="0" algn="bl" rotWithShape="0" blurRad="127000" dist="38100" dir="5400000">
-              <a:srgbClr val="000000">
-                <a:alpha val="28000"/>
+            <a:outerShdw sx="100000" sy="100000" kx="0" ky="0" algn="bl" rotWithShape="0" blurRad="114300" dist="38100" dir="5400000">
+              <a:srgbClr val="7A6A55">
+                <a:alpha val="12000"/>
               </a:srgbClr>
             </a:outerShdw>
           </a:effectLst>
@@ -9213,11 +9325,11 @@
             <a:r>
               <a:rPr lang="en-US" sz="2300" b="1" dirty="0">
                 <a:solidFill>
-                  <a:srgbClr val="C9A961"/>
-                </a:solidFill>
-                <a:latin typeface="Bookman Old Style" pitchFamily="34" charset="0"/>
-                <a:ea typeface="Bookman Old Style" pitchFamily="34" charset="-122"/>
-                <a:cs typeface="Bookman Old Style" pitchFamily="34" charset="-120"/>
+                  <a:srgbClr val="B1937E"/>
+                </a:solidFill>
+                <a:latin typeface="Georgia" pitchFamily="34" charset="0"/>
+                <a:ea typeface="Georgia" pitchFamily="34" charset="-122"/>
+                <a:cs typeface="Georgia" pitchFamily="34" charset="-120"/>
               </a:rPr>
               <a:t>Plano de Aquisição de 90 Dias</a:t>
             </a:r>
@@ -9276,7 +9388,7 @@
             <a:r>
               <a:rPr lang="en-US" sz="1550" dirty="0">
                 <a:solidFill>
-                  <a:srgbClr val="EAF1FA"/>
+                  <a:srgbClr val="33302B"/>
                 </a:solidFill>
                 <a:latin typeface="Calibri" pitchFamily="34" charset="0"/>
                 <a:ea typeface="Calibri" pitchFamily="34" charset="-122"/>
@@ -9339,7 +9451,7 @@
             <a:r>
               <a:rPr lang="en-US" sz="1550" dirty="0">
                 <a:solidFill>
-                  <a:srgbClr val="EAF1FA"/>
+                  <a:srgbClr val="33302B"/>
                 </a:solidFill>
                 <a:latin typeface="Calibri" pitchFamily="34" charset="0"/>
                 <a:ea typeface="Calibri" pitchFamily="34" charset="-122"/>
@@ -9402,7 +9514,7 @@
             <a:r>
               <a:rPr lang="en-US" sz="1550" dirty="0">
                 <a:solidFill>
-                  <a:srgbClr val="EAF1FA"/>
+                  <a:srgbClr val="33302B"/>
                 </a:solidFill>
                 <a:latin typeface="Calibri" pitchFamily="34" charset="0"/>
                 <a:ea typeface="Calibri" pitchFamily="34" charset="-122"/>
@@ -9441,7 +9553,7 @@
             <a:r>
               <a:rPr lang="en-US" sz="1500" i="1" dirty="0">
                 <a:solidFill>
-                  <a:srgbClr val="9FB2C9"/>
+                  <a:srgbClr val="8A7E72"/>
                 </a:solidFill>
                 <a:latin typeface="Calibri" pitchFamily="34" charset="0"/>
                 <a:ea typeface="Calibri" pitchFamily="34" charset="-122"/>
@@ -9470,7 +9582,7 @@
           <a:noFill/>
           <a:ln w="9525">
             <a:solidFill>
-              <a:srgbClr val="5C708A">
+              <a:srgbClr val="A89A86">
                 <a:alpha val="60000"/>
               </a:srgbClr>
             </a:solidFill>
@@ -9505,7 +9617,7 @@
             <a:r>
               <a:rPr lang="en-US" sz="900" dirty="0">
                 <a:solidFill>
-                  <a:srgbClr val="5C708A"/>
+                  <a:srgbClr val="A89A86"/>
                 </a:solidFill>
                 <a:latin typeface="Calibri" pitchFamily="34" charset="0"/>
                 <a:ea typeface="Calibri" pitchFamily="34" charset="-122"/>
@@ -9544,7 +9656,7 @@
             <a:r>
               <a:rPr lang="en-US" sz="900" dirty="0">
                 <a:solidFill>
-                  <a:srgbClr val="5C708A"/>
+                  <a:srgbClr val="A89A86"/>
                 </a:solidFill>
                 <a:latin typeface="Calibri" pitchFamily="34" charset="0"/>
                 <a:ea typeface="Calibri" pitchFamily="34" charset="-122"/>
@@ -9570,7 +9682,7 @@
     <p:bg>
       <p:bgPr>
         <a:solidFill>
-          <a:srgbClr val="0B1D33"/>
+          <a:srgbClr val="F8F6F3"/>
         </a:solidFill>
       </p:bgPr>
     </p:bg>
@@ -9615,7 +9727,7 @@
             <a:r>
               <a:rPr lang="en-US" sz="1200" b="1" spc="300" kern="0" dirty="0">
                 <a:solidFill>
-                  <a:srgbClr val="4A9EFF"/>
+                  <a:srgbClr val="9A7B66"/>
                 </a:solidFill>
                 <a:latin typeface="Calibri" pitchFamily="34" charset="0"/>
                 <a:ea typeface="Calibri" pitchFamily="34" charset="-122"/>
@@ -9657,11 +9769,11 @@
             <a:r>
               <a:rPr lang="en-US" sz="3600" b="1" dirty="0">
                 <a:solidFill>
-                  <a:srgbClr val="EAF1FA"/>
-                </a:solidFill>
-                <a:latin typeface="Bookman Old Style" pitchFamily="34" charset="0"/>
-                <a:ea typeface="Bookman Old Style" pitchFamily="34" charset="-122"/>
-                <a:cs typeface="Bookman Old Style" pitchFamily="34" charset="-120"/>
+                  <a:srgbClr val="33302B"/>
+                </a:solidFill>
+                <a:latin typeface="Georgia" pitchFamily="34" charset="0"/>
+                <a:ea typeface="Georgia" pitchFamily="34" charset="-122"/>
+                <a:cs typeface="Georgia" pitchFamily="34" charset="-120"/>
               </a:rPr>
               <a:t>Do acaso ao sistema</a:t>
             </a:r>
@@ -9686,13 +9798,18 @@
             </a:avLst>
           </a:prstGeom>
           <a:solidFill>
-            <a:srgbClr val="13283F"/>
+            <a:srgbClr val="FFFFFF"/>
           </a:solidFill>
-          <a:ln/>
+          <a:ln w="12700">
+            <a:solidFill>
+              <a:srgbClr val="E3D9CC"/>
+            </a:solidFill>
+            <a:prstDash val="solid"/>
+          </a:ln>
           <a:effectLst>
-            <a:outerShdw sx="100000" sy="100000" kx="0" ky="0" algn="bl" rotWithShape="0" blurRad="127000" dist="38100" dir="5400000">
-              <a:srgbClr val="000000">
-                <a:alpha val="28000"/>
+            <a:outerShdw sx="100000" sy="100000" kx="0" ky="0" algn="bl" rotWithShape="0" blurRad="114300" dist="38100" dir="5400000">
+              <a:srgbClr val="7A6A55">
+                <a:alpha val="12000"/>
               </a:srgbClr>
             </a:outerShdw>
           </a:effectLst>
@@ -9713,9 +9830,14 @@
             <a:avLst/>
           </a:prstGeom>
           <a:solidFill>
-            <a:srgbClr val="16314F"/>
+            <a:srgbClr val="EADFD0"/>
           </a:solidFill>
-          <a:ln/>
+          <a:ln w="9525">
+            <a:solidFill>
+              <a:srgbClr val="E3D9CC"/>
+            </a:solidFill>
+            <a:prstDash val="solid"/>
+          </a:ln>
         </p:spPr>
       </p:sp>
       <p:pic>
@@ -9769,11 +9891,11 @@
             <a:r>
               <a:rPr lang="en-US" sz="2800" b="1" dirty="0">
                 <a:solidFill>
-                  <a:srgbClr val="C9A961"/>
-                </a:solidFill>
-                <a:latin typeface="Bookman Old Style" pitchFamily="34" charset="0"/>
-                <a:ea typeface="Bookman Old Style" pitchFamily="34" charset="-122"/>
-                <a:cs typeface="Bookman Old Style" pitchFamily="34" charset="-120"/>
+                  <a:srgbClr val="B1937E"/>
+                </a:solidFill>
+                <a:latin typeface="Georgia" pitchFamily="34" charset="0"/>
+                <a:ea typeface="Georgia" pitchFamily="34" charset="-122"/>
+                <a:cs typeface="Georgia" pitchFamily="34" charset="-120"/>
               </a:rPr>
               <a:t>01</a:t>
             </a:r>
@@ -9808,7 +9930,7 @@
             <a:r>
               <a:rPr lang="en-US" sz="1800" b="1" dirty="0">
                 <a:solidFill>
-                  <a:srgbClr val="EAF1FA"/>
+                  <a:srgbClr val="33302B"/>
                 </a:solidFill>
                 <a:latin typeface="Calibri" pitchFamily="34" charset="0"/>
                 <a:ea typeface="Calibri" pitchFamily="34" charset="-122"/>
@@ -9847,7 +9969,7 @@
             <a:r>
               <a:rPr lang="en-US" sz="1300" dirty="0">
                 <a:solidFill>
-                  <a:srgbClr val="9FB2C9"/>
+                  <a:srgbClr val="8A7E72"/>
                 </a:solidFill>
                 <a:latin typeface="Calibri" pitchFamily="34" charset="0"/>
                 <a:ea typeface="Calibri" pitchFamily="34" charset="-122"/>
@@ -9876,13 +9998,18 @@
             </a:avLst>
           </a:prstGeom>
           <a:solidFill>
-            <a:srgbClr val="13283F"/>
+            <a:srgbClr val="FFFFFF"/>
           </a:solidFill>
-          <a:ln/>
+          <a:ln w="12700">
+            <a:solidFill>
+              <a:srgbClr val="E3D9CC"/>
+            </a:solidFill>
+            <a:prstDash val="solid"/>
+          </a:ln>
           <a:effectLst>
-            <a:outerShdw sx="100000" sy="100000" kx="0" ky="0" algn="bl" rotWithShape="0" blurRad="127000" dist="38100" dir="5400000">
-              <a:srgbClr val="000000">
-                <a:alpha val="28000"/>
+            <a:outerShdw sx="100000" sy="100000" kx="0" ky="0" algn="bl" rotWithShape="0" blurRad="114300" dist="38100" dir="5400000">
+              <a:srgbClr val="7A6A55">
+                <a:alpha val="12000"/>
               </a:srgbClr>
             </a:outerShdw>
           </a:effectLst>
@@ -9903,9 +10030,14 @@
             <a:avLst/>
           </a:prstGeom>
           <a:solidFill>
-            <a:srgbClr val="16314F"/>
+            <a:srgbClr val="EADFD0"/>
           </a:solidFill>
-          <a:ln/>
+          <a:ln w="9525">
+            <a:solidFill>
+              <a:srgbClr val="E3D9CC"/>
+            </a:solidFill>
+            <a:prstDash val="solid"/>
+          </a:ln>
         </p:spPr>
       </p:sp>
       <p:pic>
@@ -9959,11 +10091,11 @@
             <a:r>
               <a:rPr lang="en-US" sz="2800" b="1" dirty="0">
                 <a:solidFill>
-                  <a:srgbClr val="C9A961"/>
-                </a:solidFill>
-                <a:latin typeface="Bookman Old Style" pitchFamily="34" charset="0"/>
-                <a:ea typeface="Bookman Old Style" pitchFamily="34" charset="-122"/>
-                <a:cs typeface="Bookman Old Style" pitchFamily="34" charset="-120"/>
+                  <a:srgbClr val="B1937E"/>
+                </a:solidFill>
+                <a:latin typeface="Georgia" pitchFamily="34" charset="0"/>
+                <a:ea typeface="Georgia" pitchFamily="34" charset="-122"/>
+                <a:cs typeface="Georgia" pitchFamily="34" charset="-120"/>
               </a:rPr>
               <a:t>02</a:t>
             </a:r>
@@ -9998,7 +10130,7 @@
             <a:r>
               <a:rPr lang="en-US" sz="1800" b="1" dirty="0">
                 <a:solidFill>
-                  <a:srgbClr val="EAF1FA"/>
+                  <a:srgbClr val="33302B"/>
                 </a:solidFill>
                 <a:latin typeface="Calibri" pitchFamily="34" charset="0"/>
                 <a:ea typeface="Calibri" pitchFamily="34" charset="-122"/>
@@ -10037,7 +10169,7 @@
             <a:r>
               <a:rPr lang="en-US" sz="1300" dirty="0">
                 <a:solidFill>
-                  <a:srgbClr val="9FB2C9"/>
+                  <a:srgbClr val="8A7E72"/>
                 </a:solidFill>
                 <a:latin typeface="Calibri" pitchFamily="34" charset="0"/>
                 <a:ea typeface="Calibri" pitchFamily="34" charset="-122"/>
@@ -10066,13 +10198,18 @@
             </a:avLst>
           </a:prstGeom>
           <a:solidFill>
-            <a:srgbClr val="13283F"/>
+            <a:srgbClr val="FFFFFF"/>
           </a:solidFill>
-          <a:ln/>
+          <a:ln w="12700">
+            <a:solidFill>
+              <a:srgbClr val="E3D9CC"/>
+            </a:solidFill>
+            <a:prstDash val="solid"/>
+          </a:ln>
           <a:effectLst>
-            <a:outerShdw sx="100000" sy="100000" kx="0" ky="0" algn="bl" rotWithShape="0" blurRad="127000" dist="38100" dir="5400000">
-              <a:srgbClr val="000000">
-                <a:alpha val="28000"/>
+            <a:outerShdw sx="100000" sy="100000" kx="0" ky="0" algn="bl" rotWithShape="0" blurRad="114300" dist="38100" dir="5400000">
+              <a:srgbClr val="7A6A55">
+                <a:alpha val="12000"/>
               </a:srgbClr>
             </a:outerShdw>
           </a:effectLst>
@@ -10093,9 +10230,14 @@
             <a:avLst/>
           </a:prstGeom>
           <a:solidFill>
-            <a:srgbClr val="16314F"/>
+            <a:srgbClr val="EADFD0"/>
           </a:solidFill>
-          <a:ln/>
+          <a:ln w="9525">
+            <a:solidFill>
+              <a:srgbClr val="E3D9CC"/>
+            </a:solidFill>
+            <a:prstDash val="solid"/>
+          </a:ln>
         </p:spPr>
       </p:sp>
       <p:pic>
@@ -10149,11 +10291,11 @@
             <a:r>
               <a:rPr lang="en-US" sz="2800" b="1" dirty="0">
                 <a:solidFill>
-                  <a:srgbClr val="C9A961"/>
-                </a:solidFill>
-                <a:latin typeface="Bookman Old Style" pitchFamily="34" charset="0"/>
-                <a:ea typeface="Bookman Old Style" pitchFamily="34" charset="-122"/>
-                <a:cs typeface="Bookman Old Style" pitchFamily="34" charset="-120"/>
+                  <a:srgbClr val="B1937E"/>
+                </a:solidFill>
+                <a:latin typeface="Georgia" pitchFamily="34" charset="0"/>
+                <a:ea typeface="Georgia" pitchFamily="34" charset="-122"/>
+                <a:cs typeface="Georgia" pitchFamily="34" charset="-120"/>
               </a:rPr>
               <a:t>03</a:t>
             </a:r>
@@ -10188,7 +10330,7 @@
             <a:r>
               <a:rPr lang="en-US" sz="1800" b="1" dirty="0">
                 <a:solidFill>
-                  <a:srgbClr val="EAF1FA"/>
+                  <a:srgbClr val="33302B"/>
                 </a:solidFill>
                 <a:latin typeface="Calibri" pitchFamily="34" charset="0"/>
                 <a:ea typeface="Calibri" pitchFamily="34" charset="-122"/>
@@ -10227,7 +10369,7 @@
             <a:r>
               <a:rPr lang="en-US" sz="1300" dirty="0">
                 <a:solidFill>
-                  <a:srgbClr val="9FB2C9"/>
+                  <a:srgbClr val="8A7E72"/>
                 </a:solidFill>
                 <a:latin typeface="Calibri" pitchFamily="34" charset="0"/>
                 <a:ea typeface="Calibri" pitchFamily="34" charset="-122"/>
@@ -10256,13 +10398,18 @@
             </a:avLst>
           </a:prstGeom>
           <a:solidFill>
-            <a:srgbClr val="13283F"/>
+            <a:srgbClr val="FFFFFF"/>
           </a:solidFill>
-          <a:ln/>
+          <a:ln w="12700">
+            <a:solidFill>
+              <a:srgbClr val="E3D9CC"/>
+            </a:solidFill>
+            <a:prstDash val="solid"/>
+          </a:ln>
           <a:effectLst>
-            <a:outerShdw sx="100000" sy="100000" kx="0" ky="0" algn="bl" rotWithShape="0" blurRad="127000" dist="38100" dir="5400000">
-              <a:srgbClr val="000000">
-                <a:alpha val="28000"/>
+            <a:outerShdw sx="100000" sy="100000" kx="0" ky="0" algn="bl" rotWithShape="0" blurRad="114300" dist="38100" dir="5400000">
+              <a:srgbClr val="7A6A55">
+                <a:alpha val="12000"/>
               </a:srgbClr>
             </a:outerShdw>
           </a:effectLst>
@@ -10283,9 +10430,14 @@
             <a:avLst/>
           </a:prstGeom>
           <a:solidFill>
-            <a:srgbClr val="16314F"/>
+            <a:srgbClr val="EADFD0"/>
           </a:solidFill>
-          <a:ln/>
+          <a:ln w="9525">
+            <a:solidFill>
+              <a:srgbClr val="E3D9CC"/>
+            </a:solidFill>
+            <a:prstDash val="solid"/>
+          </a:ln>
         </p:spPr>
       </p:sp>
       <p:pic>
@@ -10339,11 +10491,11 @@
             <a:r>
               <a:rPr lang="en-US" sz="2800" b="1" dirty="0">
                 <a:solidFill>
-                  <a:srgbClr val="C9A961"/>
-                </a:solidFill>
-                <a:latin typeface="Bookman Old Style" pitchFamily="34" charset="0"/>
-                <a:ea typeface="Bookman Old Style" pitchFamily="34" charset="-122"/>
-                <a:cs typeface="Bookman Old Style" pitchFamily="34" charset="-120"/>
+                  <a:srgbClr val="B1937E"/>
+                </a:solidFill>
+                <a:latin typeface="Georgia" pitchFamily="34" charset="0"/>
+                <a:ea typeface="Georgia" pitchFamily="34" charset="-122"/>
+                <a:cs typeface="Georgia" pitchFamily="34" charset="-120"/>
               </a:rPr>
               <a:t>04</a:t>
             </a:r>
@@ -10378,7 +10530,7 @@
             <a:r>
               <a:rPr lang="en-US" sz="1800" b="1" dirty="0">
                 <a:solidFill>
-                  <a:srgbClr val="EAF1FA"/>
+                  <a:srgbClr val="33302B"/>
                 </a:solidFill>
                 <a:latin typeface="Calibri" pitchFamily="34" charset="0"/>
                 <a:ea typeface="Calibri" pitchFamily="34" charset="-122"/>
@@ -10417,7 +10569,7 @@
             <a:r>
               <a:rPr lang="en-US" sz="1300" dirty="0">
                 <a:solidFill>
-                  <a:srgbClr val="9FB2C9"/>
+                  <a:srgbClr val="8A7E72"/>
                 </a:solidFill>
                 <a:latin typeface="Calibri" pitchFamily="34" charset="0"/>
                 <a:ea typeface="Calibri" pitchFamily="34" charset="-122"/>
@@ -10446,7 +10598,7 @@
           <a:noFill/>
           <a:ln w="9525">
             <a:solidFill>
-              <a:srgbClr val="5C708A">
+              <a:srgbClr val="A89A86">
                 <a:alpha val="60000"/>
               </a:srgbClr>
             </a:solidFill>
@@ -10481,7 +10633,7 @@
             <a:r>
               <a:rPr lang="en-US" sz="900" dirty="0">
                 <a:solidFill>
-                  <a:srgbClr val="5C708A"/>
+                  <a:srgbClr val="A89A86"/>
                 </a:solidFill>
                 <a:latin typeface="Calibri" pitchFamily="34" charset="0"/>
                 <a:ea typeface="Calibri" pitchFamily="34" charset="-122"/>
@@ -10520,7 +10672,7 @@
             <a:r>
               <a:rPr lang="en-US" sz="900" dirty="0">
                 <a:solidFill>
-                  <a:srgbClr val="5C708A"/>
+                  <a:srgbClr val="A89A86"/>
                 </a:solidFill>
                 <a:latin typeface="Calibri" pitchFamily="34" charset="0"/>
                 <a:ea typeface="Calibri" pitchFamily="34" charset="-122"/>
@@ -10546,7 +10698,7 @@
     <p:bg>
       <p:bgPr>
         <a:solidFill>
-          <a:srgbClr val="0B1D33"/>
+          <a:srgbClr val="F8F6F3"/>
         </a:solidFill>
       </p:bgPr>
     </p:bg>
@@ -10566,51 +10718,7 @@
       </p:grpSpPr>
       <p:sp>
         <p:nvSpPr>
-          <p:cNvPr id="2" name="Shape 0"/>
-          <p:cNvSpPr/>
-          <p:nvPr/>
-        </p:nvSpPr>
-        <p:spPr>
-          <a:xfrm>
-            <a:off x="8046720" y="-1645920"/>
-            <a:ext cx="5943600" cy="5943600"/>
-          </a:xfrm>
-          <a:prstGeom prst="ellipse">
-            <a:avLst/>
-          </a:prstGeom>
-          <a:solidFill>
-            <a:srgbClr val="4A9EFF">
-              <a:alpha val="14000"/>
-            </a:srgbClr>
-          </a:solidFill>
-          <a:ln/>
-        </p:spPr>
-      </p:sp>
-      <p:sp>
-        <p:nvSpPr>
-          <p:cNvPr id="3" name="Shape 1"/>
-          <p:cNvSpPr/>
-          <p:nvPr/>
-        </p:nvSpPr>
-        <p:spPr>
-          <a:xfrm>
-            <a:off x="-1828800" y="4389120"/>
-            <a:ext cx="5029200" cy="5029200"/>
-          </a:xfrm>
-          <a:prstGeom prst="ellipse">
-            <a:avLst/>
-          </a:prstGeom>
-          <a:solidFill>
-            <a:srgbClr val="C9A961">
-              <a:alpha val="10000"/>
-            </a:srgbClr>
-          </a:solidFill>
-          <a:ln/>
-        </p:spPr>
-      </p:sp>
-      <p:sp>
-        <p:nvSpPr>
-          <p:cNvPr id="4" name="Text 2"/>
+          <p:cNvPr id="2" name="Text 0"/>
           <p:cNvSpPr/>
           <p:nvPr/>
         </p:nvSpPr>
@@ -10635,7 +10743,7 @@
             <a:r>
               <a:rPr lang="en-US" sz="1400" b="1" spc="500" kern="0" dirty="0">
                 <a:solidFill>
-                  <a:srgbClr val="C9A961"/>
+                  <a:srgbClr val="B1937E"/>
                 </a:solidFill>
                 <a:latin typeface="Calibri" pitchFamily="34" charset="0"/>
                 <a:ea typeface="Calibri" pitchFamily="34" charset="-122"/>
@@ -10649,7 +10757,7 @@
       </p:sp>
       <p:sp>
         <p:nvSpPr>
-          <p:cNvPr id="5" name="Text 3"/>
+          <p:cNvPr id="3" name="Text 1"/>
           <p:cNvSpPr/>
           <p:nvPr/>
         </p:nvSpPr>
@@ -10675,17 +10783,17 @@
               <a:buNone/>
             </a:pPr>
             <a:r>
-              <a:rPr lang="en-US" sz="4200" b="1" dirty="0">
-                <a:solidFill>
-                  <a:srgbClr val="EAF1FA"/>
-                </a:solidFill>
-                <a:latin typeface="Bookman Old Style" pitchFamily="34" charset="0"/>
-                <a:ea typeface="Bookman Old Style" pitchFamily="34" charset="-122"/>
-                <a:cs typeface="Bookman Old Style" pitchFamily="34" charset="-120"/>
+              <a:rPr lang="en-US" sz="3800" b="1" dirty="0">
+                <a:solidFill>
+                  <a:srgbClr val="33302B"/>
+                </a:solidFill>
+                <a:latin typeface="Georgia" pitchFamily="34" charset="0"/>
+                <a:ea typeface="Georgia" pitchFamily="34" charset="-122"/>
+                <a:cs typeface="Georgia" pitchFamily="34" charset="-120"/>
               </a:rPr>
               <a:t>Sessão 03: Captação</a:t>
             </a:r>
-            <a:endParaRPr lang="en-US" sz="4200" dirty="0"/>
+            <a:endParaRPr lang="en-US" sz="3800" dirty="0"/>
           </a:p>
           <a:p>
             <a:pPr indent="0" marL="0">
@@ -10695,23 +10803,23 @@
               <a:buNone/>
             </a:pPr>
             <a:r>
-              <a:rPr lang="en-US" sz="4200" b="1" dirty="0">
-                <a:solidFill>
-                  <a:srgbClr val="EAF1FA"/>
-                </a:solidFill>
-                <a:latin typeface="Bookman Old Style" pitchFamily="34" charset="0"/>
-                <a:ea typeface="Bookman Old Style" pitchFamily="34" charset="-122"/>
-                <a:cs typeface="Bookman Old Style" pitchFamily="34" charset="-120"/>
+              <a:rPr lang="en-US" sz="3800" b="1" dirty="0">
+                <a:solidFill>
+                  <a:srgbClr val="33302B"/>
+                </a:solidFill>
+                <a:latin typeface="Georgia" pitchFamily="34" charset="0"/>
+                <a:ea typeface="Georgia" pitchFamily="34" charset="-122"/>
+                <a:cs typeface="Georgia" pitchFamily="34" charset="-120"/>
               </a:rPr>
               <a:t>e Qualificação do Lead</a:t>
             </a:r>
-            <a:endParaRPr lang="en-US" sz="4200" dirty="0"/>
-          </a:p>
-        </p:txBody>
-      </p:sp>
-      <p:sp>
-        <p:nvSpPr>
-          <p:cNvPr id="6" name="Text 4"/>
+            <a:endParaRPr lang="en-US" sz="3800" dirty="0"/>
+          </a:p>
+        </p:txBody>
+      </p:sp>
+      <p:sp>
+        <p:nvSpPr>
+          <p:cNvPr id="4" name="Text 2"/>
           <p:cNvSpPr/>
           <p:nvPr/>
         </p:nvSpPr>
@@ -10736,7 +10844,7 @@
             <a:r>
               <a:rPr lang="en-US" sz="1700" dirty="0">
                 <a:solidFill>
-                  <a:srgbClr val="9FB2C9"/>
+                  <a:srgbClr val="8A7E72"/>
                 </a:solidFill>
                 <a:latin typeface="Calibri" pitchFamily="34" charset="0"/>
                 <a:ea typeface="Calibri" pitchFamily="34" charset="-122"/>
@@ -10750,7 +10858,7 @@
       </p:sp>
       <p:sp>
         <p:nvSpPr>
-          <p:cNvPr id="7" name="Shape 5"/>
+          <p:cNvPr id="5" name="Shape 3"/>
           <p:cNvSpPr/>
           <p:nvPr/>
         </p:nvSpPr>
@@ -10765,51 +10873,36 @@
           <a:noFill/>
           <a:ln w="31750">
             <a:solidFill>
-              <a:srgbClr val="C9A961"/>
+              <a:srgbClr val="B1937E"/>
             </a:solidFill>
             <a:prstDash val="solid"/>
           </a:ln>
         </p:spPr>
       </p:sp>
-      <p:sp>
-        <p:nvSpPr>
-          <p:cNvPr id="8" name="Text 6"/>
-          <p:cNvSpPr/>
-          <p:nvPr/>
-        </p:nvSpPr>
-        <p:spPr>
-          <a:xfrm>
-            <a:off x="640080" y="5943600"/>
-            <a:ext cx="7315200" cy="365760"/>
-          </a:xfrm>
-          <a:prstGeom prst="rect">
-            <a:avLst/>
-          </a:prstGeom>
-          <a:noFill/>
-          <a:ln/>
-        </p:spPr>
-        <p:txBody>
-          <a:bodyPr wrap="square" lIns="0" tIns="0" rIns="0" bIns="0" rtlCol="0" anchor="ctr"/>
-          <a:lstStyle/>
-          <a:p>
-            <a:pPr indent="0" marL="0">
-              <a:buNone/>
-            </a:pPr>
-            <a:r>
-              <a:rPr lang="en-US" sz="1200" spc="400" kern="0" dirty="0">
-                <a:solidFill>
-                  <a:srgbClr val="5C708A"/>
-                </a:solidFill>
-                <a:latin typeface="Calibri" pitchFamily="34" charset="0"/>
-                <a:ea typeface="Calibri" pitchFamily="34" charset="-122"/>
-                <a:cs typeface="Calibri" pitchFamily="34" charset="-120"/>
-              </a:rPr>
-              <a:t>MENTORIA · RL</a:t>
-            </a:r>
-            <a:endParaRPr lang="en-US" sz="1200" dirty="0"/>
-          </a:p>
-        </p:txBody>
-      </p:sp>
+      <p:pic>
+        <p:nvPicPr>
+          <p:cNvPr id="6" name="Image 0" descr="preencoded.png">    </p:cNvPr>
+          <p:cNvPicPr>
+            <a:picLocks noChangeAspect="1"/>
+          </p:cNvPicPr>
+          <p:nvPr/>
+        </p:nvPicPr>
+        <p:blipFill>
+          <a:blip r:embed="rId1"/>
+          <a:stretch>
+            <a:fillRect/>
+          </a:stretch>
+        </p:blipFill>
+        <p:spPr>
+          <a:xfrm>
+            <a:off x="640080" y="502920"/>
+            <a:ext cx="1280160" cy="1320800"/>
+          </a:xfrm>
+          <a:prstGeom prst="rect">
+            <a:avLst/>
+          </a:prstGeom>
+        </p:spPr>
+      </p:pic>
     </p:spTree>
   </p:cSld>
   <p:clrMapOvr>
@@ -10824,7 +10917,7 @@
     <p:bg>
       <p:bgPr>
         <a:solidFill>
-          <a:srgbClr val="0B1D33"/>
+          <a:srgbClr val="F8F6F3"/>
         </a:solidFill>
       </p:bgPr>
     </p:bg>
@@ -10844,51 +10937,7 @@
       </p:grpSpPr>
       <p:sp>
         <p:nvSpPr>
-          <p:cNvPr id="2" name="Shape 0"/>
-          <p:cNvSpPr/>
-          <p:nvPr/>
-        </p:nvSpPr>
-        <p:spPr>
-          <a:xfrm>
-            <a:off x="7772400" y="-1371600"/>
-            <a:ext cx="5486400" cy="5486400"/>
-          </a:xfrm>
-          <a:prstGeom prst="ellipse">
-            <a:avLst/>
-          </a:prstGeom>
-          <a:solidFill>
-            <a:srgbClr val="4A9EFF">
-              <a:alpha val="10000"/>
-            </a:srgbClr>
-          </a:solidFill>
-          <a:ln/>
-        </p:spPr>
-      </p:sp>
-      <p:sp>
-        <p:nvSpPr>
-          <p:cNvPr id="3" name="Shape 1"/>
-          <p:cNvSpPr/>
-          <p:nvPr/>
-        </p:nvSpPr>
-        <p:spPr>
-          <a:xfrm>
-            <a:off x="-1371600" y="4114800"/>
-            <a:ext cx="4572000" cy="4572000"/>
-          </a:xfrm>
-          <a:prstGeom prst="ellipse">
-            <a:avLst/>
-          </a:prstGeom>
-          <a:solidFill>
-            <a:srgbClr val="C9A961">
-              <a:alpha val="8000"/>
-            </a:srgbClr>
-          </a:solidFill>
-          <a:ln/>
-        </p:spPr>
-      </p:sp>
-      <p:sp>
-        <p:nvSpPr>
-          <p:cNvPr id="4" name="Text 2"/>
+          <p:cNvPr id="2" name="Text 0"/>
           <p:cNvSpPr/>
           <p:nvPr/>
         </p:nvSpPr>
@@ -10913,11 +10962,11 @@
             <a:r>
               <a:rPr lang="en-US" sz="15000" b="1" dirty="0">
                 <a:solidFill>
-                  <a:srgbClr val="16314F"/>
-                </a:solidFill>
-                <a:latin typeface="Bookman Old Style" pitchFamily="34" charset="0"/>
-                <a:ea typeface="Bookman Old Style" pitchFamily="34" charset="-122"/>
-                <a:cs typeface="Bookman Old Style" pitchFamily="34" charset="-120"/>
+                  <a:srgbClr val="EADFD0"/>
+                </a:solidFill>
+                <a:latin typeface="Georgia" pitchFamily="34" charset="0"/>
+                <a:ea typeface="Georgia" pitchFamily="34" charset="-122"/>
+                <a:cs typeface="Georgia" pitchFamily="34" charset="-120"/>
               </a:rPr>
               <a:t>A</a:t>
             </a:r>
@@ -10927,7 +10976,7 @@
       </p:sp>
       <p:sp>
         <p:nvSpPr>
-          <p:cNvPr id="5" name="Text 3"/>
+          <p:cNvPr id="3" name="Text 1"/>
           <p:cNvSpPr/>
           <p:nvPr/>
         </p:nvSpPr>
@@ -10952,7 +11001,7 @@
             <a:r>
               <a:rPr lang="en-US" sz="1300" b="1" spc="400" kern="0" dirty="0">
                 <a:solidFill>
-                  <a:srgbClr val="C9A961"/>
+                  <a:srgbClr val="B1937E"/>
                 </a:solidFill>
                 <a:latin typeface="Calibri" pitchFamily="34" charset="0"/>
                 <a:ea typeface="Calibri" pitchFamily="34" charset="-122"/>
@@ -10966,7 +11015,7 @@
       </p:sp>
       <p:sp>
         <p:nvSpPr>
-          <p:cNvPr id="6" name="Text 4"/>
+          <p:cNvPr id="4" name="Text 2"/>
           <p:cNvSpPr/>
           <p:nvPr/>
         </p:nvSpPr>
@@ -10992,23 +11041,23 @@
               <a:buNone/>
             </a:pPr>
             <a:r>
-              <a:rPr lang="en-US" sz="4400" b="1" dirty="0">
-                <a:solidFill>
-                  <a:srgbClr val="EAF1FA"/>
-                </a:solidFill>
-                <a:latin typeface="Bookman Old Style" pitchFamily="34" charset="0"/>
-                <a:ea typeface="Bookman Old Style" pitchFamily="34" charset="-122"/>
-                <a:cs typeface="Bookman Old Style" pitchFamily="34" charset="-120"/>
+              <a:rPr lang="en-US" sz="4000" b="1" dirty="0">
+                <a:solidFill>
+                  <a:srgbClr val="33302B"/>
+                </a:solidFill>
+                <a:latin typeface="Georgia" pitchFamily="34" charset="0"/>
+                <a:ea typeface="Georgia" pitchFamily="34" charset="-122"/>
+                <a:cs typeface="Georgia" pitchFamily="34" charset="-120"/>
               </a:rPr>
               <a:t>Porque Precisas de um Motor de Leads</a:t>
             </a:r>
-            <a:endParaRPr lang="en-US" sz="4400" dirty="0"/>
-          </a:p>
-        </p:txBody>
-      </p:sp>
-      <p:sp>
-        <p:nvSpPr>
-          <p:cNvPr id="7" name="Text 5"/>
+            <a:endParaRPr lang="en-US" sz="4000" dirty="0"/>
+          </a:p>
+        </p:txBody>
+      </p:sp>
+      <p:sp>
+        <p:nvSpPr>
+          <p:cNvPr id="5" name="Text 3"/>
           <p:cNvSpPr/>
           <p:nvPr/>
         </p:nvSpPr>
@@ -11033,7 +11082,7 @@
             <a:r>
               <a:rPr lang="en-US" sz="1600" dirty="0">
                 <a:solidFill>
-                  <a:srgbClr val="9FB2C9"/>
+                  <a:srgbClr val="8A7E72"/>
                 </a:solidFill>
                 <a:latin typeface="Calibri" pitchFamily="34" charset="0"/>
                 <a:ea typeface="Calibri" pitchFamily="34" charset="-122"/>
@@ -11047,7 +11096,7 @@
       </p:sp>
       <p:sp>
         <p:nvSpPr>
-          <p:cNvPr id="8" name="Shape 6"/>
+          <p:cNvPr id="6" name="Shape 4"/>
           <p:cNvSpPr/>
           <p:nvPr/>
         </p:nvSpPr>
@@ -11062,7 +11111,7 @@
           <a:noFill/>
           <a:ln w="9525">
             <a:solidFill>
-              <a:srgbClr val="5C708A">
+              <a:srgbClr val="A89A86">
                 <a:alpha val="60000"/>
               </a:srgbClr>
             </a:solidFill>
@@ -11072,7 +11121,7 @@
       </p:sp>
       <p:sp>
         <p:nvSpPr>
-          <p:cNvPr id="9" name="Text 7"/>
+          <p:cNvPr id="7" name="Text 5"/>
           <p:cNvSpPr/>
           <p:nvPr/>
         </p:nvSpPr>
@@ -11097,7 +11146,7 @@
             <a:r>
               <a:rPr lang="en-US" sz="900" dirty="0">
                 <a:solidFill>
-                  <a:srgbClr val="5C708A"/>
+                  <a:srgbClr val="A89A86"/>
                 </a:solidFill>
                 <a:latin typeface="Calibri" pitchFamily="34" charset="0"/>
                 <a:ea typeface="Calibri" pitchFamily="34" charset="-122"/>
@@ -11111,7 +11160,7 @@
       </p:sp>
       <p:sp>
         <p:nvSpPr>
-          <p:cNvPr id="10" name="Text 8"/>
+          <p:cNvPr id="8" name="Text 6"/>
           <p:cNvSpPr/>
           <p:nvPr/>
         </p:nvSpPr>
@@ -11136,7 +11185,7 @@
             <a:r>
               <a:rPr lang="en-US" sz="900" dirty="0">
                 <a:solidFill>
-                  <a:srgbClr val="5C708A"/>
+                  <a:srgbClr val="A89A86"/>
                 </a:solidFill>
                 <a:latin typeface="Calibri" pitchFamily="34" charset="0"/>
                 <a:ea typeface="Calibri" pitchFamily="34" charset="-122"/>
@@ -11162,7 +11211,7 @@
     <p:bg>
       <p:bgPr>
         <a:solidFill>
-          <a:srgbClr val="0B1D33"/>
+          <a:srgbClr val="F8F6F3"/>
         </a:solidFill>
       </p:bgPr>
     </p:bg>
@@ -11207,7 +11256,7 @@
             <a:r>
               <a:rPr lang="en-US" sz="1200" b="1" spc="300" kern="0" dirty="0">
                 <a:solidFill>
-                  <a:srgbClr val="4A9EFF"/>
+                  <a:srgbClr val="9A7B66"/>
                 </a:solidFill>
                 <a:latin typeface="Calibri" pitchFamily="34" charset="0"/>
                 <a:ea typeface="Calibri" pitchFamily="34" charset="-122"/>
@@ -11249,11 +11298,11 @@
             <a:r>
               <a:rPr lang="en-US" sz="3200" b="1" dirty="0">
                 <a:solidFill>
-                  <a:srgbClr val="EAF1FA"/>
-                </a:solidFill>
-                <a:latin typeface="Bookman Old Style" pitchFamily="34" charset="0"/>
-                <a:ea typeface="Bookman Old Style" pitchFamily="34" charset="-122"/>
-                <a:cs typeface="Bookman Old Style" pitchFamily="34" charset="-120"/>
+                  <a:srgbClr val="33302B"/>
+                </a:solidFill>
+                <a:latin typeface="Georgia" pitchFamily="34" charset="0"/>
+                <a:ea typeface="Georgia" pitchFamily="34" charset="-122"/>
+                <a:cs typeface="Georgia" pitchFamily="34" charset="-120"/>
               </a:rPr>
               <a:t>A montanha-russa dos leads</a:t>
             </a:r>
@@ -11278,13 +11327,18 @@
             </a:avLst>
           </a:prstGeom>
           <a:solidFill>
-            <a:srgbClr val="13283F"/>
+            <a:srgbClr val="FFFFFF"/>
           </a:solidFill>
-          <a:ln/>
+          <a:ln w="12700">
+            <a:solidFill>
+              <a:srgbClr val="E3D9CC"/>
+            </a:solidFill>
+            <a:prstDash val="solid"/>
+          </a:ln>
           <a:effectLst>
-            <a:outerShdw sx="100000" sy="100000" kx="0" ky="0" algn="bl" rotWithShape="0" blurRad="127000" dist="38100" dir="5400000">
-              <a:srgbClr val="000000">
-                <a:alpha val="28000"/>
+            <a:outerShdw sx="100000" sy="100000" kx="0" ky="0" algn="bl" rotWithShape="0" blurRad="114300" dist="38100" dir="5400000">
+              <a:srgbClr val="7A6A55">
+                <a:alpha val="12000"/>
               </a:srgbClr>
             </a:outerShdw>
           </a:effectLst>
@@ -11317,11 +11371,11 @@
             <a:r>
               <a:rPr lang="en-US" sz="4600" b="1" dirty="0">
                 <a:solidFill>
-                  <a:srgbClr val="4A9EFF"/>
-                </a:solidFill>
-                <a:latin typeface="Bookman Old Style" pitchFamily="34" charset="0"/>
-                <a:ea typeface="Bookman Old Style" pitchFamily="34" charset="-122"/>
-                <a:cs typeface="Bookman Old Style" pitchFamily="34" charset="-120"/>
+                  <a:srgbClr val="9A7B66"/>
+                </a:solidFill>
+                <a:latin typeface="Georgia" pitchFamily="34" charset="0"/>
+                <a:ea typeface="Georgia" pitchFamily="34" charset="-122"/>
+                <a:cs typeface="Georgia" pitchFamily="34" charset="-120"/>
               </a:rPr>
               <a:t>?</a:t>
             </a:r>
@@ -11356,7 +11410,7 @@
             <a:r>
               <a:rPr lang="en-US" sz="1500" b="1" dirty="0">
                 <a:solidFill>
-                  <a:srgbClr val="EAF1FA"/>
+                  <a:srgbClr val="33302B"/>
                 </a:solidFill>
                 <a:latin typeface="Calibri" pitchFamily="34" charset="0"/>
                 <a:ea typeface="Calibri" pitchFamily="34" charset="-122"/>
@@ -11385,7 +11439,7 @@
           <a:noFill/>
           <a:ln w="9525">
             <a:solidFill>
-              <a:srgbClr val="5C708A">
+              <a:srgbClr val="A89A86">
                 <a:alpha val="60000"/>
               </a:srgbClr>
             </a:solidFill>
@@ -11420,7 +11474,7 @@
             <a:r>
               <a:rPr lang="en-US" sz="1300" dirty="0">
                 <a:solidFill>
-                  <a:srgbClr val="9FB2C9"/>
+                  <a:srgbClr val="8A7E72"/>
                 </a:solidFill>
                 <a:latin typeface="Calibri" pitchFamily="34" charset="0"/>
                 <a:ea typeface="Calibri" pitchFamily="34" charset="-122"/>
@@ -11449,13 +11503,18 @@
             </a:avLst>
           </a:prstGeom>
           <a:solidFill>
-            <a:srgbClr val="13283F"/>
+            <a:srgbClr val="FFFFFF"/>
           </a:solidFill>
-          <a:ln/>
+          <a:ln w="12700">
+            <a:solidFill>
+              <a:srgbClr val="E3D9CC"/>
+            </a:solidFill>
+            <a:prstDash val="solid"/>
+          </a:ln>
           <a:effectLst>
-            <a:outerShdw sx="100000" sy="100000" kx="0" ky="0" algn="bl" rotWithShape="0" blurRad="127000" dist="38100" dir="5400000">
-              <a:srgbClr val="000000">
-                <a:alpha val="28000"/>
+            <a:outerShdw sx="100000" sy="100000" kx="0" ky="0" algn="bl" rotWithShape="0" blurRad="114300" dist="38100" dir="5400000">
+              <a:srgbClr val="7A6A55">
+                <a:alpha val="12000"/>
               </a:srgbClr>
             </a:outerShdw>
           </a:effectLst>
@@ -11488,11 +11547,11 @@
             <a:r>
               <a:rPr lang="en-US" sz="4600" b="1" dirty="0">
                 <a:solidFill>
-                  <a:srgbClr val="C9A961"/>
-                </a:solidFill>
-                <a:latin typeface="Bookman Old Style" pitchFamily="34" charset="0"/>
-                <a:ea typeface="Bookman Old Style" pitchFamily="34" charset="-122"/>
-                <a:cs typeface="Bookman Old Style" pitchFamily="34" charset="-120"/>
+                  <a:srgbClr val="B1937E"/>
+                </a:solidFill>
+                <a:latin typeface="Georgia" pitchFamily="34" charset="0"/>
+                <a:ea typeface="Georgia" pitchFamily="34" charset="-122"/>
+                <a:cs typeface="Georgia" pitchFamily="34" charset="-120"/>
               </a:rPr>
               <a:t>1</a:t>
             </a:r>
@@ -11527,7 +11586,7 @@
             <a:r>
               <a:rPr lang="en-US" sz="1500" b="1" dirty="0">
                 <a:solidFill>
-                  <a:srgbClr val="EAF1FA"/>
+                  <a:srgbClr val="33302B"/>
                 </a:solidFill>
                 <a:latin typeface="Calibri" pitchFamily="34" charset="0"/>
                 <a:ea typeface="Calibri" pitchFamily="34" charset="-122"/>
@@ -11556,7 +11615,7 @@
           <a:noFill/>
           <a:ln w="9525">
             <a:solidFill>
-              <a:srgbClr val="5C708A">
+              <a:srgbClr val="A89A86">
                 <a:alpha val="60000"/>
               </a:srgbClr>
             </a:solidFill>
@@ -11591,7 +11650,7 @@
             <a:r>
               <a:rPr lang="en-US" sz="1300" dirty="0">
                 <a:solidFill>
-                  <a:srgbClr val="9FB2C9"/>
+                  <a:srgbClr val="8A7E72"/>
                 </a:solidFill>
                 <a:latin typeface="Calibri" pitchFamily="34" charset="0"/>
                 <a:ea typeface="Calibri" pitchFamily="34" charset="-122"/>
@@ -11620,13 +11679,18 @@
             </a:avLst>
           </a:prstGeom>
           <a:solidFill>
-            <a:srgbClr val="13283F"/>
+            <a:srgbClr val="FFFFFF"/>
           </a:solidFill>
-          <a:ln/>
+          <a:ln w="12700">
+            <a:solidFill>
+              <a:srgbClr val="E3D9CC"/>
+            </a:solidFill>
+            <a:prstDash val="solid"/>
+          </a:ln>
           <a:effectLst>
-            <a:outerShdw sx="100000" sy="100000" kx="0" ky="0" algn="bl" rotWithShape="0" blurRad="127000" dist="38100" dir="5400000">
-              <a:srgbClr val="000000">
-                <a:alpha val="28000"/>
+            <a:outerShdw sx="100000" sy="100000" kx="0" ky="0" algn="bl" rotWithShape="0" blurRad="114300" dist="38100" dir="5400000">
+              <a:srgbClr val="7A6A55">
+                <a:alpha val="12000"/>
               </a:srgbClr>
             </a:outerShdw>
           </a:effectLst>
@@ -11659,11 +11723,11 @@
             <a:r>
               <a:rPr lang="en-US" sz="4600" b="1" dirty="0">
                 <a:solidFill>
-                  <a:srgbClr val="4A9EFF"/>
-                </a:solidFill>
-                <a:latin typeface="Bookman Old Style" pitchFamily="34" charset="0"/>
-                <a:ea typeface="Bookman Old Style" pitchFamily="34" charset="-122"/>
-                <a:cs typeface="Bookman Old Style" pitchFamily="34" charset="-120"/>
+                  <a:srgbClr val="9A7B66"/>
+                </a:solidFill>
+                <a:latin typeface="Georgia" pitchFamily="34" charset="0"/>
+                <a:ea typeface="Georgia" pitchFamily="34" charset="-122"/>
+                <a:cs typeface="Georgia" pitchFamily="34" charset="-120"/>
               </a:rPr>
               <a:t>0</a:t>
             </a:r>
@@ -11698,7 +11762,7 @@
             <a:r>
               <a:rPr lang="en-US" sz="1500" b="1" dirty="0">
                 <a:solidFill>
-                  <a:srgbClr val="EAF1FA"/>
+                  <a:srgbClr val="33302B"/>
                 </a:solidFill>
                 <a:latin typeface="Calibri" pitchFamily="34" charset="0"/>
                 <a:ea typeface="Calibri" pitchFamily="34" charset="-122"/>
@@ -11727,7 +11791,7 @@
           <a:noFill/>
           <a:ln w="9525">
             <a:solidFill>
-              <a:srgbClr val="5C708A">
+              <a:srgbClr val="A89A86">
                 <a:alpha val="60000"/>
               </a:srgbClr>
             </a:solidFill>
@@ -11762,7 +11826,7 @@
             <a:r>
               <a:rPr lang="en-US" sz="1300" dirty="0">
                 <a:solidFill>
-                  <a:srgbClr val="9FB2C9"/>
+                  <a:srgbClr val="8A7E72"/>
                 </a:solidFill>
                 <a:latin typeface="Calibri" pitchFamily="34" charset="0"/>
                 <a:ea typeface="Calibri" pitchFamily="34" charset="-122"/>
@@ -11801,7 +11865,7 @@
             <a:r>
               <a:rPr lang="en-US" sz="1500" i="1" dirty="0">
                 <a:solidFill>
-                  <a:srgbClr val="C9A961"/>
+                  <a:srgbClr val="B1937E"/>
                 </a:solidFill>
                 <a:latin typeface="Calibri" pitchFamily="34" charset="0"/>
                 <a:ea typeface="Calibri" pitchFamily="34" charset="-122"/>
@@ -11830,7 +11894,7 @@
           <a:noFill/>
           <a:ln w="9525">
             <a:solidFill>
-              <a:srgbClr val="5C708A">
+              <a:srgbClr val="A89A86">
                 <a:alpha val="60000"/>
               </a:srgbClr>
             </a:solidFill>
@@ -11865,7 +11929,7 @@
             <a:r>
               <a:rPr lang="en-US" sz="900" dirty="0">
                 <a:solidFill>
-                  <a:srgbClr val="5C708A"/>
+                  <a:srgbClr val="A89A86"/>
                 </a:solidFill>
                 <a:latin typeface="Calibri" pitchFamily="34" charset="0"/>
                 <a:ea typeface="Calibri" pitchFamily="34" charset="-122"/>
@@ -11904,7 +11968,7 @@
             <a:r>
               <a:rPr lang="en-US" sz="900" dirty="0">
                 <a:solidFill>
-                  <a:srgbClr val="5C708A"/>
+                  <a:srgbClr val="A89A86"/>
                 </a:solidFill>
                 <a:latin typeface="Calibri" pitchFamily="34" charset="0"/>
                 <a:ea typeface="Calibri" pitchFamily="34" charset="-122"/>
@@ -11930,7 +11994,7 @@
     <p:bg>
       <p:bgPr>
         <a:solidFill>
-          <a:srgbClr val="102844"/>
+          <a:srgbClr val="EFE7DE"/>
         </a:solidFill>
       </p:bgPr>
     </p:bg>
@@ -11975,7 +12039,7 @@
             <a:r>
               <a:rPr lang="en-US" sz="1200" b="1" spc="300" kern="0" dirty="0">
                 <a:solidFill>
-                  <a:srgbClr val="C9A961"/>
+                  <a:srgbClr val="B1937E"/>
                 </a:solidFill>
                 <a:latin typeface="Calibri" pitchFamily="34" charset="0"/>
                 <a:ea typeface="Calibri" pitchFamily="34" charset="-122"/>
@@ -12017,11 +12081,11 @@
             <a:r>
               <a:rPr lang="en-US" sz="3400" b="1" dirty="0">
                 <a:solidFill>
-                  <a:srgbClr val="EAF1FA"/>
-                </a:solidFill>
-                <a:latin typeface="Bookman Old Style" pitchFamily="34" charset="0"/>
-                <a:ea typeface="Bookman Old Style" pitchFamily="34" charset="-122"/>
-                <a:cs typeface="Bookman Old Style" pitchFamily="34" charset="-120"/>
+                  <a:srgbClr val="33302B"/>
+                </a:solidFill>
+                <a:latin typeface="Georgia" pitchFamily="34" charset="0"/>
+                <a:ea typeface="Georgia" pitchFamily="34" charset="-122"/>
+                <a:cs typeface="Georgia" pitchFamily="34" charset="-120"/>
               </a:rPr>
               <a:t>De imprevisível a previsível</a:t>
             </a:r>
@@ -12046,20 +12110,20 @@
             </a:avLst>
           </a:prstGeom>
           <a:solidFill>
-            <a:srgbClr val="13283F"/>
+            <a:srgbClr val="FFFFFF"/>
           </a:solidFill>
           <a:ln w="9525">
             <a:solidFill>
-              <a:srgbClr val="9FB2C9">
+              <a:srgbClr val="8A7E72">
                 <a:alpha val="50000"/>
               </a:srgbClr>
             </a:solidFill>
             <a:prstDash val="solid"/>
           </a:ln>
           <a:effectLst>
-            <a:outerShdw sx="100000" sy="100000" kx="0" ky="0" algn="bl" rotWithShape="0" blurRad="127000" dist="38100" dir="5400000">
-              <a:srgbClr val="000000">
-                <a:alpha val="28000"/>
+            <a:outerShdw sx="100000" sy="100000" kx="0" ky="0" algn="bl" rotWithShape="0" blurRad="114300" dist="38100" dir="5400000">
+              <a:srgbClr val="7A6A55">
+                <a:alpha val="12000"/>
               </a:srgbClr>
             </a:outerShdw>
           </a:effectLst>
@@ -12092,7 +12156,7 @@
             <a:r>
               <a:rPr lang="en-US" sz="1300" b="1" spc="300" kern="0" dirty="0">
                 <a:solidFill>
-                  <a:srgbClr val="9FB2C9"/>
+                  <a:srgbClr val="8A7E72"/>
                 </a:solidFill>
                 <a:latin typeface="Calibri" pitchFamily="34" charset="0"/>
                 <a:ea typeface="Calibri" pitchFamily="34" charset="-122"/>
@@ -12134,7 +12198,7 @@
             <a:r>
               <a:rPr lang="en-US" sz="1600" b="1" dirty="0">
                 <a:solidFill>
-                  <a:srgbClr val="9FB2C9"/>
+                  <a:srgbClr val="8A7E72"/>
                 </a:solidFill>
                 <a:latin typeface="Calibri" pitchFamily="34" charset="0"/>
                 <a:ea typeface="Calibri" pitchFamily="34" charset="-122"/>
@@ -12154,7 +12218,7 @@
             <a:r>
               <a:rPr lang="en-US" sz="1500" dirty="0">
                 <a:solidFill>
-                  <a:srgbClr val="9FB2C9"/>
+                  <a:srgbClr val="8A7E72"/>
                 </a:solidFill>
                 <a:latin typeface="Calibri" pitchFamily="34" charset="0"/>
                 <a:ea typeface="Calibri" pitchFamily="34" charset="-122"/>
@@ -12174,7 +12238,7 @@
             <a:r>
               <a:rPr lang="en-US" sz="1500" dirty="0">
                 <a:solidFill>
-                  <a:srgbClr val="9FB2C9"/>
+                  <a:srgbClr val="8A7E72"/>
                 </a:solidFill>
                 <a:latin typeface="Calibri" pitchFamily="34" charset="0"/>
                 <a:ea typeface="Calibri" pitchFamily="34" charset="-122"/>
@@ -12194,7 +12258,7 @@
             <a:r>
               <a:rPr lang="en-US" sz="1500" dirty="0">
                 <a:solidFill>
-                  <a:srgbClr val="9FB2C9"/>
+                  <a:srgbClr val="8A7E72"/>
                 </a:solidFill>
                 <a:latin typeface="Calibri" pitchFamily="34" charset="0"/>
                 <a:ea typeface="Calibri" pitchFamily="34" charset="-122"/>
@@ -12214,7 +12278,7 @@
             <a:r>
               <a:rPr lang="en-US" sz="1400" i="1" dirty="0">
                 <a:solidFill>
-                  <a:srgbClr val="9FB2C9"/>
+                  <a:srgbClr val="8A7E72"/>
                 </a:solidFill>
                 <a:latin typeface="Calibri" pitchFamily="34" charset="0"/>
                 <a:ea typeface="Calibri" pitchFamily="34" charset="-122"/>
@@ -12243,18 +12307,18 @@
             </a:avLst>
           </a:prstGeom>
           <a:solidFill>
-            <a:srgbClr val="16314F"/>
+            <a:srgbClr val="EADFD0"/>
           </a:solidFill>
           <a:ln w="19050">
             <a:solidFill>
-              <a:srgbClr val="C9A961"/>
+              <a:srgbClr val="B1937E"/>
             </a:solidFill>
             <a:prstDash val="solid"/>
           </a:ln>
           <a:effectLst>
-            <a:outerShdw sx="100000" sy="100000" kx="0" ky="0" algn="bl" rotWithShape="0" blurRad="127000" dist="38100" dir="5400000">
-              <a:srgbClr val="000000">
-                <a:alpha val="28000"/>
+            <a:outerShdw sx="100000" sy="100000" kx="0" ky="0" algn="bl" rotWithShape="0" blurRad="114300" dist="38100" dir="5400000">
+              <a:srgbClr val="7A6A55">
+                <a:alpha val="12000"/>
               </a:srgbClr>
             </a:outerShdw>
           </a:effectLst>
@@ -12287,7 +12351,7 @@
             <a:r>
               <a:rPr lang="en-US" sz="1300" b="1" spc="300" kern="0" dirty="0">
                 <a:solidFill>
-                  <a:srgbClr val="C9A961"/>
+                  <a:srgbClr val="B1937E"/>
                 </a:solidFill>
                 <a:latin typeface="Calibri" pitchFamily="34" charset="0"/>
                 <a:ea typeface="Calibri" pitchFamily="34" charset="-122"/>
@@ -12329,7 +12393,7 @@
             <a:r>
               <a:rPr lang="en-US" sz="1600" b="1" dirty="0">
                 <a:solidFill>
-                  <a:srgbClr val="EAF1FA"/>
+                  <a:srgbClr val="33302B"/>
                 </a:solidFill>
                 <a:latin typeface="Calibri" pitchFamily="34" charset="0"/>
                 <a:ea typeface="Calibri" pitchFamily="34" charset="-122"/>
@@ -12349,7 +12413,7 @@
             <a:r>
               <a:rPr lang="en-US" sz="1500" dirty="0">
                 <a:solidFill>
-                  <a:srgbClr val="EAF1FA"/>
+                  <a:srgbClr val="33302B"/>
                 </a:solidFill>
                 <a:latin typeface="Calibri" pitchFamily="34" charset="0"/>
                 <a:ea typeface="Calibri" pitchFamily="34" charset="-122"/>
@@ -12369,7 +12433,7 @@
             <a:r>
               <a:rPr lang="en-US" sz="1500" dirty="0">
                 <a:solidFill>
-                  <a:srgbClr val="EAF1FA"/>
+                  <a:srgbClr val="33302B"/>
                 </a:solidFill>
                 <a:latin typeface="Calibri" pitchFamily="34" charset="0"/>
                 <a:ea typeface="Calibri" pitchFamily="34" charset="-122"/>
@@ -12389,7 +12453,7 @@
             <a:r>
               <a:rPr lang="en-US" sz="1500" dirty="0">
                 <a:solidFill>
-                  <a:srgbClr val="EAF1FA"/>
+                  <a:srgbClr val="33302B"/>
                 </a:solidFill>
                 <a:latin typeface="Calibri" pitchFamily="34" charset="0"/>
                 <a:ea typeface="Calibri" pitchFamily="34" charset="-122"/>
@@ -12409,7 +12473,7 @@
             <a:r>
               <a:rPr lang="en-US" sz="1400" i="1" dirty="0">
                 <a:solidFill>
-                  <a:srgbClr val="C9A961"/>
+                  <a:srgbClr val="B1937E"/>
                 </a:solidFill>
                 <a:latin typeface="Calibri" pitchFamily="34" charset="0"/>
                 <a:ea typeface="Calibri" pitchFamily="34" charset="-122"/>
@@ -12438,7 +12502,7 @@
           <a:noFill/>
           <a:ln w="9525">
             <a:solidFill>
-              <a:srgbClr val="5C708A">
+              <a:srgbClr val="A89A86">
                 <a:alpha val="60000"/>
               </a:srgbClr>
             </a:solidFill>
@@ -12473,7 +12537,7 @@
             <a:r>
               <a:rPr lang="en-US" sz="900" dirty="0">
                 <a:solidFill>
-                  <a:srgbClr val="5C708A"/>
+                  <a:srgbClr val="A89A86"/>
                 </a:solidFill>
                 <a:latin typeface="Calibri" pitchFamily="34" charset="0"/>
                 <a:ea typeface="Calibri" pitchFamily="34" charset="-122"/>
@@ -12512,7 +12576,7 @@
             <a:r>
               <a:rPr lang="en-US" sz="900" dirty="0">
                 <a:solidFill>
-                  <a:srgbClr val="5C708A"/>
+                  <a:srgbClr val="A89A86"/>
                 </a:solidFill>
                 <a:latin typeface="Calibri" pitchFamily="34" charset="0"/>
                 <a:ea typeface="Calibri" pitchFamily="34" charset="-122"/>
@@ -12538,7 +12602,7 @@
     <p:bg>
       <p:bgPr>
         <a:solidFill>
-          <a:srgbClr val="0B1D33"/>
+          <a:srgbClr val="F8F6F3"/>
         </a:solidFill>
       </p:bgPr>
     </p:bg>
@@ -12583,7 +12647,7 @@
             <a:r>
               <a:rPr lang="en-US" sz="1200" b="1" spc="300" kern="0" dirty="0">
                 <a:solidFill>
-                  <a:srgbClr val="4A9EFF"/>
+                  <a:srgbClr val="9A7B66"/>
                 </a:solidFill>
                 <a:latin typeface="Calibri" pitchFamily="34" charset="0"/>
                 <a:ea typeface="Calibri" pitchFamily="34" charset="-122"/>
@@ -12625,11 +12689,11 @@
             <a:r>
               <a:rPr lang="en-US" sz="3000" b="1" dirty="0">
                 <a:solidFill>
-                  <a:srgbClr val="EAF1FA"/>
-                </a:solidFill>
-                <a:latin typeface="Bookman Old Style" pitchFamily="34" charset="0"/>
-                <a:ea typeface="Bookman Old Style" pitchFamily="34" charset="-122"/>
-                <a:cs typeface="Bookman Old Style" pitchFamily="34" charset="-120"/>
+                  <a:srgbClr val="33302B"/>
+                </a:solidFill>
+                <a:latin typeface="Georgia" pitchFamily="34" charset="0"/>
+                <a:ea typeface="Georgia" pitchFamily="34" charset="-122"/>
+                <a:cs typeface="Georgia" pitchFamily="34" charset="-120"/>
               </a:rPr>
               <a:t>Os três pilares</a:t>
             </a:r>
@@ -12654,13 +12718,18 @@
             </a:avLst>
           </a:prstGeom>
           <a:solidFill>
-            <a:srgbClr val="13283F"/>
+            <a:srgbClr val="FFFFFF"/>
           </a:solidFill>
-          <a:ln/>
+          <a:ln w="12700">
+            <a:solidFill>
+              <a:srgbClr val="E3D9CC"/>
+            </a:solidFill>
+            <a:prstDash val="solid"/>
+          </a:ln>
           <a:effectLst>
-            <a:outerShdw sx="100000" sy="100000" kx="0" ky="0" algn="bl" rotWithShape="0" blurRad="127000" dist="38100" dir="5400000">
-              <a:srgbClr val="000000">
-                <a:alpha val="28000"/>
+            <a:outerShdw sx="100000" sy="100000" kx="0" ky="0" algn="bl" rotWithShape="0" blurRad="114300" dist="38100" dir="5400000">
+              <a:srgbClr val="7A6A55">
+                <a:alpha val="12000"/>
               </a:srgbClr>
             </a:outerShdw>
           </a:effectLst>
@@ -12681,9 +12750,14 @@
             <a:avLst/>
           </a:prstGeom>
           <a:solidFill>
-            <a:srgbClr val="16314F"/>
+            <a:srgbClr val="EADFD0"/>
           </a:solidFill>
-          <a:ln/>
+          <a:ln w="9525">
+            <a:solidFill>
+              <a:srgbClr val="E3D9CC"/>
+            </a:solidFill>
+            <a:prstDash val="solid"/>
+          </a:ln>
         </p:spPr>
       </p:sp>
       <p:pic>
@@ -12737,11 +12811,11 @@
             <a:r>
               <a:rPr lang="en-US" sz="1700" b="1" dirty="0">
                 <a:solidFill>
-                  <a:srgbClr val="EAF1FA"/>
-                </a:solidFill>
-                <a:latin typeface="Bookman Old Style" pitchFamily="34" charset="0"/>
-                <a:ea typeface="Bookman Old Style" pitchFamily="34" charset="-122"/>
-                <a:cs typeface="Bookman Old Style" pitchFamily="34" charset="-120"/>
+                  <a:srgbClr val="33302B"/>
+                </a:solidFill>
+                <a:latin typeface="Georgia" pitchFamily="34" charset="0"/>
+                <a:ea typeface="Georgia" pitchFamily="34" charset="-122"/>
+                <a:cs typeface="Georgia" pitchFamily="34" charset="-120"/>
               </a:rPr>
               <a:t>Conteúdo</a:t>
             </a:r>
@@ -12776,7 +12850,7 @@
             <a:r>
               <a:rPr lang="en-US" sz="1250" dirty="0">
                 <a:solidFill>
-                  <a:srgbClr val="9FB2C9"/>
+                  <a:srgbClr val="8A7E72"/>
                 </a:solidFill>
                 <a:latin typeface="Calibri" pitchFamily="34" charset="0"/>
                 <a:ea typeface="Calibri" pitchFamily="34" charset="-122"/>
@@ -12829,13 +12903,18 @@
             </a:avLst>
           </a:prstGeom>
           <a:solidFill>
-            <a:srgbClr val="13283F"/>
+            <a:srgbClr val="FFFFFF"/>
           </a:solidFill>
-          <a:ln/>
+          <a:ln w="12700">
+            <a:solidFill>
+              <a:srgbClr val="E3D9CC"/>
+            </a:solidFill>
+            <a:prstDash val="solid"/>
+          </a:ln>
           <a:effectLst>
-            <a:outerShdw sx="100000" sy="100000" kx="0" ky="0" algn="bl" rotWithShape="0" blurRad="127000" dist="38100" dir="5400000">
-              <a:srgbClr val="000000">
-                <a:alpha val="28000"/>
+            <a:outerShdw sx="100000" sy="100000" kx="0" ky="0" algn="bl" rotWithShape="0" blurRad="114300" dist="38100" dir="5400000">
+              <a:srgbClr val="7A6A55">
+                <a:alpha val="12000"/>
               </a:srgbClr>
             </a:outerShdw>
           </a:effectLst>
@@ -12856,9 +12935,14 @@
             <a:avLst/>
           </a:prstGeom>
           <a:solidFill>
-            <a:srgbClr val="16314F"/>
+            <a:srgbClr val="EADFD0"/>
           </a:solidFill>
-          <a:ln/>
+          <a:ln w="9525">
+            <a:solidFill>
+              <a:srgbClr val="E3D9CC"/>
+            </a:solidFill>
+            <a:prstDash val="solid"/>
+          </a:ln>
         </p:spPr>
       </p:sp>
       <p:pic>
@@ -12912,11 +12996,11 @@
             <a:r>
               <a:rPr lang="en-US" sz="1700" b="1" dirty="0">
                 <a:solidFill>
-                  <a:srgbClr val="EAF1FA"/>
-                </a:solidFill>
-                <a:latin typeface="Bookman Old Style" pitchFamily="34" charset="0"/>
-                <a:ea typeface="Bookman Old Style" pitchFamily="34" charset="-122"/>
-                <a:cs typeface="Bookman Old Style" pitchFamily="34" charset="-120"/>
+                  <a:srgbClr val="33302B"/>
+                </a:solidFill>
+                <a:latin typeface="Georgia" pitchFamily="34" charset="0"/>
+                <a:ea typeface="Georgia" pitchFamily="34" charset="-122"/>
+                <a:cs typeface="Georgia" pitchFamily="34" charset="-120"/>
               </a:rPr>
               <a:t>Parcerias</a:t>
             </a:r>
@@ -12951,7 +13035,7 @@
             <a:r>
               <a:rPr lang="en-US" sz="1250" dirty="0">
                 <a:solidFill>
-                  <a:srgbClr val="9FB2C9"/>
+                  <a:srgbClr val="8A7E72"/>
                 </a:solidFill>
                 <a:latin typeface="Calibri" pitchFamily="34" charset="0"/>
                 <a:ea typeface="Calibri" pitchFamily="34" charset="-122"/>
@@ -13004,13 +13088,18 @@
             </a:avLst>
           </a:prstGeom>
           <a:solidFill>
-            <a:srgbClr val="13283F"/>
+            <a:srgbClr val="FFFFFF"/>
           </a:solidFill>
-          <a:ln/>
+          <a:ln w="12700">
+            <a:solidFill>
+              <a:srgbClr val="E3D9CC"/>
+            </a:solidFill>
+            <a:prstDash val="solid"/>
+          </a:ln>
           <a:effectLst>
-            <a:outerShdw sx="100000" sy="100000" kx="0" ky="0" algn="bl" rotWithShape="0" blurRad="127000" dist="38100" dir="5400000">
-              <a:srgbClr val="000000">
-                <a:alpha val="28000"/>
+            <a:outerShdw sx="100000" sy="100000" kx="0" ky="0" algn="bl" rotWithShape="0" blurRad="114300" dist="38100" dir="5400000">
+              <a:srgbClr val="7A6A55">
+                <a:alpha val="12000"/>
               </a:srgbClr>
             </a:outerShdw>
           </a:effectLst>
@@ -13031,9 +13120,14 @@
             <a:avLst/>
           </a:prstGeom>
           <a:solidFill>
-            <a:srgbClr val="16314F"/>
+            <a:srgbClr val="EADFD0"/>
           </a:solidFill>
-          <a:ln/>
+          <a:ln w="9525">
+            <a:solidFill>
+              <a:srgbClr val="E3D9CC"/>
+            </a:solidFill>
+            <a:prstDash val="solid"/>
+          </a:ln>
         </p:spPr>
       </p:sp>
       <p:pic>
@@ -13087,11 +13181,11 @@
             <a:r>
               <a:rPr lang="en-US" sz="1700" b="1" dirty="0">
                 <a:solidFill>
-                  <a:srgbClr val="EAF1FA"/>
-                </a:solidFill>
-                <a:latin typeface="Bookman Old Style" pitchFamily="34" charset="0"/>
-                <a:ea typeface="Bookman Old Style" pitchFamily="34" charset="-122"/>
-                <a:cs typeface="Bookman Old Style" pitchFamily="34" charset="-120"/>
+                  <a:srgbClr val="33302B"/>
+                </a:solidFill>
+                <a:latin typeface="Georgia" pitchFamily="34" charset="0"/>
+                <a:ea typeface="Georgia" pitchFamily="34" charset="-122"/>
+                <a:cs typeface="Georgia" pitchFamily="34" charset="-120"/>
               </a:rPr>
               <a:t>Referências</a:t>
             </a:r>
@@ -13126,7 +13220,7 @@
             <a:r>
               <a:rPr lang="en-US" sz="1250" dirty="0">
                 <a:solidFill>
-                  <a:srgbClr val="9FB2C9"/>
+                  <a:srgbClr val="8A7E72"/>
                 </a:solidFill>
                 <a:latin typeface="Calibri" pitchFamily="34" charset="0"/>
                 <a:ea typeface="Calibri" pitchFamily="34" charset="-122"/>
@@ -13165,7 +13259,7 @@
             <a:r>
               <a:rPr lang="en-US" sz="1500" i="1" dirty="0">
                 <a:solidFill>
-                  <a:srgbClr val="C9A961"/>
+                  <a:srgbClr val="B1937E"/>
                 </a:solidFill>
                 <a:latin typeface="Calibri" pitchFamily="34" charset="0"/>
                 <a:ea typeface="Calibri" pitchFamily="34" charset="-122"/>
@@ -13194,7 +13288,7 @@
           <a:noFill/>
           <a:ln w="9525">
             <a:solidFill>
-              <a:srgbClr val="5C708A">
+              <a:srgbClr val="A89A86">
                 <a:alpha val="60000"/>
               </a:srgbClr>
             </a:solidFill>
@@ -13229,7 +13323,7 @@
             <a:r>
               <a:rPr lang="en-US" sz="900" dirty="0">
                 <a:solidFill>
-                  <a:srgbClr val="5C708A"/>
+                  <a:srgbClr val="A89A86"/>
                 </a:solidFill>
                 <a:latin typeface="Calibri" pitchFamily="34" charset="0"/>
                 <a:ea typeface="Calibri" pitchFamily="34" charset="-122"/>
@@ -13268,7 +13362,7 @@
             <a:r>
               <a:rPr lang="en-US" sz="900" dirty="0">
                 <a:solidFill>
-                  <a:srgbClr val="5C708A"/>
+                  <a:srgbClr val="A89A86"/>
                 </a:solidFill>
                 <a:latin typeface="Calibri" pitchFamily="34" charset="0"/>
                 <a:ea typeface="Calibri" pitchFamily="34" charset="-122"/>
@@ -13294,7 +13388,7 @@
     <p:bg>
       <p:bgPr>
         <a:solidFill>
-          <a:srgbClr val="0B1D33"/>
+          <a:srgbClr val="F8F6F3"/>
         </a:solidFill>
       </p:bgPr>
     </p:bg>
@@ -13314,51 +13408,7 @@
       </p:grpSpPr>
       <p:sp>
         <p:nvSpPr>
-          <p:cNvPr id="2" name="Shape 0"/>
-          <p:cNvSpPr/>
-          <p:nvPr/>
-        </p:nvSpPr>
-        <p:spPr>
-          <a:xfrm>
-            <a:off x="7772400" y="-1371600"/>
-            <a:ext cx="5486400" cy="5486400"/>
-          </a:xfrm>
-          <a:prstGeom prst="ellipse">
-            <a:avLst/>
-          </a:prstGeom>
-          <a:solidFill>
-            <a:srgbClr val="4A9EFF">
-              <a:alpha val="10000"/>
-            </a:srgbClr>
-          </a:solidFill>
-          <a:ln/>
-        </p:spPr>
-      </p:sp>
-      <p:sp>
-        <p:nvSpPr>
-          <p:cNvPr id="3" name="Shape 1"/>
-          <p:cNvSpPr/>
-          <p:nvPr/>
-        </p:nvSpPr>
-        <p:spPr>
-          <a:xfrm>
-            <a:off x="-1371600" y="4114800"/>
-            <a:ext cx="4572000" cy="4572000"/>
-          </a:xfrm>
-          <a:prstGeom prst="ellipse">
-            <a:avLst/>
-          </a:prstGeom>
-          <a:solidFill>
-            <a:srgbClr val="C9A961">
-              <a:alpha val="8000"/>
-            </a:srgbClr>
-          </a:solidFill>
-          <a:ln/>
-        </p:spPr>
-      </p:sp>
-      <p:sp>
-        <p:nvSpPr>
-          <p:cNvPr id="4" name="Text 2"/>
+          <p:cNvPr id="2" name="Text 0"/>
           <p:cNvSpPr/>
           <p:nvPr/>
         </p:nvSpPr>
@@ -13383,11 +13433,11 @@
             <a:r>
               <a:rPr lang="en-US" sz="15000" b="1" dirty="0">
                 <a:solidFill>
-                  <a:srgbClr val="16314F"/>
-                </a:solidFill>
-                <a:latin typeface="Bookman Old Style" pitchFamily="34" charset="0"/>
-                <a:ea typeface="Bookman Old Style" pitchFamily="34" charset="-122"/>
-                <a:cs typeface="Bookman Old Style" pitchFamily="34" charset="-120"/>
+                  <a:srgbClr val="EADFD0"/>
+                </a:solidFill>
+                <a:latin typeface="Georgia" pitchFamily="34" charset="0"/>
+                <a:ea typeface="Georgia" pitchFamily="34" charset="-122"/>
+                <a:cs typeface="Georgia" pitchFamily="34" charset="-120"/>
               </a:rPr>
               <a:t>B</a:t>
             </a:r>
@@ -13397,7 +13447,7 @@
       </p:sp>
       <p:sp>
         <p:nvSpPr>
-          <p:cNvPr id="5" name="Text 3"/>
+          <p:cNvPr id="3" name="Text 1"/>
           <p:cNvSpPr/>
           <p:nvPr/>
         </p:nvSpPr>
@@ -13422,7 +13472,7 @@
             <a:r>
               <a:rPr lang="en-US" sz="1300" b="1" spc="400" kern="0" dirty="0">
                 <a:solidFill>
-                  <a:srgbClr val="C9A961"/>
+                  <a:srgbClr val="B1937E"/>
                 </a:solidFill>
                 <a:latin typeface="Calibri" pitchFamily="34" charset="0"/>
                 <a:ea typeface="Calibri" pitchFamily="34" charset="-122"/>
@@ -13436,7 +13486,7 @@
       </p:sp>
       <p:sp>
         <p:nvSpPr>
-          <p:cNvPr id="6" name="Text 4"/>
+          <p:cNvPr id="4" name="Text 2"/>
           <p:cNvSpPr/>
           <p:nvPr/>
         </p:nvSpPr>
@@ -13462,23 +13512,23 @@
               <a:buNone/>
             </a:pPr>
             <a:r>
-              <a:rPr lang="en-US" sz="4400" b="1" dirty="0">
-                <a:solidFill>
-                  <a:srgbClr val="EAF1FA"/>
-                </a:solidFill>
-                <a:latin typeface="Bookman Old Style" pitchFamily="34" charset="0"/>
-                <a:ea typeface="Bookman Old Style" pitchFamily="34" charset="-122"/>
-                <a:cs typeface="Bookman Old Style" pitchFamily="34" charset="-120"/>
+              <a:rPr lang="en-US" sz="4000" b="1" dirty="0">
+                <a:solidFill>
+                  <a:srgbClr val="33302B"/>
+                </a:solidFill>
+                <a:latin typeface="Georgia" pitchFamily="34" charset="0"/>
+                <a:ea typeface="Georgia" pitchFamily="34" charset="-122"/>
+                <a:cs typeface="Georgia" pitchFamily="34" charset="-120"/>
               </a:rPr>
               <a:t>Ativar os Três Pilares</a:t>
             </a:r>
-            <a:endParaRPr lang="en-US" sz="4400" dirty="0"/>
-          </a:p>
-        </p:txBody>
-      </p:sp>
-      <p:sp>
-        <p:nvSpPr>
-          <p:cNvPr id="7" name="Text 5"/>
+            <a:endParaRPr lang="en-US" sz="4000" dirty="0"/>
+          </a:p>
+        </p:txBody>
+      </p:sp>
+      <p:sp>
+        <p:nvSpPr>
+          <p:cNvPr id="5" name="Text 3"/>
           <p:cNvSpPr/>
           <p:nvPr/>
         </p:nvSpPr>
@@ -13503,7 +13553,7 @@
             <a:r>
               <a:rPr lang="en-US" sz="1600" dirty="0">
                 <a:solidFill>
-                  <a:srgbClr val="9FB2C9"/>
+                  <a:srgbClr val="8A7E72"/>
                 </a:solidFill>
                 <a:latin typeface="Calibri" pitchFamily="34" charset="0"/>
                 <a:ea typeface="Calibri" pitchFamily="34" charset="-122"/>
@@ -13517,7 +13567,7 @@
       </p:sp>
       <p:sp>
         <p:nvSpPr>
-          <p:cNvPr id="8" name="Shape 6"/>
+          <p:cNvPr id="6" name="Shape 4"/>
           <p:cNvSpPr/>
           <p:nvPr/>
         </p:nvSpPr>
@@ -13532,7 +13582,7 @@
           <a:noFill/>
           <a:ln w="9525">
             <a:solidFill>
-              <a:srgbClr val="5C708A">
+              <a:srgbClr val="A89A86">
                 <a:alpha val="60000"/>
               </a:srgbClr>
             </a:solidFill>
@@ -13542,7 +13592,7 @@
       </p:sp>
       <p:sp>
         <p:nvSpPr>
-          <p:cNvPr id="9" name="Text 7"/>
+          <p:cNvPr id="7" name="Text 5"/>
           <p:cNvSpPr/>
           <p:nvPr/>
         </p:nvSpPr>
@@ -13567,7 +13617,7 @@
             <a:r>
               <a:rPr lang="en-US" sz="900" dirty="0">
                 <a:solidFill>
-                  <a:srgbClr val="5C708A"/>
+                  <a:srgbClr val="A89A86"/>
                 </a:solidFill>
                 <a:latin typeface="Calibri" pitchFamily="34" charset="0"/>
                 <a:ea typeface="Calibri" pitchFamily="34" charset="-122"/>
@@ -13581,7 +13631,7 @@
       </p:sp>
       <p:sp>
         <p:nvSpPr>
-          <p:cNvPr id="10" name="Text 8"/>
+          <p:cNvPr id="8" name="Text 6"/>
           <p:cNvSpPr/>
           <p:nvPr/>
         </p:nvSpPr>
@@ -13606,7 +13656,7 @@
             <a:r>
               <a:rPr lang="en-US" sz="900" dirty="0">
                 <a:solidFill>
-                  <a:srgbClr val="5C708A"/>
+                  <a:srgbClr val="A89A86"/>
                 </a:solidFill>
                 <a:latin typeface="Calibri" pitchFamily="34" charset="0"/>
                 <a:ea typeface="Calibri" pitchFamily="34" charset="-122"/>
@@ -13632,7 +13682,7 @@
     <p:bg>
       <p:bgPr>
         <a:solidFill>
-          <a:srgbClr val="0B1D33"/>
+          <a:srgbClr val="F8F6F3"/>
         </a:solidFill>
       </p:bgPr>
     </p:bg>
@@ -13677,7 +13727,7 @@
             <a:r>
               <a:rPr lang="en-US" sz="1200" b="1" spc="300" kern="0" dirty="0">
                 <a:solidFill>
-                  <a:srgbClr val="4A9EFF"/>
+                  <a:srgbClr val="9A7B66"/>
                 </a:solidFill>
                 <a:latin typeface="Calibri" pitchFamily="34" charset="0"/>
                 <a:ea typeface="Calibri" pitchFamily="34" charset="-122"/>
@@ -13719,11 +13769,11 @@
             <a:r>
               <a:rPr lang="en-US" sz="3200" b="1" dirty="0">
                 <a:solidFill>
-                  <a:srgbClr val="EAF1FA"/>
-                </a:solidFill>
-                <a:latin typeface="Bookman Old Style" pitchFamily="34" charset="0"/>
-                <a:ea typeface="Bookman Old Style" pitchFamily="34" charset="-122"/>
-                <a:cs typeface="Bookman Old Style" pitchFamily="34" charset="-120"/>
+                  <a:srgbClr val="33302B"/>
+                </a:solidFill>
+                <a:latin typeface="Georgia" pitchFamily="34" charset="0"/>
+                <a:ea typeface="Georgia" pitchFamily="34" charset="-122"/>
+                <a:cs typeface="Georgia" pitchFamily="34" charset="-120"/>
               </a:rPr>
               <a:t>Vender emoção, não serviços</a:t>
             </a:r>
@@ -13748,13 +13798,18 @@
             </a:avLst>
           </a:prstGeom>
           <a:solidFill>
-            <a:srgbClr val="13283F"/>
+            <a:srgbClr val="FFFFFF"/>
           </a:solidFill>
-          <a:ln/>
+          <a:ln w="12700">
+            <a:solidFill>
+              <a:srgbClr val="E3D9CC"/>
+            </a:solidFill>
+            <a:prstDash val="solid"/>
+          </a:ln>
           <a:effectLst>
-            <a:outerShdw sx="100000" sy="100000" kx="0" ky="0" algn="bl" rotWithShape="0" blurRad="127000" dist="38100" dir="5400000">
-              <a:srgbClr val="000000">
-                <a:alpha val="28000"/>
+            <a:outerShdw sx="100000" sy="100000" kx="0" ky="0" algn="bl" rotWithShape="0" blurRad="114300" dist="38100" dir="5400000">
+              <a:srgbClr val="7A6A55">
+                <a:alpha val="12000"/>
               </a:srgbClr>
             </a:outerShdw>
           </a:effectLst>
@@ -13775,9 +13830,14 @@
             <a:avLst/>
           </a:prstGeom>
           <a:solidFill>
-            <a:srgbClr val="16314F"/>
+            <a:srgbClr val="EADFD0"/>
           </a:solidFill>
-          <a:ln/>
+          <a:ln w="9525">
+            <a:solidFill>
+              <a:srgbClr val="E3D9CC"/>
+            </a:solidFill>
+            <a:prstDash val="solid"/>
+          </a:ln>
         </p:spPr>
       </p:sp>
       <p:pic>
@@ -13831,11 +13891,11 @@
             <a:r>
               <a:rPr lang="en-US" sz="1900" b="1" dirty="0">
                 <a:solidFill>
-                  <a:srgbClr val="C9A961"/>
-                </a:solidFill>
-                <a:latin typeface="Bookman Old Style" pitchFamily="34" charset="0"/>
-                <a:ea typeface="Bookman Old Style" pitchFamily="34" charset="-122"/>
-                <a:cs typeface="Bookman Old Style" pitchFamily="34" charset="-120"/>
+                  <a:srgbClr val="B1937E"/>
+                </a:solidFill>
+                <a:latin typeface="Georgia" pitchFamily="34" charset="0"/>
+                <a:ea typeface="Georgia" pitchFamily="34" charset="-122"/>
+                <a:cs typeface="Georgia" pitchFamily="34" charset="-120"/>
               </a:rPr>
               <a:t>Emoção</a:t>
             </a:r>
@@ -13870,7 +13930,7 @@
             <a:r>
               <a:rPr lang="en-US" sz="1400" dirty="0">
                 <a:solidFill>
-                  <a:srgbClr val="9FB2C9"/>
+                  <a:srgbClr val="8A7E72"/>
                 </a:solidFill>
                 <a:latin typeface="Calibri" pitchFamily="34" charset="0"/>
                 <a:ea typeface="Calibri" pitchFamily="34" charset="-122"/>
@@ -13899,13 +13959,18 @@
             </a:avLst>
           </a:prstGeom>
           <a:solidFill>
-            <a:srgbClr val="13283F"/>
+            <a:srgbClr val="FFFFFF"/>
           </a:solidFill>
-          <a:ln/>
+          <a:ln w="12700">
+            <a:solidFill>
+              <a:srgbClr val="E3D9CC"/>
+            </a:solidFill>
+            <a:prstDash val="solid"/>
+          </a:ln>
           <a:effectLst>
-            <a:outerShdw sx="100000" sy="100000" kx="0" ky="0" algn="bl" rotWithShape="0" blurRad="127000" dist="38100" dir="5400000">
-              <a:srgbClr val="000000">
-                <a:alpha val="28000"/>
+            <a:outerShdw sx="100000" sy="100000" kx="0" ky="0" algn="bl" rotWithShape="0" blurRad="114300" dist="38100" dir="5400000">
+              <a:srgbClr val="7A6A55">
+                <a:alpha val="12000"/>
               </a:srgbClr>
             </a:outerShdw>
           </a:effectLst>
@@ -13926,9 +13991,14 @@
             <a:avLst/>
           </a:prstGeom>
           <a:solidFill>
-            <a:srgbClr val="16314F"/>
+            <a:srgbClr val="EADFD0"/>
           </a:solidFill>
-          <a:ln/>
+          <a:ln w="9525">
+            <a:solidFill>
+              <a:srgbClr val="E3D9CC"/>
+            </a:solidFill>
+            <a:prstDash val="solid"/>
+          </a:ln>
         </p:spPr>
       </p:sp>
       <p:pic>
@@ -13982,11 +14052,11 @@
             <a:r>
               <a:rPr lang="en-US" sz="1900" b="1" dirty="0">
                 <a:solidFill>
-                  <a:srgbClr val="C9A961"/>
-                </a:solidFill>
-                <a:latin typeface="Bookman Old Style" pitchFamily="34" charset="0"/>
-                <a:ea typeface="Bookman Old Style" pitchFamily="34" charset="-122"/>
-                <a:cs typeface="Bookman Old Style" pitchFamily="34" charset="-120"/>
+                  <a:srgbClr val="B1937E"/>
+                </a:solidFill>
+                <a:latin typeface="Georgia" pitchFamily="34" charset="0"/>
+                <a:ea typeface="Georgia" pitchFamily="34" charset="-122"/>
+                <a:cs typeface="Georgia" pitchFamily="34" charset="-120"/>
               </a:rPr>
               <a:t>A tua visão</a:t>
             </a:r>
@@ -14021,7 +14091,7 @@
             <a:r>
               <a:rPr lang="en-US" sz="1400" dirty="0">
                 <a:solidFill>
-                  <a:srgbClr val="9FB2C9"/>
+                  <a:srgbClr val="8A7E72"/>
                 </a:solidFill>
                 <a:latin typeface="Calibri" pitchFamily="34" charset="0"/>
                 <a:ea typeface="Calibri" pitchFamily="34" charset="-122"/>
@@ -14050,13 +14120,18 @@
             </a:avLst>
           </a:prstGeom>
           <a:solidFill>
-            <a:srgbClr val="13283F"/>
+            <a:srgbClr val="FFFFFF"/>
           </a:solidFill>
-          <a:ln/>
+          <a:ln w="12700">
+            <a:solidFill>
+              <a:srgbClr val="E3D9CC"/>
+            </a:solidFill>
+            <a:prstDash val="solid"/>
+          </a:ln>
           <a:effectLst>
-            <a:outerShdw sx="100000" sy="100000" kx="0" ky="0" algn="bl" rotWithShape="0" blurRad="127000" dist="38100" dir="5400000">
-              <a:srgbClr val="000000">
-                <a:alpha val="28000"/>
+            <a:outerShdw sx="100000" sy="100000" kx="0" ky="0" algn="bl" rotWithShape="0" blurRad="114300" dist="38100" dir="5400000">
+              <a:srgbClr val="7A6A55">
+                <a:alpha val="12000"/>
               </a:srgbClr>
             </a:outerShdw>
           </a:effectLst>
@@ -14077,9 +14152,14 @@
             <a:avLst/>
           </a:prstGeom>
           <a:solidFill>
-            <a:srgbClr val="16314F"/>
+            <a:srgbClr val="EADFD0"/>
           </a:solidFill>
-          <a:ln/>
+          <a:ln w="9525">
+            <a:solidFill>
+              <a:srgbClr val="E3D9CC"/>
+            </a:solidFill>
+            <a:prstDash val="solid"/>
+          </a:ln>
         </p:spPr>
       </p:sp>
       <p:pic>
@@ -14133,11 +14213,11 @@
             <a:r>
               <a:rPr lang="en-US" sz="1900" b="1" dirty="0">
                 <a:solidFill>
-                  <a:srgbClr val="C9A961"/>
-                </a:solidFill>
-                <a:latin typeface="Bookman Old Style" pitchFamily="34" charset="0"/>
-                <a:ea typeface="Bookman Old Style" pitchFamily="34" charset="-122"/>
-                <a:cs typeface="Bookman Old Style" pitchFamily="34" charset="-120"/>
+                  <a:srgbClr val="B1937E"/>
+                </a:solidFill>
+                <a:latin typeface="Georgia" pitchFamily="34" charset="0"/>
+                <a:ea typeface="Georgia" pitchFamily="34" charset="-122"/>
+                <a:cs typeface="Georgia" pitchFamily="34" charset="-120"/>
               </a:rPr>
               <a:t>Reels que contam histórias</a:t>
             </a:r>
@@ -14172,7 +14252,7 @@
             <a:r>
               <a:rPr lang="en-US" sz="1400" dirty="0">
                 <a:solidFill>
-                  <a:srgbClr val="9FB2C9"/>
+                  <a:srgbClr val="8A7E72"/>
                 </a:solidFill>
                 <a:latin typeface="Calibri" pitchFamily="34" charset="0"/>
                 <a:ea typeface="Calibri" pitchFamily="34" charset="-122"/>
@@ -14201,7 +14281,7 @@
           <a:noFill/>
           <a:ln w="9525">
             <a:solidFill>
-              <a:srgbClr val="5C708A">
+              <a:srgbClr val="A89A86">
                 <a:alpha val="60000"/>
               </a:srgbClr>
             </a:solidFill>
@@ -14236,7 +14316,7 @@
             <a:r>
               <a:rPr lang="en-US" sz="900" dirty="0">
                 <a:solidFill>
-                  <a:srgbClr val="5C708A"/>
+                  <a:srgbClr val="A89A86"/>
                 </a:solidFill>
                 <a:latin typeface="Calibri" pitchFamily="34" charset="0"/>
                 <a:ea typeface="Calibri" pitchFamily="34" charset="-122"/>
@@ -14275,7 +14355,7 @@
             <a:r>
               <a:rPr lang="en-US" sz="900" dirty="0">
                 <a:solidFill>
-                  <a:srgbClr val="5C708A"/>
+                  <a:srgbClr val="A89A86"/>
                 </a:solidFill>
                 <a:latin typeface="Calibri" pitchFamily="34" charset="0"/>
                 <a:ea typeface="Calibri" pitchFamily="34" charset="-122"/>
@@ -14301,7 +14381,7 @@
     <p:bg>
       <p:bgPr>
         <a:solidFill>
-          <a:srgbClr val="0B1D33"/>
+          <a:srgbClr val="F8F6F3"/>
         </a:solidFill>
       </p:bgPr>
     </p:bg>
@@ -14346,7 +14426,7 @@
             <a:r>
               <a:rPr lang="en-US" sz="1200" b="1" spc="300" kern="0" dirty="0">
                 <a:solidFill>
-                  <a:srgbClr val="4A9EFF"/>
+                  <a:srgbClr val="9A7B66"/>
                 </a:solidFill>
                 <a:latin typeface="Calibri" pitchFamily="34" charset="0"/>
                 <a:ea typeface="Calibri" pitchFamily="34" charset="-122"/>
@@ -14388,11 +14468,11 @@
             <a:r>
               <a:rPr lang="en-US" sz="3200" b="1" dirty="0">
                 <a:solidFill>
-                  <a:srgbClr val="EAF1FA"/>
-                </a:solidFill>
-                <a:latin typeface="Bookman Old Style" pitchFamily="34" charset="0"/>
-                <a:ea typeface="Bookman Old Style" pitchFamily="34" charset="-122"/>
-                <a:cs typeface="Bookman Old Style" pitchFamily="34" charset="-120"/>
+                  <a:srgbClr val="33302B"/>
+                </a:solidFill>
+                <a:latin typeface="Georgia" pitchFamily="34" charset="0"/>
+                <a:ea typeface="Georgia" pitchFamily="34" charset="-122"/>
+                <a:cs typeface="Georgia" pitchFamily="34" charset="-120"/>
               </a:rPr>
               <a:t>Os 4 tipos que convertem</a:t>
             </a:r>
@@ -14417,13 +14497,18 @@
             </a:avLst>
           </a:prstGeom>
           <a:solidFill>
-            <a:srgbClr val="13283F"/>
+            <a:srgbClr val="FFFFFF"/>
           </a:solidFill>
-          <a:ln/>
+          <a:ln w="12700">
+            <a:solidFill>
+              <a:srgbClr val="E3D9CC"/>
+            </a:solidFill>
+            <a:prstDash val="solid"/>
+          </a:ln>
           <a:effectLst>
-            <a:outerShdw sx="100000" sy="100000" kx="0" ky="0" algn="bl" rotWithShape="0" blurRad="127000" dist="38100" dir="5400000">
-              <a:srgbClr val="000000">
-                <a:alpha val="28000"/>
+            <a:outerShdw sx="100000" sy="100000" kx="0" ky="0" algn="bl" rotWithShape="0" blurRad="114300" dist="38100" dir="5400000">
+              <a:srgbClr val="7A6A55">
+                <a:alpha val="12000"/>
               </a:srgbClr>
             </a:outerShdw>
           </a:effectLst>
@@ -14444,9 +14529,14 @@
             <a:avLst/>
           </a:prstGeom>
           <a:solidFill>
-            <a:srgbClr val="16314F"/>
+            <a:srgbClr val="EADFD0"/>
           </a:solidFill>
-          <a:ln/>
+          <a:ln w="9525">
+            <a:solidFill>
+              <a:srgbClr val="E3D9CC"/>
+            </a:solidFill>
+            <a:prstDash val="solid"/>
+          </a:ln>
         </p:spPr>
       </p:sp>
       <p:pic>
@@ -14500,11 +14590,11 @@
             <a:r>
               <a:rPr lang="en-US" sz="1800" b="1" dirty="0">
                 <a:solidFill>
-                  <a:srgbClr val="C9A961"/>
-                </a:solidFill>
-                <a:latin typeface="Bookman Old Style" pitchFamily="34" charset="0"/>
-                <a:ea typeface="Bookman Old Style" pitchFamily="34" charset="-122"/>
-                <a:cs typeface="Bookman Old Style" pitchFamily="34" charset="-120"/>
+                  <a:srgbClr val="B1937E"/>
+                </a:solidFill>
+                <a:latin typeface="Georgia" pitchFamily="34" charset="0"/>
+                <a:ea typeface="Georgia" pitchFamily="34" charset="-122"/>
+                <a:cs typeface="Georgia" pitchFamily="34" charset="-120"/>
               </a:rPr>
               <a:t>Portfólio</a:t>
             </a:r>
@@ -14539,7 +14629,7 @@
             <a:r>
               <a:rPr lang="en-US" sz="1350" dirty="0">
                 <a:solidFill>
-                  <a:srgbClr val="9FB2C9"/>
+                  <a:srgbClr val="8A7E72"/>
                 </a:solidFill>
                 <a:latin typeface="Calibri" pitchFamily="34" charset="0"/>
                 <a:ea typeface="Calibri" pitchFamily="34" charset="-122"/>
@@ -14568,13 +14658,18 @@
             </a:avLst>
           </a:prstGeom>
           <a:solidFill>
-            <a:srgbClr val="13283F"/>
+            <a:srgbClr val="FFFFFF"/>
           </a:solidFill>
-          <a:ln/>
+          <a:ln w="12700">
+            <a:solidFill>
+              <a:srgbClr val="E3D9CC"/>
+            </a:solidFill>
+            <a:prstDash val="solid"/>
+          </a:ln>
           <a:effectLst>
-            <a:outerShdw sx="100000" sy="100000" kx="0" ky="0" algn="bl" rotWithShape="0" blurRad="127000" dist="38100" dir="5400000">
-              <a:srgbClr val="000000">
-                <a:alpha val="28000"/>
+            <a:outerShdw sx="100000" sy="100000" kx="0" ky="0" algn="bl" rotWithShape="0" blurRad="114300" dist="38100" dir="5400000">
+              <a:srgbClr val="7A6A55">
+                <a:alpha val="12000"/>
               </a:srgbClr>
             </a:outerShdw>
           </a:effectLst>
@@ -14595,9 +14690,14 @@
             <a:avLst/>
           </a:prstGeom>
           <a:solidFill>
-            <a:srgbClr val="16314F"/>
+            <a:srgbClr val="EADFD0"/>
           </a:solidFill>
-          <a:ln/>
+          <a:ln w="9525">
+            <a:solidFill>
+              <a:srgbClr val="E3D9CC"/>
+            </a:solidFill>
+            <a:prstDash val="solid"/>
+          </a:ln>
         </p:spPr>
       </p:sp>
       <p:pic>
@@ -14651,11 +14751,11 @@
             <a:r>
               <a:rPr lang="en-US" sz="1800" b="1" dirty="0">
                 <a:solidFill>
-                  <a:srgbClr val="C9A961"/>
-                </a:solidFill>
-                <a:latin typeface="Bookman Old Style" pitchFamily="34" charset="0"/>
-                <a:ea typeface="Bookman Old Style" pitchFamily="34" charset="-122"/>
-                <a:cs typeface="Bookman Old Style" pitchFamily="34" charset="-120"/>
+                  <a:srgbClr val="B1937E"/>
+                </a:solidFill>
+                <a:latin typeface="Georgia" pitchFamily="34" charset="0"/>
+                <a:ea typeface="Georgia" pitchFamily="34" charset="-122"/>
+                <a:cs typeface="Georgia" pitchFamily="34" charset="-120"/>
               </a:rPr>
               <a:t>Bastidores</a:t>
             </a:r>
@@ -14690,7 +14790,7 @@
             <a:r>
               <a:rPr lang="en-US" sz="1350" dirty="0">
                 <a:solidFill>
-                  <a:srgbClr val="9FB2C9"/>
+                  <a:srgbClr val="8A7E72"/>
                 </a:solidFill>
                 <a:latin typeface="Calibri" pitchFamily="34" charset="0"/>
                 <a:ea typeface="Calibri" pitchFamily="34" charset="-122"/>
@@ -14719,13 +14819,18 @@
             </a:avLst>
           </a:prstGeom>
           <a:solidFill>
-            <a:srgbClr val="13283F"/>
+            <a:srgbClr val="FFFFFF"/>
           </a:solidFill>
-          <a:ln/>
+          <a:ln w="12700">
+            <a:solidFill>
+              <a:srgbClr val="E3D9CC"/>
+            </a:solidFill>
+            <a:prstDash val="solid"/>
+          </a:ln>
           <a:effectLst>
-            <a:outerShdw sx="100000" sy="100000" kx="0" ky="0" algn="bl" rotWithShape="0" blurRad="127000" dist="38100" dir="5400000">
-              <a:srgbClr val="000000">
-                <a:alpha val="28000"/>
+            <a:outerShdw sx="100000" sy="100000" kx="0" ky="0" algn="bl" rotWithShape="0" blurRad="114300" dist="38100" dir="5400000">
+              <a:srgbClr val="7A6A55">
+                <a:alpha val="12000"/>
               </a:srgbClr>
             </a:outerShdw>
           </a:effectLst>
@@ -14746,9 +14851,14 @@
             <a:avLst/>
           </a:prstGeom>
           <a:solidFill>
-            <a:srgbClr val="16314F"/>
+            <a:srgbClr val="EADFD0"/>
           </a:solidFill>
-          <a:ln/>
+          <a:ln w="9525">
+            <a:solidFill>
+              <a:srgbClr val="E3D9CC"/>
+            </a:solidFill>
+            <a:prstDash val="solid"/>
+          </a:ln>
         </p:spPr>
       </p:sp>
       <p:pic>
@@ -14802,11 +14912,11 @@
             <a:r>
               <a:rPr lang="en-US" sz="1800" b="1" dirty="0">
                 <a:solidFill>
-                  <a:srgbClr val="C9A961"/>
-                </a:solidFill>
-                <a:latin typeface="Bookman Old Style" pitchFamily="34" charset="0"/>
-                <a:ea typeface="Bookman Old Style" pitchFamily="34" charset="-122"/>
-                <a:cs typeface="Bookman Old Style" pitchFamily="34" charset="-120"/>
+                  <a:srgbClr val="B1937E"/>
+                </a:solidFill>
+                <a:latin typeface="Georgia" pitchFamily="34" charset="0"/>
+                <a:ea typeface="Georgia" pitchFamily="34" charset="-122"/>
+                <a:cs typeface="Georgia" pitchFamily="34" charset="-120"/>
               </a:rPr>
               <a:t>Educativo</a:t>
             </a:r>
@@ -14841,7 +14951,7 @@
             <a:r>
               <a:rPr lang="en-US" sz="1350" dirty="0">
                 <a:solidFill>
-                  <a:srgbClr val="9FB2C9"/>
+                  <a:srgbClr val="8A7E72"/>
                 </a:solidFill>
                 <a:latin typeface="Calibri" pitchFamily="34" charset="0"/>
                 <a:ea typeface="Calibri" pitchFamily="34" charset="-122"/>
@@ -14870,13 +14980,18 @@
             </a:avLst>
           </a:prstGeom>
           <a:solidFill>
-            <a:srgbClr val="13283F"/>
+            <a:srgbClr val="FFFFFF"/>
           </a:solidFill>
-          <a:ln/>
+          <a:ln w="12700">
+            <a:solidFill>
+              <a:srgbClr val="E3D9CC"/>
+            </a:solidFill>
+            <a:prstDash val="solid"/>
+          </a:ln>
           <a:effectLst>
-            <a:outerShdw sx="100000" sy="100000" kx="0" ky="0" algn="bl" rotWithShape="0" blurRad="127000" dist="38100" dir="5400000">
-              <a:srgbClr val="000000">
-                <a:alpha val="28000"/>
+            <a:outerShdw sx="100000" sy="100000" kx="0" ky="0" algn="bl" rotWithShape="0" blurRad="114300" dist="38100" dir="5400000">
+              <a:srgbClr val="7A6A55">
+                <a:alpha val="12000"/>
               </a:srgbClr>
             </a:outerShdw>
           </a:effectLst>
@@ -14897,9 +15012,14 @@
             <a:avLst/>
           </a:prstGeom>
           <a:solidFill>
-            <a:srgbClr val="16314F"/>
+            <a:srgbClr val="EADFD0"/>
           </a:solidFill>
-          <a:ln/>
+          <a:ln w="9525">
+            <a:solidFill>
+              <a:srgbClr val="E3D9CC"/>
+            </a:solidFill>
+            <a:prstDash val="solid"/>
+          </a:ln>
         </p:spPr>
       </p:sp>
       <p:pic>
@@ -14953,11 +15073,11 @@
             <a:r>
               <a:rPr lang="en-US" sz="1800" b="1" dirty="0">
                 <a:solidFill>
-                  <a:srgbClr val="C9A961"/>
-                </a:solidFill>
-                <a:latin typeface="Bookman Old Style" pitchFamily="34" charset="0"/>
-                <a:ea typeface="Bookman Old Style" pitchFamily="34" charset="-122"/>
-                <a:cs typeface="Bookman Old Style" pitchFamily="34" charset="-120"/>
+                  <a:srgbClr val="B1937E"/>
+                </a:solidFill>
+                <a:latin typeface="Georgia" pitchFamily="34" charset="0"/>
+                <a:ea typeface="Georgia" pitchFamily="34" charset="-122"/>
+                <a:cs typeface="Georgia" pitchFamily="34" charset="-120"/>
               </a:rPr>
               <a:t>Prova social</a:t>
             </a:r>
@@ -14992,7 +15112,7 @@
             <a:r>
               <a:rPr lang="en-US" sz="1350" dirty="0">
                 <a:solidFill>
-                  <a:srgbClr val="9FB2C9"/>
+                  <a:srgbClr val="8A7E72"/>
                 </a:solidFill>
                 <a:latin typeface="Calibri" pitchFamily="34" charset="0"/>
                 <a:ea typeface="Calibri" pitchFamily="34" charset="-122"/>
@@ -15021,7 +15141,7 @@
           <a:noFill/>
           <a:ln w="9525">
             <a:solidFill>
-              <a:srgbClr val="5C708A">
+              <a:srgbClr val="A89A86">
                 <a:alpha val="60000"/>
               </a:srgbClr>
             </a:solidFill>
@@ -15056,7 +15176,7 @@
             <a:r>
               <a:rPr lang="en-US" sz="900" dirty="0">
                 <a:solidFill>
-                  <a:srgbClr val="5C708A"/>
+                  <a:srgbClr val="A89A86"/>
                 </a:solidFill>
                 <a:latin typeface="Calibri" pitchFamily="34" charset="0"/>
                 <a:ea typeface="Calibri" pitchFamily="34" charset="-122"/>
@@ -15095,7 +15215,7 @@
             <a:r>
               <a:rPr lang="en-US" sz="900" dirty="0">
                 <a:solidFill>
-                  <a:srgbClr val="5C708A"/>
+                  <a:srgbClr val="A89A86"/>
                 </a:solidFill>
                 <a:latin typeface="Calibri" pitchFamily="34" charset="0"/>
                 <a:ea typeface="Calibri" pitchFamily="34" charset="-122"/>
